--- a/ai_generated_deck.pptx
+++ b/ai_generated_deck.pptx
@@ -21,6 +21,9 @@
     <p:sldId id="269" r:id="rId20"/>
     <p:sldId id="270" r:id="rId21"/>
     <p:sldId id="271" r:id="rId22"/>
+    <p:sldId id="272" r:id="rId23"/>
+    <p:sldId id="273" r:id="rId24"/>
+    <p:sldId id="274" r:id="rId25"/>
   </p:sldIdLst>
   <p:sldSz cx="12191695" cy="6858000" type="screen4x3"/>
   <p:notesSz cx="6858000" cy="9144000"/>
@@ -462,19 +465,16 @@
           </c:spPr>
           <c:cat>
             <c:strRef>
-              <c:f>Sheet1!$A$2:$A$5</c:f>
+              <c:f>Sheet1!$A$2:$A$4</c:f>
               <c:strCache>
-                <c:ptCount val="4"/>
+                <c:ptCount val="3"/>
                 <c:pt idx="0">
-                  <c:v>2024E</c:v>
+                  <c:v>2025E</c:v>
                 </c:pt>
                 <c:pt idx="1">
-                  <c:v>2025E</c:v>
+                  <c:v>2026E</c:v>
                 </c:pt>
                 <c:pt idx="2">
-                  <c:v>2026E</c:v>
-                </c:pt>
-                <c:pt idx="3">
                   <c:v>2027E</c:v>
                 </c:pt>
               </c:strCache>
@@ -482,21 +482,18 @@
           </c:cat>
           <c:val>
             <c:numRef>
-              <c:f>Sheet1!$B$2:$B$5</c:f>
+              <c:f>Sheet1!$B$2:$B$4</c:f>
               <c:numCache>
                 <c:formatCode>General</c:formatCode>
-                <c:ptCount val="4"/>
+                <c:ptCount val="3"/>
                 <c:pt idx="0">
-                  <c:v>240</c:v>
+                  <c:v>280</c:v>
                 </c:pt>
                 <c:pt idx="1">
-                  <c:v>280</c:v>
+                  <c:v>320</c:v>
                 </c:pt>
                 <c:pt idx="2">
-                  <c:v>320</c:v>
-                </c:pt>
-                <c:pt idx="3">
-                  <c:v>370</c:v>
+                  <c:v>365</c:v>
                 </c:pt>
               </c:numCache>
             </c:numRef>
@@ -523,19 +520,16 @@
           </c:spPr>
           <c:cat>
             <c:strRef>
-              <c:f>Sheet1!$A$2:$A$5</c:f>
+              <c:f>Sheet1!$A$2:$A$4</c:f>
               <c:strCache>
-                <c:ptCount val="4"/>
+                <c:ptCount val="3"/>
                 <c:pt idx="0">
-                  <c:v>2024E</c:v>
+                  <c:v>2025E</c:v>
                 </c:pt>
                 <c:pt idx="1">
-                  <c:v>2025E</c:v>
+                  <c:v>2026E</c:v>
                 </c:pt>
                 <c:pt idx="2">
-                  <c:v>2026E</c:v>
-                </c:pt>
-                <c:pt idx="3">
                   <c:v>2027E</c:v>
                 </c:pt>
               </c:strCache>
@@ -543,20 +537,17 @@
           </c:cat>
           <c:val>
             <c:numRef>
-              <c:f>Sheet1!$C$2:$C$5</c:f>
+              <c:f>Sheet1!$C$2:$C$4</c:f>
               <c:numCache>
                 <c:formatCode>General</c:formatCode>
-                <c:ptCount val="4"/>
+                <c:ptCount val="3"/>
                 <c:pt idx="0">
-                  <c:v>47</c:v>
+                  <c:v>56</c:v>
                 </c:pt>
                 <c:pt idx="1">
-                  <c:v>56</c:v>
+                  <c:v>64</c:v>
                 </c:pt>
                 <c:pt idx="2">
-                  <c:v>64</c:v>
-                </c:pt>
-                <c:pt idx="3">
                   <c:v>74</c:v>
                 </c:pt>
               </c:numCache>
@@ -676,51 +667,37 @@
               </a:solidFill>
             </c:spPr>
           </c:dPt>
-          <c:dPt>
-            <c:idx val="3"/>
-            <c:spPr>
-              <a:solidFill>
-                <a:srgbClr val="183A58"/>
-              </a:solidFill>
-            </c:spPr>
-          </c:dPt>
           <c:cat>
             <c:strRef>
-              <c:f>Sheet1!$A$2:$A$5</c:f>
+              <c:f>Sheet1!$A$2:$A$4</c:f>
               <c:strCache>
-                <c:ptCount val="4"/>
+                <c:ptCount val="3"/>
                 <c:pt idx="0">
-                  <c:v>PT Nippon Indosari Corpindo Tbk (Sari Roti)</c:v>
+                  <c:v>Sari Roti (PT Nippon Indosari Corpindo Tbk)</c:v>
                 </c:pt>
                 <c:pt idx="1">
                   <c:v>BreadTalk Indonesia</c:v>
                 </c:pt>
                 <c:pt idx="2">
-                  <c:v>Paris Baguette Indonesia</c:v>
-                </c:pt>
-                <c:pt idx="3">
-                  <c:v>Holland Bakery</c:v>
+                  <c:v>Aoka</c:v>
                 </c:pt>
               </c:strCache>
             </c:strRef>
           </c:cat>
           <c:val>
             <c:numRef>
-              <c:f>Sheet1!$B$2:$B$5</c:f>
+              <c:f>Sheet1!$B$2:$B$4</c:f>
               <c:numCache>
                 <c:formatCode>General</c:formatCode>
-                <c:ptCount val="4"/>
+                <c:ptCount val="3"/>
                 <c:pt idx="0">
-                  <c:v>350</c:v>
+                  <c:v>250</c:v>
                 </c:pt>
                 <c:pt idx="1">
                   <c:v>100</c:v>
                 </c:pt>
                 <c:pt idx="2">
-                  <c:v>25</c:v>
-                </c:pt>
-                <c:pt idx="3">
-                  <c:v>40</c:v>
+                  <c:v>50</c:v>
                 </c:pt>
               </c:numCache>
             </c:numRef>
@@ -885,37 +862,75 @@
               </a:ln>
             </c:spPr>
           </c:dPt>
+          <c:dPt>
+            <c:idx val="3"/>
+            <c:spPr>
+              <a:solidFill>
+                <a:srgbClr val="B5975B"/>
+              </a:solidFill>
+              <a:ln>
+                <a:solidFill>
+                  <a:srgbClr val="B5975B"/>
+                </a:solidFill>
+              </a:ln>
+            </c:spPr>
+          </c:dPt>
+          <c:dPt>
+            <c:idx val="4"/>
+            <c:spPr>
+              <a:solidFill>
+                <a:srgbClr val="B5975B"/>
+              </a:solidFill>
+              <a:ln>
+                <a:solidFill>
+                  <a:srgbClr val="B5975B"/>
+                </a:solidFill>
+              </a:ln>
+            </c:spPr>
+          </c:dPt>
           <c:cat>
             <c:strRef>
-              <c:f>Sheet1!$A$2:$A$4</c:f>
+              <c:f>Sheet1!$A$2:$A$6</c:f>
               <c:strCache>
-                <c:ptCount val="3"/>
+                <c:ptCount val="5"/>
                 <c:pt idx="0">
-                  <c:v>B2C</c:v>
+                  <c:v>2020</c:v>
                 </c:pt>
                 <c:pt idx="1">
-                  <c:v>B2B</c:v>
+                  <c:v>2021</c:v>
                 </c:pt>
                 <c:pt idx="2">
-                  <c:v>Group</c:v>
+                  <c:v>2022</c:v>
+                </c:pt>
+                <c:pt idx="3">
+                  <c:v>2023</c:v>
+                </c:pt>
+                <c:pt idx="4">
+                  <c:v>2024E</c:v>
                 </c:pt>
               </c:strCache>
             </c:strRef>
           </c:cat>
           <c:val>
             <c:numRef>
-              <c:f>Sheet1!$B$2:$B$4</c:f>
+              <c:f>Sheet1!$B$2:$B$6</c:f>
               <c:numCache>
                 <c:formatCode>General</c:formatCode>
-                <c:ptCount val="3"/>
+                <c:ptCount val="5"/>
                 <c:pt idx="0">
-                  <c:v>25</c:v>
+                  <c:v>15.0</c:v>
                 </c:pt>
                 <c:pt idx="1">
-                  <c:v>11</c:v>
+                  <c:v>16.6</c:v>
                 </c:pt>
                 <c:pt idx="2">
-                  <c:v>17</c:v>
+                  <c:v>17.2</c:v>
+                </c:pt>
+                <c:pt idx="3">
+                  <c:v>19.0</c:v>
+                </c:pt>
+                <c:pt idx="4">
+                  <c:v>19.6</c:v>
                 </c:pt>
               </c:numCache>
             </c:numRef>
@@ -4102,7 +4117,7 @@
                 </a:solidFill>
                 <a:latin typeface="Arial"/>
               </a:rPr>
-              <a:t>Breadlife is Indonesia’s leading Japanese artisan bakery chain, owned by The Daily Company (DailyCo). Breadlife is renowned for its fresh, preservative-free breads, rapid expansion across Greater Jakarta and beyond, and successful integration of both B2C retail and B2B institutional channels. Since its acquisition by DailyCo in 2021, Breadlife has opened over 100 new outlets, driving a 150% revenue increase from 2022 to 2024.</a:t>
+              <a:t>Breadlife is a leading Indonesian bakery chain, owned by The Daily Company (DailyCo), known for its fresh, preservative-free bread and rapid expansion across Greater Jakarta and key regional cities. Since acquisition by DailyCo in 2021, Breadlife has opened over 100 new outlets, driving a 150% revenue increase and establishing itself as a top challenger in Indonesia's bakery sector.</a:t>
             </a:r>
           </a:p>
         </p:txBody>
@@ -4251,17 +4266,111 @@
             <a:avLst/>
           </a:prstGeom>
           <a:noFill/>
-        </p:spPr>
-        <p:txBody>
-          <a:bodyPr wrap="none">
+          <a:ln>
+            <a:noFill/>
+          </a:ln>
+          <a:effectLst/>
+        </p:spPr>
+        <p:txBody>
+          <a:bodyPr wrap="square">
             <a:spAutoFit/>
           </a:bodyPr>
           <a:lstStyle/>
-        </p:txBody>
-      </p:sp>
-      <p:sp>
-        <p:nvSpPr>
-          <p:cNvPr id="9" name="Rectangle 8"/>
+          <a:p>
+            <a:pPr algn="ctr"/>
+            <a:r>
+              <a:rPr sz="1100" b="1">
+                <a:solidFill>
+                  <a:srgbClr val="183A58"/>
+                </a:solidFill>
+                <a:latin typeface="Arial"/>
+              </a:rPr>
+              <a:t>2018</a:t>
+            </a:r>
+          </a:p>
+        </p:txBody>
+      </p:sp>
+      <p:sp>
+        <p:nvSpPr>
+          <p:cNvPr id="9" name="TextBox 8"/>
+          <p:cNvSpPr txBox="1"/>
+          <p:nvPr/>
+        </p:nvSpPr>
+        <p:spPr>
+          <a:xfrm>
+            <a:off x="4480560" y="2286000"/>
+            <a:ext cx="457200" cy="182880"/>
+          </a:xfrm>
+          <a:prstGeom prst="rect">
+            <a:avLst/>
+          </a:prstGeom>
+          <a:noFill/>
+          <a:ln>
+            <a:noFill/>
+          </a:ln>
+          <a:effectLst/>
+        </p:spPr>
+        <p:txBody>
+          <a:bodyPr wrap="square">
+            <a:spAutoFit/>
+          </a:bodyPr>
+          <a:lstStyle/>
+          <a:p>
+            <a:pPr algn="ctr"/>
+            <a:r>
+              <a:rPr sz="1100" b="1">
+                <a:solidFill>
+                  <a:srgbClr val="183A58"/>
+                </a:solidFill>
+                <a:latin typeface="Arial"/>
+              </a:rPr>
+              <a:t>2025</a:t>
+            </a:r>
+          </a:p>
+        </p:txBody>
+      </p:sp>
+      <p:sp>
+        <p:nvSpPr>
+          <p:cNvPr id="10" name="TextBox 9"/>
+          <p:cNvSpPr txBox="1"/>
+          <p:nvPr/>
+        </p:nvSpPr>
+        <p:spPr>
+          <a:xfrm>
+            <a:off x="4937760" y="2468880"/>
+            <a:ext cx="2743200" cy="274320"/>
+          </a:xfrm>
+          <a:prstGeom prst="rect">
+            <a:avLst/>
+          </a:prstGeom>
+          <a:noFill/>
+          <a:ln>
+            <a:noFill/>
+          </a:ln>
+          <a:effectLst/>
+        </p:spPr>
+        <p:txBody>
+          <a:bodyPr wrap="square">
+            <a:spAutoFit/>
+          </a:bodyPr>
+          <a:lstStyle/>
+          <a:p>
+            <a:pPr algn="l"/>
+            <a:r>
+              <a:rPr sz="900" b="0">
+                <a:solidFill>
+                  <a:srgbClr val="404040"/>
+                </a:solidFill>
+                <a:latin typeface="Arial"/>
+              </a:rPr>
+              <a:t>(9+ years of growth and expansion)</a:t>
+            </a:r>
+          </a:p>
+        </p:txBody>
+      </p:sp>
+      <p:sp>
+        <p:nvSpPr>
+          <p:cNvPr id="11" name="Rectangle 10"/>
           <p:cNvSpPr/>
           <p:nvPr/>
         </p:nvSpPr>
@@ -4305,7 +4414,7 @@
       </p:sp>
       <p:sp>
         <p:nvSpPr>
-          <p:cNvPr id="10" name="TextBox 9"/>
+          <p:cNvPr id="12" name="TextBox 11"/>
           <p:cNvSpPr txBox="1"/>
           <p:nvPr/>
         </p:nvSpPr>
@@ -4344,7 +4453,7 @@
       </p:sp>
       <p:sp>
         <p:nvSpPr>
-          <p:cNvPr id="11" name="Oval 10"/>
+          <p:cNvPr id="13" name="Oval 12"/>
           <p:cNvSpPr/>
           <p:nvPr/>
         </p:nvSpPr>
@@ -4387,7 +4496,7 @@
       </p:sp>
       <p:sp>
         <p:nvSpPr>
-          <p:cNvPr id="12" name="TextBox 11"/>
+          <p:cNvPr id="14" name="TextBox 13"/>
           <p:cNvSpPr txBox="1"/>
           <p:nvPr/>
         </p:nvSpPr>
@@ -4419,14 +4528,14 @@
                 </a:solidFill>
                 <a:latin typeface="Arial"/>
               </a:rPr>
-              <a:t>150% revenue growth from 2022 to 2024.</a:t>
-            </a:r>
-          </a:p>
-        </p:txBody>
-      </p:sp>
-      <p:sp>
-        <p:nvSpPr>
-          <p:cNvPr id="13" name="Oval 12"/>
+              <a:t>Opened 100+ new outlets since 2021 acquisition.</a:t>
+            </a:r>
+          </a:p>
+        </p:txBody>
+      </p:sp>
+      <p:sp>
+        <p:nvSpPr>
+          <p:cNvPr id="15" name="Oval 14"/>
           <p:cNvSpPr/>
           <p:nvPr/>
         </p:nvSpPr>
@@ -4469,7 +4578,7 @@
       </p:sp>
       <p:sp>
         <p:nvSpPr>
-          <p:cNvPr id="14" name="TextBox 13"/>
+          <p:cNvPr id="16" name="TextBox 15"/>
           <p:cNvSpPr txBox="1"/>
           <p:nvPr/>
         </p:nvSpPr>
@@ -4501,14 +4610,14 @@
                 </a:solidFill>
                 <a:latin typeface="Arial"/>
               </a:rPr>
-              <a:t>Over 100 new outlets launched post-acquisition.</a:t>
-            </a:r>
-          </a:p>
-        </p:txBody>
-      </p:sp>
-      <p:sp>
-        <p:nvSpPr>
-          <p:cNvPr id="15" name="Oval 14"/>
+              <a:t>Achieved 150% revenue growth from 2022 to 2024.</a:t>
+            </a:r>
+          </a:p>
+        </p:txBody>
+      </p:sp>
+      <p:sp>
+        <p:nvSpPr>
+          <p:cNvPr id="17" name="Oval 16"/>
           <p:cNvSpPr/>
           <p:nvPr/>
         </p:nvSpPr>
@@ -4551,7 +4660,7 @@
       </p:sp>
       <p:sp>
         <p:nvSpPr>
-          <p:cNvPr id="16" name="TextBox 15"/>
+          <p:cNvPr id="18" name="TextBox 17"/>
           <p:cNvSpPr txBox="1"/>
           <p:nvPr/>
         </p:nvSpPr>
@@ -4583,21 +4692,60 @@
                 </a:solidFill>
                 <a:latin typeface="Arial"/>
               </a:rPr>
-              <a:t>Strong, stable EBITDA margins at group level.</a:t>
-            </a:r>
-          </a:p>
-        </p:txBody>
-      </p:sp>
-      <p:sp>
-        <p:nvSpPr>
-          <p:cNvPr id="17" name="Oval 16"/>
+              <a:t>Established strong B2C and B2B channels for diversified growth.</a:t>
+            </a:r>
+          </a:p>
+        </p:txBody>
+      </p:sp>
+      <p:sp>
+        <p:nvSpPr>
+          <p:cNvPr id="19" name="TextBox 18"/>
+          <p:cNvSpPr txBox="1"/>
+          <p:nvPr/>
+        </p:nvSpPr>
+        <p:spPr>
+          <a:xfrm>
+            <a:off x="731520" y="3108960"/>
+            <a:ext cx="4572000" cy="274320"/>
+          </a:xfrm>
+          <a:prstGeom prst="rect">
+            <a:avLst/>
+          </a:prstGeom>
+          <a:noFill/>
+          <a:ln>
+            <a:noFill/>
+          </a:ln>
+          <a:effectLst/>
+        </p:spPr>
+        <p:txBody>
+          <a:bodyPr wrap="square">
+            <a:spAutoFit/>
+          </a:bodyPr>
+          <a:lstStyle/>
+          <a:p>
+            <a:pPr algn="l"/>
+            <a:r>
+              <a:rPr sz="1400" b="1">
+                <a:solidFill>
+                  <a:srgbClr val="183A58"/>
+                </a:solidFill>
+                <a:latin typeface="Arial"/>
+              </a:rPr>
+              <a:t>Core Service Lines</a:t>
+            </a:r>
+          </a:p>
+        </p:txBody>
+      </p:sp>
+      <p:sp>
+        <p:nvSpPr>
+          <p:cNvPr id="20" name="Oval 19"/>
           <p:cNvSpPr/>
           <p:nvPr/>
         </p:nvSpPr>
         <p:spPr>
           <a:xfrm>
-            <a:off x="7772400" y="4160520"/>
-            <a:ext cx="54864" cy="54864"/>
+            <a:off x="914400" y="3520440"/>
+            <a:ext cx="45720" cy="45720"/>
           </a:xfrm>
           <a:prstGeom prst="ellipse">
             <a:avLst/>
@@ -4633,14 +4781,14 @@
       </p:sp>
       <p:sp>
         <p:nvSpPr>
-          <p:cNvPr id="18" name="TextBox 17"/>
-          <p:cNvSpPr txBox="1"/>
-          <p:nvPr/>
-        </p:nvSpPr>
-        <p:spPr>
-          <a:xfrm>
-            <a:off x="7909560" y="4114800"/>
-            <a:ext cx="3474720" cy="320040"/>
+          <p:cNvPr id="21" name="TextBox 20"/>
+          <p:cNvSpPr txBox="1"/>
+          <p:nvPr/>
+        </p:nvSpPr>
+        <p:spPr>
+          <a:xfrm>
+            <a:off x="1051560" y="3474720"/>
+            <a:ext cx="2560320" cy="411480"/>
           </a:xfrm>
           <a:prstGeom prst="rect">
             <a:avLst/>
@@ -4665,59 +4813,20 @@
                 </a:solidFill>
                 <a:latin typeface="Arial"/>
               </a:rPr>
-              <a:t>Largest Japanese artisan bakery franchise in Indonesia.</a:t>
-            </a:r>
-          </a:p>
-        </p:txBody>
-      </p:sp>
-      <p:sp>
-        <p:nvSpPr>
-          <p:cNvPr id="19" name="TextBox 18"/>
-          <p:cNvSpPr txBox="1"/>
-          <p:nvPr/>
-        </p:nvSpPr>
-        <p:spPr>
-          <a:xfrm>
-            <a:off x="731520" y="3108960"/>
-            <a:ext cx="4572000" cy="274320"/>
-          </a:xfrm>
-          <a:prstGeom prst="rect">
-            <a:avLst/>
-          </a:prstGeom>
-          <a:noFill/>
-          <a:ln>
-            <a:noFill/>
-          </a:ln>
-          <a:effectLst/>
-        </p:spPr>
-        <p:txBody>
-          <a:bodyPr wrap="square">
-            <a:spAutoFit/>
-          </a:bodyPr>
-          <a:lstStyle/>
-          <a:p>
-            <a:pPr algn="l"/>
-            <a:r>
-              <a:rPr sz="1400" b="1">
-                <a:solidFill>
-                  <a:srgbClr val="183A58"/>
-                </a:solidFill>
-                <a:latin typeface="Arial"/>
-              </a:rPr>
-              <a:t>Core Service Lines</a:t>
-            </a:r>
-          </a:p>
-        </p:txBody>
-      </p:sp>
-      <p:sp>
-        <p:nvSpPr>
-          <p:cNvPr id="20" name="Oval 19"/>
+              <a:t>Fresh bread</a:t>
+            </a:r>
+          </a:p>
+        </p:txBody>
+      </p:sp>
+      <p:sp>
+        <p:nvSpPr>
+          <p:cNvPr id="22" name="Oval 21"/>
           <p:cNvSpPr/>
           <p:nvPr/>
         </p:nvSpPr>
         <p:spPr>
           <a:xfrm>
-            <a:off x="914400" y="3520440"/>
+            <a:off x="914400" y="4023359"/>
             <a:ext cx="45720" cy="45720"/>
           </a:xfrm>
           <a:prstGeom prst="ellipse">
@@ -4754,13 +4863,13 @@
       </p:sp>
       <p:sp>
         <p:nvSpPr>
-          <p:cNvPr id="21" name="TextBox 20"/>
-          <p:cNvSpPr txBox="1"/>
-          <p:nvPr/>
-        </p:nvSpPr>
-        <p:spPr>
-          <a:xfrm>
-            <a:off x="1051560" y="3474720"/>
+          <p:cNvPr id="23" name="TextBox 22"/>
+          <p:cNvSpPr txBox="1"/>
+          <p:nvPr/>
+        </p:nvSpPr>
+        <p:spPr>
+          <a:xfrm>
+            <a:off x="1051560" y="3977639"/>
             <a:ext cx="2560320" cy="411480"/>
           </a:xfrm>
           <a:prstGeom prst="rect">
@@ -4786,20 +4895,20 @@
                 </a:solidFill>
                 <a:latin typeface="Arial"/>
               </a:rPr>
-              <a:t>Fresh, preservative-free breads and premium baked goods.</a:t>
-            </a:r>
-          </a:p>
-        </p:txBody>
-      </p:sp>
-      <p:sp>
-        <p:nvSpPr>
-          <p:cNvPr id="22" name="Oval 21"/>
+              <a:t>Cakes and pastries</a:t>
+            </a:r>
+          </a:p>
+        </p:txBody>
+      </p:sp>
+      <p:sp>
+        <p:nvSpPr>
+          <p:cNvPr id="24" name="Oval 23"/>
           <p:cNvSpPr/>
           <p:nvPr/>
         </p:nvSpPr>
         <p:spPr>
           <a:xfrm>
-            <a:off x="914400" y="4023359"/>
+            <a:off x="3840480" y="3520440"/>
             <a:ext cx="45720" cy="45720"/>
           </a:xfrm>
           <a:prstGeom prst="ellipse">
@@ -4836,13 +4945,13 @@
       </p:sp>
       <p:sp>
         <p:nvSpPr>
-          <p:cNvPr id="23" name="TextBox 22"/>
-          <p:cNvSpPr txBox="1"/>
-          <p:nvPr/>
-        </p:nvSpPr>
-        <p:spPr>
-          <a:xfrm>
-            <a:off x="1051560" y="3977639"/>
+          <p:cNvPr id="25" name="TextBox 24"/>
+          <p:cNvSpPr txBox="1"/>
+          <p:nvPr/>
+        </p:nvSpPr>
+        <p:spPr>
+          <a:xfrm>
+            <a:off x="3977640" y="3474720"/>
             <a:ext cx="2560320" cy="411480"/>
           </a:xfrm>
           <a:prstGeom prst="rect">
@@ -4868,64 +4977,21 @@
                 </a:solidFill>
                 <a:latin typeface="Arial"/>
               </a:rPr>
-              <a:t>B2C retail network and B2B institutional catering.</a:t>
-            </a:r>
-          </a:p>
-        </p:txBody>
-      </p:sp>
-      <p:sp>
-        <p:nvSpPr>
-          <p:cNvPr id="24" name="Oval 23"/>
-          <p:cNvSpPr/>
-          <p:nvPr/>
-        </p:nvSpPr>
-        <p:spPr>
-          <a:xfrm>
-            <a:off x="3840480" y="3520440"/>
-            <a:ext cx="45720" cy="45720"/>
-          </a:xfrm>
-          <a:prstGeom prst="ellipse">
-            <a:avLst/>
-          </a:prstGeom>
-          <a:solidFill>
-            <a:srgbClr val="B5975B"/>
-          </a:solidFill>
-          <a:ln>
-            <a:noFill/>
-          </a:ln>
-        </p:spPr>
-        <p:style>
-          <a:lnRef idx="1">
-            <a:schemeClr val="accent1"/>
-          </a:lnRef>
-          <a:fillRef idx="3">
-            <a:schemeClr val="accent1"/>
-          </a:fillRef>
-          <a:effectRef idx="2">
-            <a:schemeClr val="accent1"/>
-          </a:effectRef>
-          <a:fontRef idx="minor">
-            <a:schemeClr val="lt1"/>
-          </a:fontRef>
-        </p:style>
-        <p:txBody>
-          <a:bodyPr rtlCol="0" anchor="ctr"/>
-          <a:lstStyle/>
-          <a:p>
-            <a:pPr algn="ctr"/>
-          </a:p>
-        </p:txBody>
-      </p:sp>
-      <p:sp>
-        <p:nvSpPr>
-          <p:cNvPr id="25" name="TextBox 24"/>
-          <p:cNvSpPr txBox="1"/>
-          <p:nvPr/>
-        </p:nvSpPr>
-        <p:spPr>
-          <a:xfrm>
-            <a:off x="3977640" y="3474720"/>
-            <a:ext cx="2560320" cy="411480"/>
+              <a:t>B2B institutional sales</a:t>
+            </a:r>
+          </a:p>
+        </p:txBody>
+      </p:sp>
+      <p:sp>
+        <p:nvSpPr>
+          <p:cNvPr id="26" name="TextBox 25"/>
+          <p:cNvSpPr txBox="1"/>
+          <p:nvPr/>
+        </p:nvSpPr>
+        <p:spPr>
+          <a:xfrm>
+            <a:off x="731520" y="5669280"/>
+            <a:ext cx="6400800" cy="274320"/>
           </a:xfrm>
           <a:prstGeom prst="rect">
             <a:avLst/>
@@ -4944,27 +5010,27 @@
           <a:p>
             <a:pPr algn="l"/>
             <a:r>
-              <a:rPr sz="1000" b="0">
-                <a:solidFill>
-                  <a:srgbClr val="404040"/>
+              <a:rPr sz="1400" b="1">
+                <a:solidFill>
+                  <a:srgbClr val="183A58"/>
                 </a:solidFill>
                 <a:latin typeface="Arial"/>
               </a:rPr>
-              <a:t>Cake and pastry innovation for diverse customer segments.</a:t>
-            </a:r>
-          </a:p>
-        </p:txBody>
-      </p:sp>
-      <p:sp>
-        <p:nvSpPr>
-          <p:cNvPr id="26" name="TextBox 25"/>
-          <p:cNvSpPr txBox="1"/>
-          <p:nvPr/>
-        </p:nvSpPr>
-        <p:spPr>
-          <a:xfrm>
-            <a:off x="731520" y="5669280"/>
-            <a:ext cx="6400800" cy="274320"/>
+              <a:t>Strategic Market Positioning</a:t>
+            </a:r>
+          </a:p>
+        </p:txBody>
+      </p:sp>
+      <p:sp>
+        <p:nvSpPr>
+          <p:cNvPr id="27" name="TextBox 26"/>
+          <p:cNvSpPr txBox="1"/>
+          <p:nvPr/>
+        </p:nvSpPr>
+        <p:spPr>
+          <a:xfrm>
+            <a:off x="731520" y="6035040"/>
+            <a:ext cx="10515600" cy="548640"/>
           </a:xfrm>
           <a:prstGeom prst="rect">
             <a:avLst/>
@@ -4983,52 +5049,13 @@
           <a:p>
             <a:pPr algn="l"/>
             <a:r>
-              <a:rPr sz="1400" b="1">
-                <a:solidFill>
-                  <a:srgbClr val="183A58"/>
+              <a:rPr sz="1100" b="0">
+                <a:solidFill>
+                  <a:srgbClr val="404040"/>
                 </a:solidFill>
                 <a:latin typeface="Arial"/>
               </a:rPr>
-              <a:t>Strategic Market Positioning</a:t>
-            </a:r>
-          </a:p>
-        </p:txBody>
-      </p:sp>
-      <p:sp>
-        <p:nvSpPr>
-          <p:cNvPr id="27" name="TextBox 26"/>
-          <p:cNvSpPr txBox="1"/>
-          <p:nvPr/>
-        </p:nvSpPr>
-        <p:spPr>
-          <a:xfrm>
-            <a:off x="731520" y="6035040"/>
-            <a:ext cx="10515600" cy="548640"/>
-          </a:xfrm>
-          <a:prstGeom prst="rect">
-            <a:avLst/>
-          </a:prstGeom>
-          <a:noFill/>
-          <a:ln>
-            <a:noFill/>
-          </a:ln>
-          <a:effectLst/>
-        </p:spPr>
-        <p:txBody>
-          <a:bodyPr wrap="square">
-            <a:spAutoFit/>
-          </a:bodyPr>
-          <a:lstStyle/>
-          <a:p>
-            <a:pPr algn="l"/>
-            <a:r>
-              <a:rPr sz="1100" b="0">
-                <a:solidFill>
-                  <a:srgbClr val="404040"/>
-                </a:solidFill>
-                <a:latin typeface="Arial"/>
-              </a:rPr>
-              <a:t>Breadlife combines premium, health-oriented bakery products with an accessible price point, a rapidly expanding outlet footprint, and a unique hybrid retail/B2B business model.</a:t>
+              <a:t>Breadlife is positioned as Indonesia’s leading fresh bakery chain, blending affordable, high-quality baked goods with a rapidly growing footprint and multi-channel sales.</a:t>
             </a:r>
           </a:p>
         </p:txBody>
@@ -5736,7 +5763,7 @@
             <a:avLst/>
           </a:prstGeom>
           <a:solidFill>
-            <a:srgbClr val="46648C"/>
+            <a:srgbClr val="183A58"/>
           </a:solidFill>
           <a:ln w="6350">
             <a:solidFill>
@@ -5790,7 +5817,7 @@
               <a:lnSpc>
                 <a:spcPct val="110000"/>
               </a:lnSpc>
-              <a:defRPr sz="1100" b="1">
+              <a:defRPr sz="900" b="1">
                 <a:solidFill>
                   <a:srgbClr val="FFFFFF"/>
                 </a:solidFill>
@@ -5798,7 +5825,11 @@
               </a:defRPr>
             </a:pPr>
             <a:r>
-              <a:t>Trading Comps</a:t>
+              <a:t>Comparable</a:t>
+            </a:r>
+            <a:br/>
+            <a:r>
+              <a:t>Company Analysis</a:t>
             </a:r>
           </a:p>
         </p:txBody>
@@ -5872,7 +5903,7 @@
               <a:lnSpc>
                 <a:spcPct val="110000"/>
               </a:lnSpc>
-              <a:defRPr sz="900" b="0">
+              <a:defRPr sz="800" b="0">
                 <a:solidFill>
                   <a:srgbClr val="404040"/>
                 </a:solidFill>
@@ -5880,11 +5911,15 @@
               </a:defRPr>
             </a:pPr>
             <a:r>
-              <a:t>In line with Sari Roti and BreadTalk peer</a:t>
+              <a:t>Breadlife trades at a discount to Sari Roti</a:t>
             </a:r>
             <a:br/>
             <a:r>
-              <a:t>group; reflects premium, high-growth profile.</a:t>
+              <a:t>due to smaller scale but commands premium</a:t>
+            </a:r>
+            <a:br/>
+            <a:r>
+              <a:t>versus regional chains.</a:t>
             </a:r>
           </a:p>
         </p:txBody>
@@ -5966,7 +6001,7 @@
               </a:defRPr>
             </a:pPr>
             <a:r>
-              <a:t>US$470–610m</a:t>
+              <a:t>USD 240M</a:t>
             </a:r>
           </a:p>
         </p:txBody>
@@ -6040,7 +6075,7 @@
               <a:lnSpc>
                 <a:spcPct val="110000"/>
               </a:lnSpc>
-              <a:defRPr sz="1100" b="0">
+              <a:defRPr sz="900" b="0">
                 <a:solidFill>
                   <a:srgbClr val="404040"/>
                 </a:solidFill>
@@ -6048,7 +6083,11 @@
               </a:defRPr>
             </a:pPr>
             <a:r>
-              <a:t>EV/EBITDA</a:t>
+              <a:t>2024E</a:t>
+            </a:r>
+            <a:br/>
+            <a:r>
+              <a:t>Revenue</a:t>
             </a:r>
           </a:p>
         </p:txBody>
@@ -6130,7 +6169,7 @@
               </a:defRPr>
             </a:pPr>
             <a:r>
-              <a:t>10x–13x</a:t>
+              <a:t>1.0x</a:t>
             </a:r>
           </a:p>
         </p:txBody>
@@ -6212,7 +6251,7 @@
               </a:defRPr>
             </a:pPr>
             <a:r>
-              <a:t>9x–12x</a:t>
+              <a:t>1.1x</a:t>
             </a:r>
           </a:p>
         </p:txBody>
@@ -6298,7 +6337,7 @@
             </a:r>
             <a:br/>
             <a:r>
-              <a:t>Transactions</a:t>
+              <a:t>Transaction</a:t>
             </a:r>
           </a:p>
         </p:txBody>
@@ -6380,11 +6419,11 @@
               </a:defRPr>
             </a:pPr>
             <a:r>
-              <a:t>Southeast Asian branded bakery and QSR deals</a:t>
+              <a:t>Recent Aoka transaction benchmarks market</a:t>
             </a:r>
             <a:br/>
             <a:r>
-              <a:t>last 3 years.</a:t>
+              <a:t>appetite for mid-size bakery chains.</a:t>
             </a:r>
           </a:p>
         </p:txBody>
@@ -6466,7 +6505,7 @@
               </a:defRPr>
             </a:pPr>
             <a:r>
-              <a:t>US$400–650m</a:t>
+              <a:t>USD 50M</a:t>
             </a:r>
           </a:p>
         </p:txBody>
@@ -6540,7 +6579,7 @@
               <a:lnSpc>
                 <a:spcPct val="110000"/>
               </a:lnSpc>
-              <a:defRPr sz="1100" b="0">
+              <a:defRPr sz="900" b="0">
                 <a:solidFill>
                   <a:srgbClr val="404040"/>
                 </a:solidFill>
@@ -6548,7 +6587,11 @@
               </a:defRPr>
             </a:pPr>
             <a:r>
-              <a:t>EV/EBITDA</a:t>
+              <a:t>2025E</a:t>
+            </a:r>
+            <a:br/>
+            <a:r>
+              <a:t>Revenue</a:t>
             </a:r>
           </a:p>
         </p:txBody>
@@ -6630,7 +6673,7 @@
               </a:defRPr>
             </a:pPr>
             <a:r>
-              <a:t>8x–14x</a:t>
+              <a:t>1.0x</a:t>
             </a:r>
           </a:p>
         </p:txBody>
@@ -6712,7 +6755,7 @@
               </a:defRPr>
             </a:pPr>
             <a:r>
-              <a:t>8x–13x</a:t>
+              <a:t>1.0x</a:t>
             </a:r>
           </a:p>
         </p:txBody>
@@ -6786,7 +6829,7 @@
               <a:lnSpc>
                 <a:spcPct val="110000"/>
               </a:lnSpc>
-              <a:defRPr sz="1100" b="1">
+              <a:defRPr sz="900" b="1">
                 <a:solidFill>
                   <a:srgbClr val="FFFFFF"/>
                 </a:solidFill>
@@ -6794,7 +6837,11 @@
               </a:defRPr>
             </a:pPr>
             <a:r>
-              <a:t>DCF</a:t>
+              <a:t>Discounted Cash</a:t>
+            </a:r>
+            <a:br/>
+            <a:r>
+              <a:t>Flow</a:t>
             </a:r>
           </a:p>
         </p:txBody>
@@ -6876,11 +6923,11 @@
               </a:defRPr>
             </a:pPr>
             <a:r>
-              <a:t>Based on projected CAGR of 15% revenue, 20%</a:t>
+              <a:t>DCF yields valuation supported by strong</a:t>
             </a:r>
             <a:br/>
             <a:r>
-              <a:t>EBITDA margin, terminal growth 3%.</a:t>
+              <a:t>margin expansion and outlet growth.</a:t>
             </a:r>
           </a:p>
         </p:txBody>
@@ -6962,7 +7009,7 @@
               </a:defRPr>
             </a:pPr>
             <a:r>
-              <a:t>US$500–700m</a:t>
+              <a:t>USD 220M</a:t>
             </a:r>
           </a:p>
         </p:txBody>
@@ -7036,7 +7083,7 @@
               <a:lnSpc>
                 <a:spcPct val="110000"/>
               </a:lnSpc>
-              <a:defRPr sz="900" b="0">
+              <a:defRPr sz="1100" b="0">
                 <a:solidFill>
                   <a:srgbClr val="404040"/>
                 </a:solidFill>
@@ -7044,11 +7091,7 @@
               </a:defRPr>
             </a:pPr>
             <a:r>
-              <a:t>DCF</a:t>
-            </a:r>
-            <a:br/>
-            <a:r>
-              <a:t>Valuation</a:t>
+              <a:t>2025E EBITDA</a:t>
             </a:r>
           </a:p>
         </p:txBody>
@@ -7130,7 +7173,7 @@
               </a:defRPr>
             </a:pPr>
             <a:r>
-              <a:t>N/A</a:t>
+              <a:t>4.0x</a:t>
             </a:r>
           </a:p>
         </p:txBody>
@@ -7212,7 +7255,7 @@
               </a:defRPr>
             </a:pPr>
             <a:r>
-              <a:t>N/A</a:t>
+              <a:t>3.8x</a:t>
             </a:r>
           </a:p>
         </p:txBody>
@@ -7226,88 +7269,7 @@
         <p:spPr>
           <a:xfrm>
             <a:off x="182880" y="1737360"/>
-            <a:ext cx="822960" cy="1097280"/>
-          </a:xfrm>
-          <a:prstGeom prst="rect">
-            <a:avLst/>
-          </a:prstGeom>
-          <a:solidFill>
-            <a:srgbClr val="46648C"/>
-          </a:solidFill>
-          <a:ln w="6350">
-            <a:solidFill>
-              <a:srgbClr val="46648C"/>
-            </a:solidFill>
-          </a:ln>
-        </p:spPr>
-        <p:style>
-          <a:lnRef idx="1">
-            <a:schemeClr val="accent1"/>
-          </a:lnRef>
-          <a:fillRef idx="3">
-            <a:schemeClr val="accent1"/>
-          </a:fillRef>
-          <a:effectRef idx="2">
-            <a:schemeClr val="accent1"/>
-          </a:effectRef>
-          <a:fontRef idx="minor">
-            <a:schemeClr val="lt1"/>
-          </a:fontRef>
-        </p:style>
-        <p:txBody>
-          <a:bodyPr rtlCol="0" anchor="ctr"/>
-          <a:lstStyle/>
-          <a:p>
-            <a:pPr algn="ctr"/>
-          </a:p>
-        </p:txBody>
-      </p:sp>
-      <p:sp>
-        <p:nvSpPr>
-          <p:cNvPr id="54" name="TextBox 53"/>
-          <p:cNvSpPr txBox="1"/>
-          <p:nvPr/>
-        </p:nvSpPr>
-        <p:spPr>
-          <a:xfrm>
-            <a:off x="182880" y="1737360"/>
-            <a:ext cx="822960" cy="1097280"/>
-          </a:xfrm>
-          <a:prstGeom prst="rect">
-            <a:avLst/>
-          </a:prstGeom>
-          <a:noFill/>
-        </p:spPr>
-        <p:txBody>
-          <a:bodyPr wrap="square" anchor="ctr" lIns="18288" rIns="18288" tIns="18288" bIns="18288">
-            <a:spAutoFit/>
-          </a:bodyPr>
-          <a:lstStyle/>
-          <a:p>
-            <a:pPr algn="ctr">
-              <a:defRPr sz="900" b="1">
-                <a:solidFill>
-                  <a:srgbClr val="FFFFFF"/>
-                </a:solidFill>
-                <a:latin typeface="Arial"/>
-              </a:defRPr>
-            </a:pPr>
-            <a:r>
-              <a:t>TRADING COMPS</a:t>
-            </a:r>
-          </a:p>
-        </p:txBody>
-      </p:sp>
-      <p:sp>
-        <p:nvSpPr>
-          <p:cNvPr id="55" name="Rectangle 54"/>
-          <p:cNvSpPr/>
-          <p:nvPr/>
-        </p:nvSpPr>
-        <p:spPr>
-          <a:xfrm>
-            <a:off x="182880" y="2834640"/>
-            <a:ext cx="822960" cy="1097280"/>
+            <a:ext cx="822960" cy="2194560"/>
           </a:xfrm>
           <a:prstGeom prst="rect">
             <a:avLst/>
@@ -7345,14 +7307,14 @@
       </p:sp>
       <p:sp>
         <p:nvSpPr>
-          <p:cNvPr id="56" name="TextBox 55"/>
-          <p:cNvSpPr txBox="1"/>
-          <p:nvPr/>
-        </p:nvSpPr>
-        <p:spPr>
-          <a:xfrm>
-            <a:off x="182880" y="2834640"/>
-            <a:ext cx="822960" cy="1097280"/>
+          <p:cNvPr id="54" name="TextBox 53"/>
+          <p:cNvSpPr txBox="1"/>
+          <p:nvPr/>
+        </p:nvSpPr>
+        <p:spPr>
+          <a:xfrm>
+            <a:off x="182880" y="1737360"/>
+            <a:ext cx="822960" cy="2194560"/>
           </a:xfrm>
           <a:prstGeom prst="rect">
             <a:avLst/>
@@ -7381,7 +7343,7 @@
       </p:sp>
       <p:sp>
         <p:nvSpPr>
-          <p:cNvPr id="57" name="Rectangle 56"/>
+          <p:cNvPr id="55" name="Rectangle 54"/>
           <p:cNvSpPr/>
           <p:nvPr/>
         </p:nvSpPr>
@@ -7426,7 +7388,7 @@
       </p:sp>
       <p:sp>
         <p:nvSpPr>
-          <p:cNvPr id="58" name="TextBox 57"/>
+          <p:cNvPr id="56" name="TextBox 55"/>
           <p:cNvSpPr txBox="1"/>
           <p:nvPr/>
         </p:nvSpPr>
@@ -7462,7 +7424,7 @@
       </p:sp>
       <p:sp>
         <p:nvSpPr>
-          <p:cNvPr id="59" name="TextBox 58"/>
+          <p:cNvPr id="57" name="TextBox 56"/>
           <p:cNvSpPr txBox="1"/>
           <p:nvPr/>
         </p:nvSpPr>
@@ -7498,7 +7460,7 @@
       </p:sp>
       <p:sp>
         <p:nvSpPr>
-          <p:cNvPr id="60" name="TextBox 59"/>
+          <p:cNvPr id="58" name="TextBox 57"/>
           <p:cNvSpPr txBox="1"/>
           <p:nvPr/>
         </p:nvSpPr>
@@ -7664,1157 +7626,6 @@
           </a:p>
         </p:txBody>
       </p:sp>
-      <p:sp>
-        <p:nvSpPr>
-          <p:cNvPr id="5" name="Rectangle 4"/>
-          <p:cNvSpPr/>
-          <p:nvPr/>
-        </p:nvSpPr>
-        <p:spPr>
-          <a:xfrm>
-            <a:off x="1645920" y="2569464"/>
-            <a:ext cx="2804160" cy="905256"/>
-          </a:xfrm>
-          <a:prstGeom prst="rect">
-            <a:avLst/>
-          </a:prstGeom>
-          <a:solidFill>
-            <a:srgbClr val="183A58"/>
-          </a:solidFill>
-          <a:ln>
-            <a:noFill/>
-          </a:ln>
-        </p:spPr>
-        <p:style>
-          <a:lnRef idx="1">
-            <a:schemeClr val="accent1"/>
-          </a:lnRef>
-          <a:fillRef idx="3">
-            <a:schemeClr val="accent1"/>
-          </a:fillRef>
-          <a:effectRef idx="2">
-            <a:schemeClr val="accent1"/>
-          </a:effectRef>
-          <a:fontRef idx="minor">
-            <a:schemeClr val="lt1"/>
-          </a:fontRef>
-        </p:style>
-        <p:txBody>
-          <a:bodyPr rtlCol="0" anchor="ctr"/>
-          <a:lstStyle/>
-          <a:p>
-            <a:pPr algn="ctr"/>
-          </a:p>
-        </p:txBody>
-      </p:sp>
-      <p:sp>
-        <p:nvSpPr>
-          <p:cNvPr id="6" name="TextBox 5"/>
-          <p:cNvSpPr txBox="1"/>
-          <p:nvPr/>
-        </p:nvSpPr>
-        <p:spPr>
-          <a:xfrm>
-            <a:off x="1645920" y="2340864"/>
-            <a:ext cx="2804160" cy="182880"/>
-          </a:xfrm>
-          <a:prstGeom prst="rect">
-            <a:avLst/>
-          </a:prstGeom>
-          <a:noFill/>
-        </p:spPr>
-        <p:txBody>
-          <a:bodyPr wrap="none">
-            <a:spAutoFit/>
-          </a:bodyPr>
-          <a:lstStyle/>
-          <a:p>
-            <a:pPr algn="ctr">
-              <a:defRPr sz="900" b="1">
-                <a:latin typeface="Arial"/>
-              </a:defRPr>
-            </a:pPr>
-            <a:r>
-              <a:t>2.2x</a:t>
-            </a:r>
-          </a:p>
-        </p:txBody>
-      </p:sp>
-      <p:sp>
-        <p:nvSpPr>
-          <p:cNvPr id="7" name="TextBox 6"/>
-          <p:cNvSpPr txBox="1"/>
-          <p:nvPr/>
-        </p:nvSpPr>
-        <p:spPr>
-          <a:xfrm>
-            <a:off x="1645920" y="3566160"/>
-            <a:ext cx="2804160" cy="182880"/>
-          </a:xfrm>
-          <a:prstGeom prst="rect">
-            <a:avLst/>
-          </a:prstGeom>
-          <a:noFill/>
-        </p:spPr>
-        <p:txBody>
-          <a:bodyPr wrap="none">
-            <a:spAutoFit/>
-          </a:bodyPr>
-          <a:lstStyle/>
-          <a:p>
-            <a:pPr algn="ctr">
-              <a:defRPr sz="900">
-                <a:latin typeface="Arial"/>
-              </a:defRPr>
-            </a:pPr>
-            <a:r>
-              <a:t>T1</a:t>
-            </a:r>
-          </a:p>
-        </p:txBody>
-      </p:sp>
-      <p:sp>
-        <p:nvSpPr>
-          <p:cNvPr id="8" name="Rectangle 7"/>
-          <p:cNvSpPr/>
-          <p:nvPr/>
-        </p:nvSpPr>
-        <p:spPr>
-          <a:xfrm>
-            <a:off x="4541520" y="2651760"/>
-            <a:ext cx="2804160" cy="822960"/>
-          </a:xfrm>
-          <a:prstGeom prst="rect">
-            <a:avLst/>
-          </a:prstGeom>
-          <a:solidFill>
-            <a:srgbClr val="183A58"/>
-          </a:solidFill>
-          <a:ln>
-            <a:noFill/>
-          </a:ln>
-        </p:spPr>
-        <p:style>
-          <a:lnRef idx="1">
-            <a:schemeClr val="accent1"/>
-          </a:lnRef>
-          <a:fillRef idx="3">
-            <a:schemeClr val="accent1"/>
-          </a:fillRef>
-          <a:effectRef idx="2">
-            <a:schemeClr val="accent1"/>
-          </a:effectRef>
-          <a:fontRef idx="minor">
-            <a:schemeClr val="lt1"/>
-          </a:fontRef>
-        </p:style>
-        <p:txBody>
-          <a:bodyPr rtlCol="0" anchor="ctr"/>
-          <a:lstStyle/>
-          <a:p>
-            <a:pPr algn="ctr"/>
-          </a:p>
-        </p:txBody>
-      </p:sp>
-      <p:sp>
-        <p:nvSpPr>
-          <p:cNvPr id="9" name="TextBox 8"/>
-          <p:cNvSpPr txBox="1"/>
-          <p:nvPr/>
-        </p:nvSpPr>
-        <p:spPr>
-          <a:xfrm>
-            <a:off x="4541520" y="2423160"/>
-            <a:ext cx="2804160" cy="182880"/>
-          </a:xfrm>
-          <a:prstGeom prst="rect">
-            <a:avLst/>
-          </a:prstGeom>
-          <a:noFill/>
-        </p:spPr>
-        <p:txBody>
-          <a:bodyPr wrap="none">
-            <a:spAutoFit/>
-          </a:bodyPr>
-          <a:lstStyle/>
-          <a:p>
-            <a:pPr algn="ctr">
-              <a:defRPr sz="900" b="1">
-                <a:latin typeface="Arial"/>
-              </a:defRPr>
-            </a:pPr>
-            <a:r>
-              <a:t>2.0x</a:t>
-            </a:r>
-          </a:p>
-        </p:txBody>
-      </p:sp>
-      <p:sp>
-        <p:nvSpPr>
-          <p:cNvPr id="10" name="TextBox 9"/>
-          <p:cNvSpPr txBox="1"/>
-          <p:nvPr/>
-        </p:nvSpPr>
-        <p:spPr>
-          <a:xfrm>
-            <a:off x="4541520" y="3566160"/>
-            <a:ext cx="2804160" cy="182880"/>
-          </a:xfrm>
-          <a:prstGeom prst="rect">
-            <a:avLst/>
-          </a:prstGeom>
-          <a:noFill/>
-        </p:spPr>
-        <p:txBody>
-          <a:bodyPr wrap="none">
-            <a:spAutoFit/>
-          </a:bodyPr>
-          <a:lstStyle/>
-          <a:p>
-            <a:pPr algn="ctr">
-              <a:defRPr sz="900">
-                <a:latin typeface="Arial"/>
-              </a:defRPr>
-            </a:pPr>
-            <a:r>
-              <a:t>T2</a:t>
-            </a:r>
-          </a:p>
-        </p:txBody>
-      </p:sp>
-      <p:sp>
-        <p:nvSpPr>
-          <p:cNvPr id="11" name="Rectangle 10"/>
-          <p:cNvSpPr/>
-          <p:nvPr/>
-        </p:nvSpPr>
-        <p:spPr>
-          <a:xfrm>
-            <a:off x="7437120" y="2939796"/>
-            <a:ext cx="2804160" cy="534924"/>
-          </a:xfrm>
-          <a:prstGeom prst="rect">
-            <a:avLst/>
-          </a:prstGeom>
-          <a:solidFill>
-            <a:srgbClr val="183A58"/>
-          </a:solidFill>
-          <a:ln>
-            <a:noFill/>
-          </a:ln>
-        </p:spPr>
-        <p:style>
-          <a:lnRef idx="1">
-            <a:schemeClr val="accent1"/>
-          </a:lnRef>
-          <a:fillRef idx="3">
-            <a:schemeClr val="accent1"/>
-          </a:fillRef>
-          <a:effectRef idx="2">
-            <a:schemeClr val="accent1"/>
-          </a:effectRef>
-          <a:fontRef idx="minor">
-            <a:schemeClr val="lt1"/>
-          </a:fontRef>
-        </p:style>
-        <p:txBody>
-          <a:bodyPr rtlCol="0" anchor="ctr"/>
-          <a:lstStyle/>
-          <a:p>
-            <a:pPr algn="ctr"/>
-          </a:p>
-        </p:txBody>
-      </p:sp>
-      <p:sp>
-        <p:nvSpPr>
-          <p:cNvPr id="12" name="TextBox 11"/>
-          <p:cNvSpPr txBox="1"/>
-          <p:nvPr/>
-        </p:nvSpPr>
-        <p:spPr>
-          <a:xfrm>
-            <a:off x="7437120" y="2711196"/>
-            <a:ext cx="2804160" cy="182880"/>
-          </a:xfrm>
-          <a:prstGeom prst="rect">
-            <a:avLst/>
-          </a:prstGeom>
-          <a:noFill/>
-        </p:spPr>
-        <p:txBody>
-          <a:bodyPr wrap="none">
-            <a:spAutoFit/>
-          </a:bodyPr>
-          <a:lstStyle/>
-          <a:p>
-            <a:pPr algn="ctr">
-              <a:defRPr sz="900" b="1">
-                <a:latin typeface="Arial"/>
-              </a:defRPr>
-            </a:pPr>
-            <a:r>
-              <a:t>1.3x</a:t>
-            </a:r>
-          </a:p>
-        </p:txBody>
-      </p:sp>
-      <p:sp>
-        <p:nvSpPr>
-          <p:cNvPr id="13" name="TextBox 12"/>
-          <p:cNvSpPr txBox="1"/>
-          <p:nvPr/>
-        </p:nvSpPr>
-        <p:spPr>
-          <a:xfrm>
-            <a:off x="7437120" y="3566160"/>
-            <a:ext cx="2804160" cy="182880"/>
-          </a:xfrm>
-          <a:prstGeom prst="rect">
-            <a:avLst/>
-          </a:prstGeom>
-          <a:noFill/>
-        </p:spPr>
-        <p:txBody>
-          <a:bodyPr wrap="none">
-            <a:spAutoFit/>
-          </a:bodyPr>
-          <a:lstStyle/>
-          <a:p>
-            <a:pPr algn="ctr">
-              <a:defRPr sz="900">
-                <a:latin typeface="Arial"/>
-              </a:defRPr>
-            </a:pPr>
-            <a:r>
-              <a:t>T3</a:t>
-            </a:r>
-          </a:p>
-        </p:txBody>
-      </p:sp>
-      <p:graphicFrame>
-        <p:nvGraphicFramePr>
-          <p:cNvPr id="14" name="Table 13"/>
-          <p:cNvGraphicFramePr>
-            <a:graphicFrameLocks noGrp="1"/>
-          </p:cNvGraphicFramePr>
-          <p:nvPr/>
-        </p:nvGraphicFramePr>
-        <p:xfrm>
-          <a:off x="365760" y="4389120"/>
-          <a:ext cx="1188720" cy="1920240"/>
-        </p:xfrm>
-        <a:graphic>
-          <a:graphicData uri="http://schemas.openxmlformats.org/drawingml/2006/table">
-            <a:tbl>
-              <a:tblPr firstRow="1" bandRow="1">
-                <a:tableStyleId>{5C22544A-7EE6-4342-B048-85BDC9FD1C3A}</a:tableStyleId>
-              </a:tblPr>
-              <a:tblGrid>
-                <a:gridCol w="1188720"/>
-              </a:tblGrid>
-              <a:tr h="274320">
-                <a:tc>
-                  <a:txBody>
-                    <a:bodyPr/>
-                    <a:lstStyle/>
-                    <a:p>
-                      <a:pPr algn="r">
-                        <a:defRPr sz="1200" b="1">
-                          <a:solidFill>
-                            <a:srgbClr val="404040"/>
-                          </a:solidFill>
-                          <a:latin typeface="Arial"/>
-                        </a:defRPr>
-                      </a:pPr>
-                      <a:r>
-                        <a:t>Date</a:t>
-                      </a:r>
-                    </a:p>
-                  </a:txBody>
-                  <a:tcPr anchor="ctr">
-                    <a:solidFill>
-                      <a:srgbClr val="F0F0F0"/>
-                    </a:solidFill>
-                  </a:tcPr>
-                </a:tc>
-              </a:tr>
-              <a:tr h="274320">
-                <a:tc>
-                  <a:txBody>
-                    <a:bodyPr/>
-                    <a:lstStyle/>
-                    <a:p>
-                      <a:pPr algn="r">
-                        <a:defRPr sz="1200" b="1">
-                          <a:solidFill>
-                            <a:srgbClr val="404040"/>
-                          </a:solidFill>
-                          <a:latin typeface="Arial"/>
-                        </a:defRPr>
-                      </a:pPr>
-                      <a:r>
-                        <a:t>Target</a:t>
-                      </a:r>
-                    </a:p>
-                  </a:txBody>
-                  <a:tcPr anchor="ctr">
-                    <a:solidFill>
-                      <a:srgbClr val="F0F0F0"/>
-                    </a:solidFill>
-                  </a:tcPr>
-                </a:tc>
-              </a:tr>
-              <a:tr h="274320">
-                <a:tc>
-                  <a:txBody>
-                    <a:bodyPr/>
-                    <a:lstStyle/>
-                    <a:p>
-                      <a:pPr algn="r">
-                        <a:defRPr sz="1200" b="1">
-                          <a:solidFill>
-                            <a:srgbClr val="404040"/>
-                          </a:solidFill>
-                          <a:latin typeface="Arial"/>
-                        </a:defRPr>
-                      </a:pPr>
-                      <a:r>
-                        <a:t>Acquirer</a:t>
-                      </a:r>
-                    </a:p>
-                  </a:txBody>
-                  <a:tcPr anchor="ctr">
-                    <a:solidFill>
-                      <a:srgbClr val="F0F0F0"/>
-                    </a:solidFill>
-                  </a:tcPr>
-                </a:tc>
-              </a:tr>
-              <a:tr h="274320">
-                <a:tc>
-                  <a:txBody>
-                    <a:bodyPr/>
-                    <a:lstStyle/>
-                    <a:p>
-                      <a:pPr algn="r">
-                        <a:defRPr sz="1200" b="1">
-                          <a:solidFill>
-                            <a:srgbClr val="404040"/>
-                          </a:solidFill>
-                          <a:latin typeface="Arial"/>
-                        </a:defRPr>
-                      </a:pPr>
-                      <a:r>
-                        <a:t>Country</a:t>
-                      </a:r>
-                    </a:p>
-                  </a:txBody>
-                  <a:tcPr anchor="ctr">
-                    <a:solidFill>
-                      <a:srgbClr val="F0F0F0"/>
-                    </a:solidFill>
-                  </a:tcPr>
-                </a:tc>
-              </a:tr>
-              <a:tr h="274320">
-                <a:tc>
-                  <a:txBody>
-                    <a:bodyPr/>
-                    <a:lstStyle/>
-                    <a:p>
-                      <a:pPr algn="r">
-                        <a:defRPr sz="1200" b="1">
-                          <a:solidFill>
-                            <a:srgbClr val="404040"/>
-                          </a:solidFill>
-                          <a:latin typeface="Arial"/>
-                        </a:defRPr>
-                      </a:pPr>
-                      <a:r>
-                        <a:t>EV ($M)</a:t>
-                      </a:r>
-                    </a:p>
-                  </a:txBody>
-                  <a:tcPr anchor="ctr">
-                    <a:solidFill>
-                      <a:srgbClr val="F0F0F0"/>
-                    </a:solidFill>
-                  </a:tcPr>
-                </a:tc>
-              </a:tr>
-              <a:tr h="274320">
-                <a:tc>
-                  <a:txBody>
-                    <a:bodyPr/>
-                    <a:lstStyle/>
-                    <a:p>
-                      <a:pPr algn="r">
-                        <a:defRPr sz="1200" b="1">
-                          <a:solidFill>
-                            <a:srgbClr val="404040"/>
-                          </a:solidFill>
-                          <a:latin typeface="Arial"/>
-                        </a:defRPr>
-                      </a:pPr>
-                      <a:r>
-                        <a:t>Revenue ($M)</a:t>
-                      </a:r>
-                    </a:p>
-                  </a:txBody>
-                  <a:tcPr anchor="ctr">
-                    <a:solidFill>
-                      <a:srgbClr val="F0F0F0"/>
-                    </a:solidFill>
-                  </a:tcPr>
-                </a:tc>
-              </a:tr>
-              <a:tr h="274320">
-                <a:tc>
-                  <a:txBody>
-                    <a:bodyPr/>
-                    <a:lstStyle/>
-                    <a:p>
-                      <a:pPr algn="r">
-                        <a:defRPr sz="1200" b="1">
-                          <a:solidFill>
-                            <a:srgbClr val="404040"/>
-                          </a:solidFill>
-                          <a:latin typeface="Arial"/>
-                        </a:defRPr>
-                      </a:pPr>
-                      <a:r>
-                        <a:t>EV/Revenue</a:t>
-                      </a:r>
-                    </a:p>
-                  </a:txBody>
-                  <a:tcPr anchor="ctr">
-                    <a:solidFill>
-                      <a:srgbClr val="F0F0F0"/>
-                    </a:solidFill>
-                  </a:tcPr>
-                </a:tc>
-              </a:tr>
-            </a:tbl>
-          </a:graphicData>
-        </a:graphic>
-      </p:graphicFrame>
-      <p:graphicFrame>
-        <p:nvGraphicFramePr>
-          <p:cNvPr id="15" name="Table 14"/>
-          <p:cNvGraphicFramePr>
-            <a:graphicFrameLocks noGrp="1"/>
-          </p:cNvGraphicFramePr>
-          <p:nvPr/>
-        </p:nvGraphicFramePr>
-        <p:xfrm>
-          <a:off x="1600200" y="4389120"/>
-          <a:ext cx="8686800" cy="1920240"/>
-        </p:xfrm>
-        <a:graphic>
-          <a:graphicData uri="http://schemas.openxmlformats.org/drawingml/2006/table">
-            <a:tbl>
-              <a:tblPr firstRow="1" bandRow="1">
-                <a:tableStyleId>{5C22544A-7EE6-4342-B048-85BDC9FD1C3A}</a:tableStyleId>
-              </a:tblPr>
-              <a:tblGrid>
-                <a:gridCol w="2895600"/>
-                <a:gridCol w="2895600"/>
-                <a:gridCol w="2895600"/>
-              </a:tblGrid>
-              <a:tr h="274320">
-                <a:tc>
-                  <a:txBody>
-                    <a:bodyPr/>
-                    <a:lstStyle/>
-                    <a:p>
-                      <a:pPr algn="ctr">
-                        <a:defRPr sz="900">
-                          <a:solidFill>
-                            <a:srgbClr val="404040"/>
-                          </a:solidFill>
-                          <a:latin typeface="Arial"/>
-                        </a:defRPr>
-                      </a:pPr>
-                      <a:r>
-                        <a:t>Sep 2025</a:t>
-                      </a:r>
-                    </a:p>
-                  </a:txBody>
-                  <a:tcPr anchor="ctr">
-                    <a:solidFill>
-                      <a:srgbClr val="FFFFFF"/>
-                    </a:solidFill>
-                  </a:tcPr>
-                </a:tc>
-                <a:tc>
-                  <a:txBody>
-                    <a:bodyPr/>
-                    <a:lstStyle/>
-                    <a:p>
-                      <a:pPr algn="ctr">
-                        <a:defRPr sz="900">
-                          <a:solidFill>
-                            <a:srgbClr val="404040"/>
-                          </a:solidFill>
-                          <a:latin typeface="Arial"/>
-                        </a:defRPr>
-                      </a:pPr>
-                      <a:r>
-                        <a:t>2020</a:t>
-                      </a:r>
-                    </a:p>
-                  </a:txBody>
-                  <a:tcPr anchor="ctr">
-                    <a:solidFill>
-                      <a:srgbClr val="FFFFFF"/>
-                    </a:solidFill>
-                  </a:tcPr>
-                </a:tc>
-                <a:tc>
-                  <a:txBody>
-                    <a:bodyPr/>
-                    <a:lstStyle/>
-                    <a:p>
-                      <a:pPr algn="ctr">
-                        <a:defRPr sz="900">
-                          <a:solidFill>
-                            <a:srgbClr val="404040"/>
-                          </a:solidFill>
-                          <a:latin typeface="Arial"/>
-                        </a:defRPr>
-                      </a:pPr>
-                      <a:r>
-                        <a:t>2023-2025</a:t>
-                      </a:r>
-                    </a:p>
-                  </a:txBody>
-                  <a:tcPr anchor="ctr">
-                    <a:solidFill>
-                      <a:srgbClr val="FFFFFF"/>
-                    </a:solidFill>
-                  </a:tcPr>
-                </a:tc>
-              </a:tr>
-              <a:tr h="274320">
-                <a:tc>
-                  <a:txBody>
-                    <a:bodyPr/>
-                    <a:lstStyle/>
-                    <a:p>
-                      <a:pPr algn="ctr">
-                        <a:defRPr sz="900">
-                          <a:solidFill>
-                            <a:srgbClr val="404040"/>
-                          </a:solidFill>
-                          <a:latin typeface="Arial"/>
-                        </a:defRPr>
-                      </a:pPr>
-                      <a:r>
-                        <a:t>Boboli Benelux ...</a:t>
-                      </a:r>
-                    </a:p>
-                  </a:txBody>
-                  <a:tcPr anchor="ctr">
-                    <a:solidFill>
-                      <a:srgbClr val="FFFFFF"/>
-                    </a:solidFill>
-                  </a:tcPr>
-                </a:tc>
-                <a:tc>
-                  <a:txBody>
-                    <a:bodyPr/>
-                    <a:lstStyle/>
-                    <a:p>
-                      <a:pPr algn="ctr">
-                        <a:defRPr sz="900">
-                          <a:solidFill>
-                            <a:srgbClr val="404040"/>
-                          </a:solidFill>
-                          <a:latin typeface="Arial"/>
-                        </a:defRPr>
-                      </a:pPr>
-                      <a:r>
-                        <a:t>BreadTalk Group...</a:t>
-                      </a:r>
-                    </a:p>
-                  </a:txBody>
-                  <a:tcPr anchor="ctr">
-                    <a:solidFill>
-                      <a:srgbClr val="FFFFFF"/>
-                    </a:solidFill>
-                  </a:tcPr>
-                </a:tc>
-                <a:tc>
-                  <a:txBody>
-                    <a:bodyPr/>
-                    <a:lstStyle/>
-                    <a:p>
-                      <a:pPr algn="ctr">
-                        <a:defRPr sz="900">
-                          <a:solidFill>
-                            <a:srgbClr val="404040"/>
-                          </a:solidFill>
-                          <a:latin typeface="Arial"/>
-                        </a:defRPr>
-                      </a:pPr>
-                      <a:r>
-                        <a:t>PT Nippon Indos...</a:t>
-                      </a:r>
-                    </a:p>
-                  </a:txBody>
-                  <a:tcPr anchor="ctr">
-                    <a:solidFill>
-                      <a:srgbClr val="FFFFFF"/>
-                    </a:solidFill>
-                  </a:tcPr>
-                </a:tc>
-              </a:tr>
-              <a:tr h="274320">
-                <a:tc>
-                  <a:txBody>
-                    <a:bodyPr/>
-                    <a:lstStyle/>
-                    <a:p>
-                      <a:pPr algn="ctr">
-                        <a:defRPr sz="900">
-                          <a:solidFill>
-                            <a:srgbClr val="404040"/>
-                          </a:solidFill>
-                          <a:latin typeface="Arial"/>
-                        </a:defRPr>
-                      </a:pPr>
-                      <a:r>
-                        <a:t>Lantmännen Unib...</a:t>
-                      </a:r>
-                    </a:p>
-                  </a:txBody>
-                  <a:tcPr anchor="ctr">
-                    <a:solidFill>
-                      <a:srgbClr val="FFFFFF"/>
-                    </a:solidFill>
-                  </a:tcPr>
-                </a:tc>
-                <a:tc>
-                  <a:txBody>
-                    <a:bodyPr/>
-                    <a:lstStyle/>
-                    <a:p>
-                      <a:pPr algn="ctr">
-                        <a:defRPr sz="900">
-                          <a:solidFill>
-                            <a:srgbClr val="404040"/>
-                          </a:solidFill>
-                          <a:latin typeface="Arial"/>
-                        </a:defRPr>
-                      </a:pPr>
-                      <a:r>
-                        <a:t>Various (SGX de...</a:t>
-                      </a:r>
-                    </a:p>
-                  </a:txBody>
-                  <a:tcPr anchor="ctr">
-                    <a:solidFill>
-                      <a:srgbClr val="FFFFFF"/>
-                    </a:solidFill>
-                  </a:tcPr>
-                </a:tc>
-                <a:tc>
-                  <a:txBody>
-                    <a:bodyPr/>
-                    <a:lstStyle/>
-                    <a:p>
-                      <a:pPr algn="ctr">
-                        <a:defRPr sz="900">
-                          <a:solidFill>
-                            <a:srgbClr val="404040"/>
-                          </a:solidFill>
-                          <a:latin typeface="Arial"/>
-                        </a:defRPr>
-                      </a:pPr>
-                      <a:r>
-                        <a:t>Public</a:t>
-                      </a:r>
-                    </a:p>
-                  </a:txBody>
-                  <a:tcPr anchor="ctr">
-                    <a:solidFill>
-                      <a:srgbClr val="FFFFFF"/>
-                    </a:solidFill>
-                  </a:tcPr>
-                </a:tc>
-              </a:tr>
-              <a:tr h="274320">
-                <a:tc>
-                  <a:txBody>
-                    <a:bodyPr/>
-                    <a:lstStyle/>
-                    <a:p>
-                      <a:pPr algn="ctr">
-                        <a:defRPr sz="900">
-                          <a:solidFill>
-                            <a:srgbClr val="404040"/>
-                          </a:solidFill>
-                          <a:latin typeface="Arial"/>
-                        </a:defRPr>
-                      </a:pPr>
-                      <a:r>
-                        <a:t>Netherlands</a:t>
-                      </a:r>
-                    </a:p>
-                  </a:txBody>
-                  <a:tcPr anchor="ctr">
-                    <a:solidFill>
-                      <a:srgbClr val="FFFFFF"/>
-                    </a:solidFill>
-                  </a:tcPr>
-                </a:tc>
-                <a:tc>
-                  <a:txBody>
-                    <a:bodyPr/>
-                    <a:lstStyle/>
-                    <a:p>
-                      <a:pPr algn="ctr">
-                        <a:defRPr sz="900">
-                          <a:solidFill>
-                            <a:srgbClr val="404040"/>
-                          </a:solidFill>
-                          <a:latin typeface="Arial"/>
-                        </a:defRPr>
-                      </a:pPr>
-                      <a:r>
-                        <a:t>Singapore</a:t>
-                      </a:r>
-                    </a:p>
-                  </a:txBody>
-                  <a:tcPr anchor="ctr">
-                    <a:solidFill>
-                      <a:srgbClr val="FFFFFF"/>
-                    </a:solidFill>
-                  </a:tcPr>
-                </a:tc>
-                <a:tc>
-                  <a:txBody>
-                    <a:bodyPr/>
-                    <a:lstStyle/>
-                    <a:p>
-                      <a:pPr algn="ctr">
-                        <a:defRPr sz="900">
-                          <a:solidFill>
-                            <a:srgbClr val="404040"/>
-                          </a:solidFill>
-                          <a:latin typeface="Arial"/>
-                        </a:defRPr>
-                      </a:pPr>
-                      <a:r>
-                        <a:t>Indonesia</a:t>
-                      </a:r>
-                    </a:p>
-                  </a:txBody>
-                  <a:tcPr anchor="ctr">
-                    <a:solidFill>
-                      <a:srgbClr val="FFFFFF"/>
-                    </a:solidFill>
-                  </a:tcPr>
-                </a:tc>
-              </a:tr>
-              <a:tr h="274320">
-                <a:tc>
-                  <a:txBody>
-                    <a:bodyPr/>
-                    <a:lstStyle/>
-                    <a:p>
-                      <a:pPr algn="ctr">
-                        <a:defRPr sz="900">
-                          <a:solidFill>
-                            <a:srgbClr val="404040"/>
-                          </a:solidFill>
-                          <a:latin typeface="Arial"/>
-                        </a:defRPr>
-                      </a:pPr>
-                      <a:r>
-                        <a:t>$130</a:t>
-                      </a:r>
-                    </a:p>
-                  </a:txBody>
-                  <a:tcPr anchor="ctr">
-                    <a:solidFill>
-                      <a:srgbClr val="FFFFFF"/>
-                    </a:solidFill>
-                  </a:tcPr>
-                </a:tc>
-                <a:tc>
-                  <a:txBody>
-                    <a:bodyPr/>
-                    <a:lstStyle/>
-                    <a:p>
-                      <a:pPr algn="ctr">
-                        <a:defRPr sz="900">
-                          <a:solidFill>
-                            <a:srgbClr val="404040"/>
-                          </a:solidFill>
-                          <a:latin typeface="Arial"/>
-                        </a:defRPr>
-                      </a:pPr>
-                      <a:r>
-                        <a:t>$350</a:t>
-                      </a:r>
-                    </a:p>
-                  </a:txBody>
-                  <a:tcPr anchor="ctr">
-                    <a:solidFill>
-                      <a:srgbClr val="FFFFFF"/>
-                    </a:solidFill>
-                  </a:tcPr>
-                </a:tc>
-                <a:tc>
-                  <a:txBody>
-                    <a:bodyPr/>
-                    <a:lstStyle/>
-                    <a:p>
-                      <a:pPr algn="ctr">
-                        <a:defRPr sz="900">
-                          <a:solidFill>
-                            <a:srgbClr val="404040"/>
-                          </a:solidFill>
-                          <a:latin typeface="Arial"/>
-                        </a:defRPr>
-                      </a:pPr>
-                      <a:r>
-                        <a:t>$470</a:t>
-                      </a:r>
-                    </a:p>
-                  </a:txBody>
-                  <a:tcPr anchor="ctr">
-                    <a:solidFill>
-                      <a:srgbClr val="FFFFFF"/>
-                    </a:solidFill>
-                  </a:tcPr>
-                </a:tc>
-              </a:tr>
-              <a:tr h="274320">
-                <a:tc>
-                  <a:txBody>
-                    <a:bodyPr/>
-                    <a:lstStyle/>
-                    <a:p>
-                      <a:pPr algn="ctr">
-                        <a:defRPr sz="900">
-                          <a:solidFill>
-                            <a:srgbClr val="404040"/>
-                          </a:solidFill>
-                          <a:latin typeface="Arial"/>
-                        </a:defRPr>
-                      </a:pPr>
-                      <a:r>
-                        <a:t>$60</a:t>
-                      </a:r>
-                    </a:p>
-                  </a:txBody>
-                  <a:tcPr anchor="ctr">
-                    <a:solidFill>
-                      <a:srgbClr val="FFFFFF"/>
-                    </a:solidFill>
-                  </a:tcPr>
-                </a:tc>
-                <a:tc>
-                  <a:txBody>
-                    <a:bodyPr/>
-                    <a:lstStyle/>
-                    <a:p>
-                      <a:pPr algn="ctr">
-                        <a:defRPr sz="900">
-                          <a:solidFill>
-                            <a:srgbClr val="404040"/>
-                          </a:solidFill>
-                          <a:latin typeface="Arial"/>
-                        </a:defRPr>
-                      </a:pPr>
-                      <a:r>
-                        <a:t>$175</a:t>
-                      </a:r>
-                    </a:p>
-                  </a:txBody>
-                  <a:tcPr anchor="ctr">
-                    <a:solidFill>
-                      <a:srgbClr val="FFFFFF"/>
-                    </a:solidFill>
-                  </a:tcPr>
-                </a:tc>
-                <a:tc>
-                  <a:txBody>
-                    <a:bodyPr/>
-                    <a:lstStyle/>
-                    <a:p>
-                      <a:pPr algn="ctr">
-                        <a:defRPr sz="900">
-                          <a:solidFill>
-                            <a:srgbClr val="404040"/>
-                          </a:solidFill>
-                          <a:latin typeface="Arial"/>
-                        </a:defRPr>
-                      </a:pPr>
-                      <a:r>
-                        <a:t>$350</a:t>
-                      </a:r>
-                    </a:p>
-                  </a:txBody>
-                  <a:tcPr anchor="ctr">
-                    <a:solidFill>
-                      <a:srgbClr val="FFFFFF"/>
-                    </a:solidFill>
-                  </a:tcPr>
-                </a:tc>
-              </a:tr>
-              <a:tr h="274320">
-                <a:tc>
-                  <a:txBody>
-                    <a:bodyPr/>
-                    <a:lstStyle/>
-                    <a:p>
-                      <a:pPr algn="ctr">
-                        <a:defRPr sz="900">
-                          <a:solidFill>
-                            <a:srgbClr val="404040"/>
-                          </a:solidFill>
-                          <a:latin typeface="Arial"/>
-                        </a:defRPr>
-                      </a:pPr>
-                      <a:r>
-                        <a:t>2.2x</a:t>
-                      </a:r>
-                    </a:p>
-                  </a:txBody>
-                  <a:tcPr anchor="ctr">
-                    <a:solidFill>
-                      <a:srgbClr val="FFFFFF"/>
-                    </a:solidFill>
-                  </a:tcPr>
-                </a:tc>
-                <a:tc>
-                  <a:txBody>
-                    <a:bodyPr/>
-                    <a:lstStyle/>
-                    <a:p>
-                      <a:pPr algn="ctr">
-                        <a:defRPr sz="900">
-                          <a:solidFill>
-                            <a:srgbClr val="404040"/>
-                          </a:solidFill>
-                          <a:latin typeface="Arial"/>
-                        </a:defRPr>
-                      </a:pPr>
-                      <a:r>
-                        <a:t>2.0x</a:t>
-                      </a:r>
-                    </a:p>
-                  </a:txBody>
-                  <a:tcPr anchor="ctr">
-                    <a:solidFill>
-                      <a:srgbClr val="FFFFFF"/>
-                    </a:solidFill>
-                  </a:tcPr>
-                </a:tc>
-                <a:tc>
-                  <a:txBody>
-                    <a:bodyPr/>
-                    <a:lstStyle/>
-                    <a:p>
-                      <a:pPr algn="ctr">
-                        <a:defRPr sz="900">
-                          <a:solidFill>
-                            <a:srgbClr val="404040"/>
-                          </a:solidFill>
-                          <a:latin typeface="Arial"/>
-                        </a:defRPr>
-                      </a:pPr>
-                      <a:r>
-                        <a:t>1.3x</a:t>
-                      </a:r>
-                    </a:p>
-                  </a:txBody>
-                  <a:tcPr anchor="ctr">
-                    <a:solidFill>
-                      <a:srgbClr val="FFFFFF"/>
-                    </a:solidFill>
-                  </a:tcPr>
-                </a:tc>
-              </a:tr>
-            </a:tbl>
-          </a:graphicData>
-        </a:graphic>
-      </p:graphicFrame>
-      <p:sp>
-        <p:nvSpPr>
-          <p:cNvPr id="16" name="TextBox 15"/>
-          <p:cNvSpPr txBox="1"/>
-          <p:nvPr/>
-        </p:nvSpPr>
-        <p:spPr>
-          <a:xfrm>
-            <a:off x="457200" y="6400800"/>
-            <a:ext cx="5486400" cy="365760"/>
-          </a:xfrm>
-          <a:prstGeom prst="rect">
-            <a:avLst/>
-          </a:prstGeom>
-          <a:noFill/>
-        </p:spPr>
-        <p:txBody>
-          <a:bodyPr wrap="none">
-            <a:spAutoFit/>
-          </a:bodyPr>
-          <a:lstStyle/>
-          <a:p>
-            <a:pPr>
-              <a:defRPr sz="900">
-                <a:solidFill>
-                  <a:srgbClr val="808080"/>
-                </a:solidFill>
-                <a:latin typeface="Arial"/>
-              </a:defRPr>
-            </a:pPr>
-            <a:r>
-              <a:t>Confidential | September 2025</a:t>
-            </a:r>
-          </a:p>
-        </p:txBody>
-      </p:sp>
-      <p:sp>
-        <p:nvSpPr>
-          <p:cNvPr id="17" name="TextBox 16"/>
-          <p:cNvSpPr txBox="1"/>
-          <p:nvPr/>
-        </p:nvSpPr>
-        <p:spPr>
-          <a:xfrm>
-            <a:off x="6705295" y="6400800"/>
-            <a:ext cx="5486400" cy="365760"/>
-          </a:xfrm>
-          <a:prstGeom prst="rect">
-            <a:avLst/>
-          </a:prstGeom>
-          <a:noFill/>
-        </p:spPr>
-        <p:txBody>
-          <a:bodyPr wrap="none">
-            <a:spAutoFit/>
-          </a:bodyPr>
-          <a:lstStyle/>
-          <a:p>
-            <a:pPr algn="r">
-              <a:defRPr sz="900">
-                <a:solidFill>
-                  <a:srgbClr val="808080"/>
-                </a:solidFill>
-                <a:latin typeface="Arial"/>
-              </a:defRPr>
-            </a:pPr>
-            <a:r>
-              <a:t>Moelis &amp; Company</a:t>
-            </a:r>
-          </a:p>
-        </p:txBody>
-      </p:sp>
     </p:spTree>
   </p:cSld>
   <p:clrMapOvr>
@@ -8863,7 +7674,7 @@
                 </a:solidFill>
                 <a:latin typeface="Arial"/>
               </a:rPr>
-              <a:t>Margin &amp; Cost Resilience</a:t>
+              <a:t>Precedent Transactions</a:t>
             </a:r>
           </a:p>
         </p:txBody>
@@ -8919,623 +7730,31 @@
         </p:nvSpPr>
         <p:spPr>
           <a:xfrm>
-            <a:off x="914400" y="1280160"/>
-            <a:ext cx="5486400" cy="274320"/>
-          </a:xfrm>
-          <a:prstGeom prst="rect">
-            <a:avLst/>
-          </a:prstGeom>
-          <a:noFill/>
-          <a:ln>
-            <a:noFill/>
-          </a:ln>
-          <a:effectLst/>
-        </p:spPr>
-        <p:txBody>
-          <a:bodyPr wrap="square">
+            <a:off x="1828800" y="1371600"/>
+            <a:ext cx="8229600" cy="457200"/>
+          </a:xfrm>
+          <a:prstGeom prst="rect">
+            <a:avLst/>
+          </a:prstGeom>
+          <a:noFill/>
+        </p:spPr>
+        <p:txBody>
+          <a:bodyPr wrap="none">
             <a:spAutoFit/>
           </a:bodyPr>
           <a:lstStyle/>
           <a:p>
-            <a:pPr algn="l"/>
-            <a:r>
-              <a:rPr sz="1400" b="1">
+            <a:pPr algn="ctr">
+              <a:defRPr sz="1400" b="1">
                 <a:solidFill>
                   <a:srgbClr val="183A58"/>
                 </a:solidFill>
                 <a:latin typeface="Arial"/>
-              </a:rPr>
-              <a:t>EBITDA Margins by Channel (2024)</a:t>
-            </a:r>
-          </a:p>
-        </p:txBody>
-      </p:sp>
-      <p:graphicFrame>
-        <p:nvGraphicFramePr>
-          <p:cNvPr id="5" name="Chart 4"/>
-          <p:cNvGraphicFramePr>
-            <a:graphicFrameLocks noGrp="1"/>
-          </p:cNvGraphicFramePr>
-          <p:nvPr/>
-        </p:nvGraphicFramePr>
-        <p:xfrm>
-          <a:off x="914400" y="1645920"/>
-          <a:ext cx="5486400" cy="2011680"/>
-        </p:xfrm>
-        <a:graphic>
-          <a:graphicData uri="http://schemas.openxmlformats.org/drawingml/2006/chart">
-            <c:chart xmlns:c="http://schemas.openxmlformats.org/drawingml/2006/chart" r:id="rId2"/>
-          </a:graphicData>
-        </a:graphic>
-      </p:graphicFrame>
-      <p:sp>
-        <p:nvSpPr>
-          <p:cNvPr id="6" name="TextBox 5"/>
-          <p:cNvSpPr txBox="1"/>
-          <p:nvPr/>
-        </p:nvSpPr>
-        <p:spPr>
-          <a:xfrm>
-            <a:off x="4572000" y="3749039"/>
-            <a:ext cx="2286000" cy="137160"/>
-          </a:xfrm>
-          <a:prstGeom prst="rect">
-            <a:avLst/>
-          </a:prstGeom>
-          <a:noFill/>
-          <a:ln>
-            <a:noFill/>
-          </a:ln>
-          <a:effectLst/>
-        </p:spPr>
-        <p:txBody>
-          <a:bodyPr wrap="square">
-            <a:spAutoFit/>
-          </a:bodyPr>
-          <a:lstStyle/>
-          <a:p>
-            <a:pPr algn="r"/>
-            <a:r>
-              <a:rPr sz="800" b="0">
-                <a:solidFill>
-                  <a:srgbClr val="404040"/>
-                </a:solidFill>
-                <a:latin typeface="Arial"/>
-              </a:rPr>
-              <a:t>Source: Company financials</a:t>
-            </a:r>
-          </a:p>
-        </p:txBody>
-      </p:sp>
-      <p:sp>
-        <p:nvSpPr>
-          <p:cNvPr id="7" name="TextBox 6"/>
-          <p:cNvSpPr txBox="1"/>
-          <p:nvPr/>
-        </p:nvSpPr>
-        <p:spPr>
-          <a:xfrm>
-            <a:off x="914400" y="4023360"/>
-            <a:ext cx="5486400" cy="274320"/>
-          </a:xfrm>
-          <a:prstGeom prst="rect">
-            <a:avLst/>
-          </a:prstGeom>
-          <a:noFill/>
-          <a:ln>
-            <a:noFill/>
-          </a:ln>
-          <a:effectLst/>
-        </p:spPr>
-        <p:txBody>
-          <a:bodyPr wrap="square">
-            <a:spAutoFit/>
-          </a:bodyPr>
-          <a:lstStyle/>
-          <a:p>
-            <a:pPr algn="l"/>
-            <a:r>
-              <a:rPr sz="1400" b="1">
-                <a:solidFill>
-                  <a:srgbClr val="183A58"/>
-                </a:solidFill>
-                <a:latin typeface="Arial"/>
-              </a:rPr>
-              <a:t>Cost Management &amp; Efficiency Initiatives</a:t>
-            </a:r>
-          </a:p>
-        </p:txBody>
-      </p:sp>
-      <p:sp>
-        <p:nvSpPr>
-          <p:cNvPr id="8" name="Oval 7"/>
-          <p:cNvSpPr/>
-          <p:nvPr/>
-        </p:nvSpPr>
-        <p:spPr>
-          <a:xfrm>
-            <a:off x="1097280" y="4389120"/>
-            <a:ext cx="54864" cy="54864"/>
-          </a:xfrm>
-          <a:prstGeom prst="ellipse">
-            <a:avLst/>
-          </a:prstGeom>
-          <a:solidFill>
-            <a:srgbClr val="B5975B"/>
-          </a:solidFill>
-          <a:ln>
-            <a:noFill/>
-          </a:ln>
-          <a:effectLst/>
-        </p:spPr>
-        <p:style>
-          <a:lnRef idx="1">
-            <a:schemeClr val="accent1"/>
-          </a:lnRef>
-          <a:fillRef idx="3">
-            <a:schemeClr val="accent1"/>
-          </a:fillRef>
-          <a:effectRef idx="2">
-            <a:schemeClr val="accent1"/>
-          </a:effectRef>
-          <a:fontRef idx="minor">
-            <a:schemeClr val="lt1"/>
-          </a:fontRef>
-        </p:style>
-        <p:txBody>
-          <a:bodyPr rtlCol="0" anchor="ctr"/>
-          <a:lstStyle/>
-          <a:p>
-            <a:pPr algn="ctr"/>
-          </a:p>
-        </p:txBody>
-      </p:sp>
-      <p:sp>
-        <p:nvSpPr>
-          <p:cNvPr id="9" name="TextBox 8"/>
-          <p:cNvSpPr txBox="1"/>
-          <p:nvPr/>
-        </p:nvSpPr>
-        <p:spPr>
-          <a:xfrm>
-            <a:off x="1234440" y="4343400"/>
-            <a:ext cx="5029200" cy="137160"/>
-          </a:xfrm>
-          <a:prstGeom prst="rect">
-            <a:avLst/>
-          </a:prstGeom>
-          <a:noFill/>
-          <a:ln>
-            <a:noFill/>
-          </a:ln>
-          <a:effectLst/>
-        </p:spPr>
-        <p:txBody>
-          <a:bodyPr wrap="square">
-            <a:spAutoFit/>
-          </a:bodyPr>
-          <a:lstStyle/>
-          <a:p>
-            <a:pPr algn="l"/>
-            <a:r>
-              <a:rPr sz="1000" b="1">
-                <a:solidFill>
-                  <a:srgbClr val="183A58"/>
-                </a:solidFill>
-                <a:latin typeface="Arial"/>
-              </a:rPr>
-              <a:t>Centralized Production &amp; Supply Chain</a:t>
-            </a:r>
-          </a:p>
-        </p:txBody>
-      </p:sp>
-      <p:sp>
-        <p:nvSpPr>
-          <p:cNvPr id="10" name="TextBox 9"/>
-          <p:cNvSpPr txBox="1"/>
-          <p:nvPr/>
-        </p:nvSpPr>
-        <p:spPr>
-          <a:xfrm>
-            <a:off x="1234440" y="4480560"/>
-            <a:ext cx="5029200" cy="256032"/>
-          </a:xfrm>
-          <a:prstGeom prst="rect">
-            <a:avLst/>
-          </a:prstGeom>
-          <a:noFill/>
-          <a:ln>
-            <a:noFill/>
-          </a:ln>
-          <a:effectLst/>
-        </p:spPr>
-        <p:txBody>
-          <a:bodyPr wrap="square">
-            <a:spAutoFit/>
-          </a:bodyPr>
-          <a:lstStyle/>
-          <a:p>
-            <a:pPr algn="l"/>
-            <a:r>
-              <a:rPr sz="900" b="0">
-                <a:solidFill>
-                  <a:srgbClr val="404040"/>
-                </a:solidFill>
-                <a:latin typeface="Arial"/>
-              </a:rPr>
-              <a:t>Leverage DailyCo’s centralized food production and logistics for operational efficiency and scale economies.</a:t>
-            </a:r>
-          </a:p>
-        </p:txBody>
-      </p:sp>
-      <p:sp>
-        <p:nvSpPr>
-          <p:cNvPr id="11" name="Oval 10"/>
-          <p:cNvSpPr/>
-          <p:nvPr/>
-        </p:nvSpPr>
-        <p:spPr>
-          <a:xfrm>
-            <a:off x="1097280" y="4800600"/>
-            <a:ext cx="54864" cy="54864"/>
-          </a:xfrm>
-          <a:prstGeom prst="ellipse">
-            <a:avLst/>
-          </a:prstGeom>
-          <a:solidFill>
-            <a:srgbClr val="B5975B"/>
-          </a:solidFill>
-          <a:ln>
-            <a:noFill/>
-          </a:ln>
-          <a:effectLst/>
-        </p:spPr>
-        <p:style>
-          <a:lnRef idx="1">
-            <a:schemeClr val="accent1"/>
-          </a:lnRef>
-          <a:fillRef idx="3">
-            <a:schemeClr val="accent1"/>
-          </a:fillRef>
-          <a:effectRef idx="2">
-            <a:schemeClr val="accent1"/>
-          </a:effectRef>
-          <a:fontRef idx="minor">
-            <a:schemeClr val="lt1"/>
-          </a:fontRef>
-        </p:style>
-        <p:txBody>
-          <a:bodyPr rtlCol="0" anchor="ctr"/>
-          <a:lstStyle/>
-          <a:p>
-            <a:pPr algn="ctr"/>
-          </a:p>
-        </p:txBody>
-      </p:sp>
-      <p:sp>
-        <p:nvSpPr>
-          <p:cNvPr id="12" name="TextBox 11"/>
-          <p:cNvSpPr txBox="1"/>
-          <p:nvPr/>
-        </p:nvSpPr>
-        <p:spPr>
-          <a:xfrm>
-            <a:off x="1234440" y="4754880"/>
-            <a:ext cx="5029200" cy="137160"/>
-          </a:xfrm>
-          <a:prstGeom prst="rect">
-            <a:avLst/>
-          </a:prstGeom>
-          <a:noFill/>
-          <a:ln>
-            <a:noFill/>
-          </a:ln>
-          <a:effectLst/>
-        </p:spPr>
-        <p:txBody>
-          <a:bodyPr wrap="square">
-            <a:spAutoFit/>
-          </a:bodyPr>
-          <a:lstStyle/>
-          <a:p>
-            <a:pPr algn="l"/>
-            <a:r>
-              <a:rPr sz="1000" b="1">
-                <a:solidFill>
-                  <a:srgbClr val="183A58"/>
-                </a:solidFill>
-                <a:latin typeface="Arial"/>
-              </a:rPr>
-              <a:t>Layered Pricing &amp; Product Strategy</a:t>
-            </a:r>
-          </a:p>
-        </p:txBody>
-      </p:sp>
-      <p:sp>
-        <p:nvSpPr>
-          <p:cNvPr id="13" name="TextBox 12"/>
-          <p:cNvSpPr txBox="1"/>
-          <p:nvPr/>
-        </p:nvSpPr>
-        <p:spPr>
-          <a:xfrm>
-            <a:off x="1234440" y="4892040"/>
-            <a:ext cx="5029200" cy="256032"/>
-          </a:xfrm>
-          <a:prstGeom prst="rect">
-            <a:avLst/>
-          </a:prstGeom>
-          <a:noFill/>
-          <a:ln>
-            <a:noFill/>
-          </a:ln>
-          <a:effectLst/>
-        </p:spPr>
-        <p:txBody>
-          <a:bodyPr wrap="square">
-            <a:spAutoFit/>
-          </a:bodyPr>
-          <a:lstStyle/>
-          <a:p>
-            <a:pPr algn="l"/>
-            <a:r>
-              <a:rPr sz="900" b="0">
-                <a:solidFill>
-                  <a:srgbClr val="404040"/>
-                </a:solidFill>
-                <a:latin typeface="Arial"/>
-              </a:rPr>
-              <a:t>Target both mass-market and premium consumers with a multi-brand, multi-price approach.</a:t>
-            </a:r>
-          </a:p>
-        </p:txBody>
-      </p:sp>
-      <p:sp>
-        <p:nvSpPr>
-          <p:cNvPr id="14" name="Oval 13"/>
-          <p:cNvSpPr/>
-          <p:nvPr/>
-        </p:nvSpPr>
-        <p:spPr>
-          <a:xfrm>
-            <a:off x="1097280" y="5212080"/>
-            <a:ext cx="54864" cy="54864"/>
-          </a:xfrm>
-          <a:prstGeom prst="ellipse">
-            <a:avLst/>
-          </a:prstGeom>
-          <a:solidFill>
-            <a:srgbClr val="B5975B"/>
-          </a:solidFill>
-          <a:ln>
-            <a:noFill/>
-          </a:ln>
-          <a:effectLst/>
-        </p:spPr>
-        <p:style>
-          <a:lnRef idx="1">
-            <a:schemeClr val="accent1"/>
-          </a:lnRef>
-          <a:fillRef idx="3">
-            <a:schemeClr val="accent1"/>
-          </a:fillRef>
-          <a:effectRef idx="2">
-            <a:schemeClr val="accent1"/>
-          </a:effectRef>
-          <a:fontRef idx="minor">
-            <a:schemeClr val="lt1"/>
-          </a:fontRef>
-        </p:style>
-        <p:txBody>
-          <a:bodyPr rtlCol="0" anchor="ctr"/>
-          <a:lstStyle/>
-          <a:p>
-            <a:pPr algn="ctr"/>
-          </a:p>
-        </p:txBody>
-      </p:sp>
-      <p:sp>
-        <p:nvSpPr>
-          <p:cNvPr id="15" name="TextBox 14"/>
-          <p:cNvSpPr txBox="1"/>
-          <p:nvPr/>
-        </p:nvSpPr>
-        <p:spPr>
-          <a:xfrm>
-            <a:off x="1234440" y="5166360"/>
-            <a:ext cx="5029200" cy="137160"/>
-          </a:xfrm>
-          <a:prstGeom prst="rect">
-            <a:avLst/>
-          </a:prstGeom>
-          <a:noFill/>
-          <a:ln>
-            <a:noFill/>
-          </a:ln>
-          <a:effectLst/>
-        </p:spPr>
-        <p:txBody>
-          <a:bodyPr wrap="square">
-            <a:spAutoFit/>
-          </a:bodyPr>
-          <a:lstStyle/>
-          <a:p>
-            <a:pPr algn="l"/>
-            <a:r>
-              <a:rPr sz="1000" b="1">
-                <a:solidFill>
-                  <a:srgbClr val="183A58"/>
-                </a:solidFill>
-                <a:latin typeface="Arial"/>
-              </a:rPr>
-              <a:t>Tech-Enabled Operations</a:t>
-            </a:r>
-          </a:p>
-        </p:txBody>
-      </p:sp>
-      <p:sp>
-        <p:nvSpPr>
-          <p:cNvPr id="16" name="TextBox 15"/>
-          <p:cNvSpPr txBox="1"/>
-          <p:nvPr/>
-        </p:nvSpPr>
-        <p:spPr>
-          <a:xfrm>
-            <a:off x="1234440" y="5303520"/>
-            <a:ext cx="5029200" cy="256032"/>
-          </a:xfrm>
-          <a:prstGeom prst="rect">
-            <a:avLst/>
-          </a:prstGeom>
-          <a:noFill/>
-          <a:ln>
-            <a:noFill/>
-          </a:ln>
-          <a:effectLst/>
-        </p:spPr>
-        <p:txBody>
-          <a:bodyPr wrap="square">
-            <a:spAutoFit/>
-          </a:bodyPr>
-          <a:lstStyle/>
-          <a:p>
-            <a:pPr algn="l"/>
-            <a:r>
-              <a:rPr sz="900" b="0">
-                <a:solidFill>
-                  <a:srgbClr val="404040"/>
-                </a:solidFill>
-                <a:latin typeface="Arial"/>
-              </a:rPr>
-              <a:t>Digital platforms, ERP, and working capital management for cost control and resource optimization.</a:t>
-            </a:r>
-          </a:p>
-        </p:txBody>
-      </p:sp>
-      <p:sp>
-        <p:nvSpPr>
-          <p:cNvPr id="17" name="TextBox 16"/>
-          <p:cNvSpPr txBox="1"/>
-          <p:nvPr/>
-        </p:nvSpPr>
-        <p:spPr>
-          <a:xfrm>
-            <a:off x="7315200" y="1280160"/>
-            <a:ext cx="4572000" cy="274320"/>
-          </a:xfrm>
-          <a:prstGeom prst="rect">
-            <a:avLst/>
-          </a:prstGeom>
-          <a:noFill/>
-          <a:ln>
-            <a:noFill/>
-          </a:ln>
-          <a:effectLst/>
-        </p:spPr>
-        <p:txBody>
-          <a:bodyPr wrap="square">
-            <a:spAutoFit/>
-          </a:bodyPr>
-          <a:lstStyle/>
-          <a:p>
-            <a:pPr algn="l"/>
-            <a:r>
-              <a:rPr sz="1400" b="1">
-                <a:solidFill>
-                  <a:srgbClr val="183A58"/>
-                </a:solidFill>
-                <a:latin typeface="Arial"/>
-              </a:rPr>
-              <a:t>Risk Mitigation Strategies</a:t>
-            </a:r>
-          </a:p>
-        </p:txBody>
-      </p:sp>
-      <p:sp>
-        <p:nvSpPr>
-          <p:cNvPr id="18" name="Rectangle 17"/>
-          <p:cNvSpPr/>
-          <p:nvPr/>
-        </p:nvSpPr>
-        <p:spPr>
-          <a:xfrm>
-            <a:off x="7315200" y="1645920"/>
-            <a:ext cx="4572000" cy="1645920"/>
-          </a:xfrm>
-          <a:prstGeom prst="rect">
-            <a:avLst/>
-          </a:prstGeom>
-          <a:solidFill>
-            <a:srgbClr val="F0F0F0"/>
-          </a:solidFill>
-          <a:ln>
-            <a:noFill/>
-          </a:ln>
-          <a:effectLst/>
-        </p:spPr>
-        <p:style>
-          <a:lnRef idx="1">
-            <a:schemeClr val="accent1"/>
-          </a:lnRef>
-          <a:fillRef idx="3">
-            <a:schemeClr val="accent1"/>
-          </a:fillRef>
-          <a:effectRef idx="2">
-            <a:schemeClr val="accent1"/>
-          </a:effectRef>
-          <a:fontRef idx="minor">
-            <a:schemeClr val="lt1"/>
-          </a:fontRef>
-        </p:style>
-        <p:txBody>
-          <a:bodyPr rtlCol="0" anchor="ctr"/>
-          <a:lstStyle/>
-          <a:p>
-            <a:pPr algn="ctr"/>
-          </a:p>
-        </p:txBody>
-      </p:sp>
-      <p:sp>
-        <p:nvSpPr>
-          <p:cNvPr id="19" name="Rectangle 18"/>
-          <p:cNvSpPr/>
-          <p:nvPr/>
-        </p:nvSpPr>
-        <p:spPr>
-          <a:xfrm>
-            <a:off x="7315200" y="1645920"/>
-            <a:ext cx="91440" cy="1645920"/>
-          </a:xfrm>
-          <a:prstGeom prst="rect">
-            <a:avLst/>
-          </a:prstGeom>
-          <a:solidFill>
-            <a:srgbClr val="B5975B"/>
-          </a:solidFill>
-          <a:ln>
-            <a:noFill/>
-          </a:ln>
-          <a:effectLst/>
-        </p:spPr>
-        <p:style>
-          <a:lnRef idx="1">
-            <a:schemeClr val="accent1"/>
-          </a:lnRef>
-          <a:fillRef idx="3">
-            <a:schemeClr val="accent1"/>
-          </a:fillRef>
-          <a:effectRef idx="2">
-            <a:schemeClr val="accent1"/>
-          </a:effectRef>
-          <a:fontRef idx="minor">
-            <a:schemeClr val="lt1"/>
-          </a:fontRef>
-        </p:style>
-        <p:txBody>
-          <a:bodyPr rtlCol="0" anchor="ctr"/>
-          <a:lstStyle/>
-          <a:p>
-            <a:pPr algn="ctr"/>
+              </a:defRPr>
+            </a:pPr>
+            <a:r>
+              <a:t>EV/Revenue Multiples by Transaction</a:t>
+            </a:r>
           </a:p>
         </p:txBody>
       </p:sp>
@@ -9565,8 +7784,86 @@
         </p:nvSpPr>
         <p:spPr>
           <a:xfrm>
-            <a:off x="640080" y="731520"/>
-            <a:ext cx="10515600" cy="1371600"/>
+            <a:off x="457200" y="274320"/>
+            <a:ext cx="11277295" cy="731520"/>
+          </a:xfrm>
+          <a:prstGeom prst="rect">
+            <a:avLst/>
+          </a:prstGeom>
+          <a:noFill/>
+        </p:spPr>
+        <p:txBody>
+          <a:bodyPr wrap="none" lIns="0" tIns="0" rIns="0" bIns="0">
+            <a:spAutoFit/>
+          </a:bodyPr>
+          <a:lstStyle/>
+          <a:p>
+            <a:pPr algn="l"/>
+            <a:r>
+              <a:rPr sz="2400" b="1">
+                <a:solidFill>
+                  <a:srgbClr val="183A58"/>
+                </a:solidFill>
+                <a:latin typeface="Arial"/>
+              </a:rPr>
+              <a:t>Precedent Transactions</a:t>
+            </a:r>
+          </a:p>
+        </p:txBody>
+      </p:sp>
+      <p:sp>
+        <p:nvSpPr>
+          <p:cNvPr id="3" name="Rectangle 2"/>
+          <p:cNvSpPr/>
+          <p:nvPr/>
+        </p:nvSpPr>
+        <p:spPr>
+          <a:xfrm>
+            <a:off x="457200" y="914400"/>
+            <a:ext cx="11277295" cy="45720"/>
+          </a:xfrm>
+          <a:prstGeom prst="rect">
+            <a:avLst/>
+          </a:prstGeom>
+          <a:solidFill>
+            <a:srgbClr val="183A58"/>
+          </a:solidFill>
+          <a:ln>
+            <a:noFill/>
+          </a:ln>
+        </p:spPr>
+        <p:style>
+          <a:lnRef idx="1">
+            <a:schemeClr val="accent1"/>
+          </a:lnRef>
+          <a:fillRef idx="3">
+            <a:schemeClr val="accent1"/>
+          </a:fillRef>
+          <a:effectRef idx="2">
+            <a:schemeClr val="accent1"/>
+          </a:effectRef>
+          <a:fontRef idx="minor">
+            <a:schemeClr val="lt1"/>
+          </a:fontRef>
+        </p:style>
+        <p:txBody>
+          <a:bodyPr rtlCol="0" anchor="ctr"/>
+          <a:lstStyle/>
+          <a:p>
+            <a:pPr algn="ctr"/>
+          </a:p>
+        </p:txBody>
+      </p:sp>
+      <p:sp>
+        <p:nvSpPr>
+          <p:cNvPr id="4" name="TextBox 3"/>
+          <p:cNvSpPr txBox="1"/>
+          <p:nvPr/>
+        </p:nvSpPr>
+        <p:spPr>
+          <a:xfrm>
+            <a:off x="1828800" y="1371600"/>
+            <a:ext cx="8229600" cy="457200"/>
           </a:xfrm>
           <a:prstGeom prst="rect">
             <a:avLst/>
@@ -9579,10 +7876,16 @@
           </a:bodyPr>
           <a:lstStyle/>
           <a:p>
-            <a:pPr algn="l"/>
-            <a:r>
-              <a:rPr sz="1400"/>
-              <a:t>Renderer error: 'str' object has no attribute 'get'</a:t>
+            <a:pPr algn="ctr">
+              <a:defRPr sz="1400" b="1">
+                <a:solidFill>
+                  <a:srgbClr val="183A58"/>
+                </a:solidFill>
+                <a:latin typeface="Arial"/>
+              </a:defRPr>
+            </a:pPr>
+            <a:r>
+              <a:t>EV/Revenue Multiples by Transaction</a:t>
             </a:r>
           </a:p>
         </p:txBody>
@@ -9613,6 +7916,54 @@
         </p:nvSpPr>
         <p:spPr>
           <a:xfrm>
+            <a:off x="640080" y="731520"/>
+            <a:ext cx="10515600" cy="1371600"/>
+          </a:xfrm>
+          <a:prstGeom prst="rect">
+            <a:avLst/>
+          </a:prstGeom>
+          <a:noFill/>
+        </p:spPr>
+        <p:txBody>
+          <a:bodyPr wrap="none">
+            <a:spAutoFit/>
+          </a:bodyPr>
+          <a:lstStyle/>
+          <a:p>
+            <a:pPr algn="l"/>
+            <a:r>
+              <a:rPr sz="1400"/>
+              <a:t>Renderer error for render_precedent_transactions_slide: '&gt;' not supported between instances of 'str' and 'int'</a:t>
+            </a:r>
+          </a:p>
+        </p:txBody>
+      </p:sp>
+    </p:spTree>
+  </p:cSld>
+  <p:clrMapOvr>
+    <a:masterClrMapping/>
+  </p:clrMapOvr>
+</p:sld>
+</file>
+
+<file path=ppt/slides/slide15.xml><?xml version="1.0" encoding="utf-8"?>
+<p:sld xmlns:a="http://schemas.openxmlformats.org/drawingml/2006/main" xmlns:p="http://schemas.openxmlformats.org/presentationml/2006/main" xmlns:r="http://schemas.openxmlformats.org/officeDocument/2006/relationships">
+  <p:cSld>
+    <p:spTree>
+      <p:nvGrpSpPr>
+        <p:cNvPr id="1" name=""/>
+        <p:cNvGrpSpPr/>
+        <p:nvPr/>
+      </p:nvGrpSpPr>
+      <p:grpSpPr/>
+      <p:sp>
+        <p:nvSpPr>
+          <p:cNvPr id="2" name="TextBox 1"/>
+          <p:cNvSpPr txBox="1"/>
+          <p:nvPr/>
+        </p:nvSpPr>
+        <p:spPr>
+          <a:xfrm>
             <a:off x="457200" y="274320"/>
             <a:ext cx="11277295" cy="731520"/>
           </a:xfrm>
@@ -9635,7 +7986,7 @@
                 </a:solidFill>
                 <a:latin typeface="Arial"/>
               </a:rPr>
-              <a:t>SEA Conglomerate Strategic Buyers</a:t>
+              <a:t>Margin &amp; Cost Resilience</a:t>
             </a:r>
           </a:p>
         </p:txBody>
@@ -9683,6 +8034,778 @@
           </a:p>
         </p:txBody>
       </p:sp>
+      <p:sp>
+        <p:nvSpPr>
+          <p:cNvPr id="4" name="TextBox 3"/>
+          <p:cNvSpPr txBox="1"/>
+          <p:nvPr/>
+        </p:nvSpPr>
+        <p:spPr>
+          <a:xfrm>
+            <a:off x="914400" y="1280160"/>
+            <a:ext cx="5486400" cy="274320"/>
+          </a:xfrm>
+          <a:prstGeom prst="rect">
+            <a:avLst/>
+          </a:prstGeom>
+          <a:noFill/>
+          <a:ln>
+            <a:noFill/>
+          </a:ln>
+          <a:effectLst/>
+        </p:spPr>
+        <p:txBody>
+          <a:bodyPr wrap="square">
+            <a:spAutoFit/>
+          </a:bodyPr>
+          <a:lstStyle/>
+          <a:p>
+            <a:pPr algn="l"/>
+            <a:r>
+              <a:rPr sz="1400" b="1">
+                <a:solidFill>
+                  <a:srgbClr val="183A58"/>
+                </a:solidFill>
+                <a:latin typeface="Arial"/>
+              </a:rPr>
+              <a:t>EBITDA Margin Trend</a:t>
+            </a:r>
+          </a:p>
+        </p:txBody>
+      </p:sp>
+      <p:graphicFrame>
+        <p:nvGraphicFramePr>
+          <p:cNvPr id="5" name="Chart 4"/>
+          <p:cNvGraphicFramePr>
+            <a:graphicFrameLocks noGrp="1"/>
+          </p:cNvGraphicFramePr>
+          <p:nvPr/>
+        </p:nvGraphicFramePr>
+        <p:xfrm>
+          <a:off x="914400" y="1645920"/>
+          <a:ext cx="5486400" cy="2011680"/>
+        </p:xfrm>
+        <a:graphic>
+          <a:graphicData uri="http://schemas.openxmlformats.org/drawingml/2006/chart">
+            <c:chart xmlns:c="http://schemas.openxmlformats.org/drawingml/2006/chart" r:id="rId2"/>
+          </a:graphicData>
+        </a:graphic>
+      </p:graphicFrame>
+      <p:sp>
+        <p:nvSpPr>
+          <p:cNvPr id="6" name="TextBox 5"/>
+          <p:cNvSpPr txBox="1"/>
+          <p:nvPr/>
+        </p:nvSpPr>
+        <p:spPr>
+          <a:xfrm>
+            <a:off x="4572000" y="3749039"/>
+            <a:ext cx="2286000" cy="137160"/>
+          </a:xfrm>
+          <a:prstGeom prst="rect">
+            <a:avLst/>
+          </a:prstGeom>
+          <a:noFill/>
+          <a:ln>
+            <a:noFill/>
+          </a:ln>
+          <a:effectLst/>
+        </p:spPr>
+        <p:txBody>
+          <a:bodyPr wrap="square">
+            <a:spAutoFit/>
+          </a:bodyPr>
+          <a:lstStyle/>
+          <a:p>
+            <a:pPr algn="r"/>
+            <a:r>
+              <a:rPr sz="800" b="0">
+                <a:solidFill>
+                  <a:srgbClr val="404040"/>
+                </a:solidFill>
+                <a:latin typeface="Arial"/>
+              </a:rPr>
+              <a:t>Source: Company financials</a:t>
+            </a:r>
+          </a:p>
+        </p:txBody>
+      </p:sp>
+      <p:sp>
+        <p:nvSpPr>
+          <p:cNvPr id="7" name="TextBox 6"/>
+          <p:cNvSpPr txBox="1"/>
+          <p:nvPr/>
+        </p:nvSpPr>
+        <p:spPr>
+          <a:xfrm>
+            <a:off x="914400" y="4023360"/>
+            <a:ext cx="5486400" cy="274320"/>
+          </a:xfrm>
+          <a:prstGeom prst="rect">
+            <a:avLst/>
+          </a:prstGeom>
+          <a:noFill/>
+          <a:ln>
+            <a:noFill/>
+          </a:ln>
+          <a:effectLst/>
+        </p:spPr>
+        <p:txBody>
+          <a:bodyPr wrap="square">
+            <a:spAutoFit/>
+          </a:bodyPr>
+          <a:lstStyle/>
+          <a:p>
+            <a:pPr algn="l"/>
+            <a:r>
+              <a:rPr sz="1400" b="1">
+                <a:solidFill>
+                  <a:srgbClr val="183A58"/>
+                </a:solidFill>
+                <a:latin typeface="Arial"/>
+              </a:rPr>
+              <a:t>Cost Management &amp; Efficiency Initiatives</a:t>
+            </a:r>
+          </a:p>
+        </p:txBody>
+      </p:sp>
+      <p:sp>
+        <p:nvSpPr>
+          <p:cNvPr id="8" name="Oval 7"/>
+          <p:cNvSpPr/>
+          <p:nvPr/>
+        </p:nvSpPr>
+        <p:spPr>
+          <a:xfrm>
+            <a:off x="1097280" y="4389120"/>
+            <a:ext cx="54864" cy="54864"/>
+          </a:xfrm>
+          <a:prstGeom prst="ellipse">
+            <a:avLst/>
+          </a:prstGeom>
+          <a:solidFill>
+            <a:srgbClr val="B5975B"/>
+          </a:solidFill>
+          <a:ln>
+            <a:noFill/>
+          </a:ln>
+          <a:effectLst/>
+        </p:spPr>
+        <p:style>
+          <a:lnRef idx="1">
+            <a:schemeClr val="accent1"/>
+          </a:lnRef>
+          <a:fillRef idx="3">
+            <a:schemeClr val="accent1"/>
+          </a:fillRef>
+          <a:effectRef idx="2">
+            <a:schemeClr val="accent1"/>
+          </a:effectRef>
+          <a:fontRef idx="minor">
+            <a:schemeClr val="lt1"/>
+          </a:fontRef>
+        </p:style>
+        <p:txBody>
+          <a:bodyPr rtlCol="0" anchor="ctr"/>
+          <a:lstStyle/>
+          <a:p>
+            <a:pPr algn="ctr"/>
+          </a:p>
+        </p:txBody>
+      </p:sp>
+      <p:sp>
+        <p:nvSpPr>
+          <p:cNvPr id="9" name="TextBox 8"/>
+          <p:cNvSpPr txBox="1"/>
+          <p:nvPr/>
+        </p:nvSpPr>
+        <p:spPr>
+          <a:xfrm>
+            <a:off x="1234440" y="4343400"/>
+            <a:ext cx="5029200" cy="137160"/>
+          </a:xfrm>
+          <a:prstGeom prst="rect">
+            <a:avLst/>
+          </a:prstGeom>
+          <a:noFill/>
+          <a:ln>
+            <a:noFill/>
+          </a:ln>
+          <a:effectLst/>
+        </p:spPr>
+        <p:txBody>
+          <a:bodyPr wrap="square">
+            <a:spAutoFit/>
+          </a:bodyPr>
+          <a:lstStyle/>
+          <a:p>
+            <a:pPr algn="l"/>
+            <a:r>
+              <a:rPr sz="1000" b="1">
+                <a:solidFill>
+                  <a:srgbClr val="183A58"/>
+                </a:solidFill>
+                <a:latin typeface="Arial"/>
+              </a:rPr>
+              <a:t>Supply Chain Optimization</a:t>
+            </a:r>
+          </a:p>
+        </p:txBody>
+      </p:sp>
+      <p:sp>
+        <p:nvSpPr>
+          <p:cNvPr id="10" name="TextBox 9"/>
+          <p:cNvSpPr txBox="1"/>
+          <p:nvPr/>
+        </p:nvSpPr>
+        <p:spPr>
+          <a:xfrm>
+            <a:off x="1234440" y="4480560"/>
+            <a:ext cx="5029200" cy="256032"/>
+          </a:xfrm>
+          <a:prstGeom prst="rect">
+            <a:avLst/>
+          </a:prstGeom>
+          <a:noFill/>
+          <a:ln>
+            <a:noFill/>
+          </a:ln>
+          <a:effectLst/>
+        </p:spPr>
+        <p:txBody>
+          <a:bodyPr wrap="square">
+            <a:spAutoFit/>
+          </a:bodyPr>
+          <a:lstStyle/>
+          <a:p>
+            <a:pPr algn="l"/>
+            <a:r>
+              <a:rPr sz="900" b="0">
+                <a:solidFill>
+                  <a:srgbClr val="404040"/>
+                </a:solidFill>
+                <a:latin typeface="Arial"/>
+              </a:rPr>
+              <a:t>Bulk purchasing and negotiation for wheat, dairy, and packaging.</a:t>
+            </a:r>
+          </a:p>
+        </p:txBody>
+      </p:sp>
+      <p:sp>
+        <p:nvSpPr>
+          <p:cNvPr id="11" name="Oval 10"/>
+          <p:cNvSpPr/>
+          <p:nvPr/>
+        </p:nvSpPr>
+        <p:spPr>
+          <a:xfrm>
+            <a:off x="1097280" y="4800600"/>
+            <a:ext cx="54864" cy="54864"/>
+          </a:xfrm>
+          <a:prstGeom prst="ellipse">
+            <a:avLst/>
+          </a:prstGeom>
+          <a:solidFill>
+            <a:srgbClr val="B5975B"/>
+          </a:solidFill>
+          <a:ln>
+            <a:noFill/>
+          </a:ln>
+          <a:effectLst/>
+        </p:spPr>
+        <p:style>
+          <a:lnRef idx="1">
+            <a:schemeClr val="accent1"/>
+          </a:lnRef>
+          <a:fillRef idx="3">
+            <a:schemeClr val="accent1"/>
+          </a:fillRef>
+          <a:effectRef idx="2">
+            <a:schemeClr val="accent1"/>
+          </a:effectRef>
+          <a:fontRef idx="minor">
+            <a:schemeClr val="lt1"/>
+          </a:fontRef>
+        </p:style>
+        <p:txBody>
+          <a:bodyPr rtlCol="0" anchor="ctr"/>
+          <a:lstStyle/>
+          <a:p>
+            <a:pPr algn="ctr"/>
+          </a:p>
+        </p:txBody>
+      </p:sp>
+      <p:sp>
+        <p:nvSpPr>
+          <p:cNvPr id="12" name="TextBox 11"/>
+          <p:cNvSpPr txBox="1"/>
+          <p:nvPr/>
+        </p:nvSpPr>
+        <p:spPr>
+          <a:xfrm>
+            <a:off x="1234440" y="4754880"/>
+            <a:ext cx="5029200" cy="137160"/>
+          </a:xfrm>
+          <a:prstGeom prst="rect">
+            <a:avLst/>
+          </a:prstGeom>
+          <a:noFill/>
+          <a:ln>
+            <a:noFill/>
+          </a:ln>
+          <a:effectLst/>
+        </p:spPr>
+        <p:txBody>
+          <a:bodyPr wrap="square">
+            <a:spAutoFit/>
+          </a:bodyPr>
+          <a:lstStyle/>
+          <a:p>
+            <a:pPr algn="l"/>
+            <a:r>
+              <a:rPr sz="1000" b="1">
+                <a:solidFill>
+                  <a:srgbClr val="183A58"/>
+                </a:solidFill>
+                <a:latin typeface="Arial"/>
+              </a:rPr>
+              <a:t>Local Sourcing</a:t>
+            </a:r>
+          </a:p>
+        </p:txBody>
+      </p:sp>
+      <p:sp>
+        <p:nvSpPr>
+          <p:cNvPr id="13" name="TextBox 12"/>
+          <p:cNvSpPr txBox="1"/>
+          <p:nvPr/>
+        </p:nvSpPr>
+        <p:spPr>
+          <a:xfrm>
+            <a:off x="1234440" y="4892040"/>
+            <a:ext cx="5029200" cy="256032"/>
+          </a:xfrm>
+          <a:prstGeom prst="rect">
+            <a:avLst/>
+          </a:prstGeom>
+          <a:noFill/>
+          <a:ln>
+            <a:noFill/>
+          </a:ln>
+          <a:effectLst/>
+        </p:spPr>
+        <p:txBody>
+          <a:bodyPr wrap="square">
+            <a:spAutoFit/>
+          </a:bodyPr>
+          <a:lstStyle/>
+          <a:p>
+            <a:pPr algn="l"/>
+            <a:r>
+              <a:rPr sz="900" b="0">
+                <a:solidFill>
+                  <a:srgbClr val="404040"/>
+                </a:solidFill>
+                <a:latin typeface="Arial"/>
+              </a:rPr>
+              <a:t>Use of local suppliers for ingredients to reduce currency risk.</a:t>
+            </a:r>
+          </a:p>
+        </p:txBody>
+      </p:sp>
+      <p:sp>
+        <p:nvSpPr>
+          <p:cNvPr id="14" name="Oval 13"/>
+          <p:cNvSpPr/>
+          <p:nvPr/>
+        </p:nvSpPr>
+        <p:spPr>
+          <a:xfrm>
+            <a:off x="1097280" y="5212080"/>
+            <a:ext cx="54864" cy="54864"/>
+          </a:xfrm>
+          <a:prstGeom prst="ellipse">
+            <a:avLst/>
+          </a:prstGeom>
+          <a:solidFill>
+            <a:srgbClr val="B5975B"/>
+          </a:solidFill>
+          <a:ln>
+            <a:noFill/>
+          </a:ln>
+          <a:effectLst/>
+        </p:spPr>
+        <p:style>
+          <a:lnRef idx="1">
+            <a:schemeClr val="accent1"/>
+          </a:lnRef>
+          <a:fillRef idx="3">
+            <a:schemeClr val="accent1"/>
+          </a:fillRef>
+          <a:effectRef idx="2">
+            <a:schemeClr val="accent1"/>
+          </a:effectRef>
+          <a:fontRef idx="minor">
+            <a:schemeClr val="lt1"/>
+          </a:fontRef>
+        </p:style>
+        <p:txBody>
+          <a:bodyPr rtlCol="0" anchor="ctr"/>
+          <a:lstStyle/>
+          <a:p>
+            <a:pPr algn="ctr"/>
+          </a:p>
+        </p:txBody>
+      </p:sp>
+      <p:sp>
+        <p:nvSpPr>
+          <p:cNvPr id="15" name="TextBox 14"/>
+          <p:cNvSpPr txBox="1"/>
+          <p:nvPr/>
+        </p:nvSpPr>
+        <p:spPr>
+          <a:xfrm>
+            <a:off x="1234440" y="5166360"/>
+            <a:ext cx="5029200" cy="137160"/>
+          </a:xfrm>
+          <a:prstGeom prst="rect">
+            <a:avLst/>
+          </a:prstGeom>
+          <a:noFill/>
+          <a:ln>
+            <a:noFill/>
+          </a:ln>
+          <a:effectLst/>
+        </p:spPr>
+        <p:txBody>
+          <a:bodyPr wrap="square">
+            <a:spAutoFit/>
+          </a:bodyPr>
+          <a:lstStyle/>
+          <a:p>
+            <a:pPr algn="l"/>
+            <a:r>
+              <a:rPr sz="1000" b="1">
+                <a:solidFill>
+                  <a:srgbClr val="183A58"/>
+                </a:solidFill>
+                <a:latin typeface="Arial"/>
+              </a:rPr>
+              <a:t>Process Automation</a:t>
+            </a:r>
+          </a:p>
+        </p:txBody>
+      </p:sp>
+      <p:sp>
+        <p:nvSpPr>
+          <p:cNvPr id="16" name="TextBox 15"/>
+          <p:cNvSpPr txBox="1"/>
+          <p:nvPr/>
+        </p:nvSpPr>
+        <p:spPr>
+          <a:xfrm>
+            <a:off x="1234440" y="5303520"/>
+            <a:ext cx="5029200" cy="256032"/>
+          </a:xfrm>
+          <a:prstGeom prst="rect">
+            <a:avLst/>
+          </a:prstGeom>
+          <a:noFill/>
+          <a:ln>
+            <a:noFill/>
+          </a:ln>
+          <a:effectLst/>
+        </p:spPr>
+        <p:txBody>
+          <a:bodyPr wrap="square">
+            <a:spAutoFit/>
+          </a:bodyPr>
+          <a:lstStyle/>
+          <a:p>
+            <a:pPr algn="l"/>
+            <a:r>
+              <a:rPr sz="900" b="0">
+                <a:solidFill>
+                  <a:srgbClr val="404040"/>
+                </a:solidFill>
+                <a:latin typeface="Arial"/>
+              </a:rPr>
+              <a:t>Automated production systems for labor efficiency.</a:t>
+            </a:r>
+          </a:p>
+        </p:txBody>
+      </p:sp>
+      <p:sp>
+        <p:nvSpPr>
+          <p:cNvPr id="17" name="TextBox 16"/>
+          <p:cNvSpPr txBox="1"/>
+          <p:nvPr/>
+        </p:nvSpPr>
+        <p:spPr>
+          <a:xfrm>
+            <a:off x="7315200" y="1280160"/>
+            <a:ext cx="4572000" cy="274320"/>
+          </a:xfrm>
+          <a:prstGeom prst="rect">
+            <a:avLst/>
+          </a:prstGeom>
+          <a:noFill/>
+          <a:ln>
+            <a:noFill/>
+          </a:ln>
+          <a:effectLst/>
+        </p:spPr>
+        <p:txBody>
+          <a:bodyPr wrap="square">
+            <a:spAutoFit/>
+          </a:bodyPr>
+          <a:lstStyle/>
+          <a:p>
+            <a:pPr algn="l"/>
+            <a:r>
+              <a:rPr sz="1400" b="1">
+                <a:solidFill>
+                  <a:srgbClr val="183A58"/>
+                </a:solidFill>
+                <a:latin typeface="Arial"/>
+              </a:rPr>
+              <a:t>Risk Mitigation Strategies</a:t>
+            </a:r>
+          </a:p>
+        </p:txBody>
+      </p:sp>
+      <p:sp>
+        <p:nvSpPr>
+          <p:cNvPr id="18" name="Rectangle 17"/>
+          <p:cNvSpPr/>
+          <p:nvPr/>
+        </p:nvSpPr>
+        <p:spPr>
+          <a:xfrm>
+            <a:off x="7315200" y="1645920"/>
+            <a:ext cx="4572000" cy="1645920"/>
+          </a:xfrm>
+          <a:prstGeom prst="rect">
+            <a:avLst/>
+          </a:prstGeom>
+          <a:solidFill>
+            <a:srgbClr val="F0F0F0"/>
+          </a:solidFill>
+          <a:ln>
+            <a:noFill/>
+          </a:ln>
+          <a:effectLst/>
+        </p:spPr>
+        <p:style>
+          <a:lnRef idx="1">
+            <a:schemeClr val="accent1"/>
+          </a:lnRef>
+          <a:fillRef idx="3">
+            <a:schemeClr val="accent1"/>
+          </a:fillRef>
+          <a:effectRef idx="2">
+            <a:schemeClr val="accent1"/>
+          </a:effectRef>
+          <a:fontRef idx="minor">
+            <a:schemeClr val="lt1"/>
+          </a:fontRef>
+        </p:style>
+        <p:txBody>
+          <a:bodyPr rtlCol="0" anchor="ctr"/>
+          <a:lstStyle/>
+          <a:p>
+            <a:pPr algn="ctr"/>
+          </a:p>
+        </p:txBody>
+      </p:sp>
+      <p:sp>
+        <p:nvSpPr>
+          <p:cNvPr id="19" name="Rectangle 18"/>
+          <p:cNvSpPr/>
+          <p:nvPr/>
+        </p:nvSpPr>
+        <p:spPr>
+          <a:xfrm>
+            <a:off x="7315200" y="1645920"/>
+            <a:ext cx="91440" cy="1645920"/>
+          </a:xfrm>
+          <a:prstGeom prst="rect">
+            <a:avLst/>
+          </a:prstGeom>
+          <a:solidFill>
+            <a:srgbClr val="B5975B"/>
+          </a:solidFill>
+          <a:ln>
+            <a:noFill/>
+          </a:ln>
+          <a:effectLst/>
+        </p:spPr>
+        <p:style>
+          <a:lnRef idx="1">
+            <a:schemeClr val="accent1"/>
+          </a:lnRef>
+          <a:fillRef idx="3">
+            <a:schemeClr val="accent1"/>
+          </a:fillRef>
+          <a:effectRef idx="2">
+            <a:schemeClr val="accent1"/>
+          </a:effectRef>
+          <a:fontRef idx="minor">
+            <a:schemeClr val="lt1"/>
+          </a:fontRef>
+        </p:style>
+        <p:txBody>
+          <a:bodyPr rtlCol="0" anchor="ctr"/>
+          <a:lstStyle/>
+          <a:p>
+            <a:pPr algn="ctr"/>
+          </a:p>
+        </p:txBody>
+      </p:sp>
+    </p:spTree>
+  </p:cSld>
+  <p:clrMapOvr>
+    <a:masterClrMapping/>
+  </p:clrMapOvr>
+</p:sld>
+</file>
+
+<file path=ppt/slides/slide16.xml><?xml version="1.0" encoding="utf-8"?>
+<p:sld xmlns:a="http://schemas.openxmlformats.org/drawingml/2006/main" xmlns:p="http://schemas.openxmlformats.org/presentationml/2006/main" xmlns:r="http://schemas.openxmlformats.org/officeDocument/2006/relationships">
+  <p:cSld>
+    <p:spTree>
+      <p:nvGrpSpPr>
+        <p:cNvPr id="1" name=""/>
+        <p:cNvGrpSpPr/>
+        <p:nvPr/>
+      </p:nvGrpSpPr>
+      <p:grpSpPr/>
+      <p:sp>
+        <p:nvSpPr>
+          <p:cNvPr id="2" name="TextBox 1"/>
+          <p:cNvSpPr txBox="1"/>
+          <p:nvPr/>
+        </p:nvSpPr>
+        <p:spPr>
+          <a:xfrm>
+            <a:off x="640080" y="731520"/>
+            <a:ext cx="10515600" cy="1371600"/>
+          </a:xfrm>
+          <a:prstGeom prst="rect">
+            <a:avLst/>
+          </a:prstGeom>
+          <a:noFill/>
+        </p:spPr>
+        <p:txBody>
+          <a:bodyPr wrap="none">
+            <a:spAutoFit/>
+          </a:bodyPr>
+          <a:lstStyle/>
+          <a:p>
+            <a:pPr algn="l"/>
+            <a:r>
+              <a:rPr sz="1400"/>
+              <a:t>Renderer error: 'str' object has no attribute 'get'</a:t>
+            </a:r>
+          </a:p>
+        </p:txBody>
+      </p:sp>
+    </p:spTree>
+  </p:cSld>
+  <p:clrMapOvr>
+    <a:masterClrMapping/>
+  </p:clrMapOvr>
+</p:sld>
+</file>
+
+<file path=ppt/slides/slide17.xml><?xml version="1.0" encoding="utf-8"?>
+<p:sld xmlns:a="http://schemas.openxmlformats.org/drawingml/2006/main" xmlns:p="http://schemas.openxmlformats.org/presentationml/2006/main" xmlns:r="http://schemas.openxmlformats.org/officeDocument/2006/relationships">
+  <p:cSld>
+    <p:spTree>
+      <p:nvGrpSpPr>
+        <p:cNvPr id="1" name=""/>
+        <p:cNvGrpSpPr/>
+        <p:nvPr/>
+      </p:nvGrpSpPr>
+      <p:grpSpPr/>
+      <p:sp>
+        <p:nvSpPr>
+          <p:cNvPr id="2" name="TextBox 1"/>
+          <p:cNvSpPr txBox="1"/>
+          <p:nvPr/>
+        </p:nvSpPr>
+        <p:spPr>
+          <a:xfrm>
+            <a:off x="457200" y="274320"/>
+            <a:ext cx="11277295" cy="731520"/>
+          </a:xfrm>
+          <a:prstGeom prst="rect">
+            <a:avLst/>
+          </a:prstGeom>
+          <a:noFill/>
+        </p:spPr>
+        <p:txBody>
+          <a:bodyPr wrap="none" lIns="0" tIns="0" rIns="0" bIns="0">
+            <a:spAutoFit/>
+          </a:bodyPr>
+          <a:lstStyle/>
+          <a:p>
+            <a:pPr algn="l"/>
+            <a:r>
+              <a:rPr sz="2400" b="1">
+                <a:solidFill>
+                  <a:srgbClr val="183A58"/>
+                </a:solidFill>
+                <a:latin typeface="Arial"/>
+              </a:rPr>
+              <a:t>SEA Conglomerate Strategic Buyers</a:t>
+            </a:r>
+          </a:p>
+        </p:txBody>
+      </p:sp>
+      <p:sp>
+        <p:nvSpPr>
+          <p:cNvPr id="3" name="Rectangle 2"/>
+          <p:cNvSpPr/>
+          <p:nvPr/>
+        </p:nvSpPr>
+        <p:spPr>
+          <a:xfrm>
+            <a:off x="457200" y="914400"/>
+            <a:ext cx="11277295" cy="45720"/>
+          </a:xfrm>
+          <a:prstGeom prst="rect">
+            <a:avLst/>
+          </a:prstGeom>
+          <a:solidFill>
+            <a:srgbClr val="183A58"/>
+          </a:solidFill>
+          <a:ln>
+            <a:noFill/>
+          </a:ln>
+        </p:spPr>
+        <p:style>
+          <a:lnRef idx="1">
+            <a:schemeClr val="accent1"/>
+          </a:lnRef>
+          <a:fillRef idx="3">
+            <a:schemeClr val="accent1"/>
+          </a:fillRef>
+          <a:effectRef idx="2">
+            <a:schemeClr val="accent1"/>
+          </a:effectRef>
+          <a:fontRef idx="minor">
+            <a:schemeClr val="lt1"/>
+          </a:fontRef>
+        </p:style>
+        <p:txBody>
+          <a:bodyPr rtlCol="0" anchor="ctr"/>
+          <a:lstStyle/>
+          <a:p>
+            <a:pPr algn="ctr"/>
+          </a:p>
+        </p:txBody>
+      </p:sp>
       <p:graphicFrame>
         <p:nvGraphicFramePr>
           <p:cNvPr id="4" name="Table 3"/>
@@ -9693,7 +8816,7 @@
         </p:nvGraphicFramePr>
         <p:xfrm>
           <a:off x="457200" y="1371600"/>
-          <a:ext cx="11277295" cy="4572000"/>
+          <a:ext cx="11277295" cy="2560320"/>
         </p:xfrm>
         <a:graphic>
           <a:graphicData uri="http://schemas.openxmlformats.org/drawingml/2006/table">
@@ -9870,299 +8993,7 @@
                         </a:defRPr>
                       </a:pPr>
                       <a:r>
-                        <a:t>Ayala Corporation</a:t>
-                      </a:r>
-                    </a:p>
-                  </a:txBody>
-                  <a:tcPr>
-                    <a:solidFill>
-                      <a:srgbClr val="FFFFFF"/>
-                    </a:solidFill>
-                  </a:tcPr>
-                </a:tc>
-                <a:tc>
-                  <a:txBody>
-                    <a:bodyPr wrap="square"/>
-                    <a:lstStyle/>
-                    <a:p>
-                      <a:pPr algn="l">
-                        <a:defRPr sz="1100" b="0">
-                          <a:solidFill>
-                            <a:srgbClr val="404040"/>
-                          </a:solidFill>
-                          <a:latin typeface="Arial"/>
-                        </a:defRPr>
-                      </a:pPr>
-                      <a:r>
-                        <a:t>Philippines</a:t>
-                      </a:r>
-                    </a:p>
-                  </a:txBody>
-                  <a:tcPr>
-                    <a:solidFill>
-                      <a:srgbClr val="FFFFFF"/>
-                    </a:solidFill>
-                  </a:tcPr>
-                </a:tc>
-                <a:tc>
-                  <a:txBody>
-                    <a:bodyPr wrap="square"/>
-                    <a:lstStyle/>
-                    <a:p>
-                      <a:pPr algn="l">
-                        <a:defRPr sz="1100" b="0">
-                          <a:solidFill>
-                            <a:srgbClr val="404040"/>
-                          </a:solidFill>
-                          <a:latin typeface="Arial"/>
-                        </a:defRPr>
-                      </a:pPr>
-                      <a:r>
-                        <a:t>Leading diversified conglomerate with significant healthcare investments through Ayala Healthcare Holdings</a:t>
-                      </a:r>
-                    </a:p>
-                  </a:txBody>
-                  <a:tcPr>
-                    <a:solidFill>
-                      <a:srgbClr val="FFFFFF"/>
-                    </a:solidFill>
-                  </a:tcPr>
-                </a:tc>
-                <a:tc>
-                  <a:txBody>
-                    <a:bodyPr wrap="square"/>
-                    <a:lstStyle/>
-                    <a:p>
-                      <a:pPr algn="l">
-                        <a:defRPr sz="1100" b="0">
-                          <a:solidFill>
-                            <a:srgbClr val="404040"/>
-                          </a:solidFill>
-                          <a:latin typeface="Arial"/>
-                        </a:defRPr>
-                      </a:pPr>
-                      <a:r>
-                        <a:t>Ayala family trust and institutional investors</a:t>
-                      </a:r>
-                    </a:p>
-                  </a:txBody>
-                  <a:tcPr>
-                    <a:solidFill>
-                      <a:srgbClr val="FFFFFF"/>
-                    </a:solidFill>
-                  </a:tcPr>
-                </a:tc>
-                <a:tc>
-                  <a:txBody>
-                    <a:bodyPr wrap="square"/>
-                    <a:lstStyle/>
-                    <a:p>
-                      <a:pPr algn="l">
-                        <a:defRPr sz="1100" b="0">
-                          <a:solidFill>
-                            <a:srgbClr val="404040"/>
-                          </a:solidFill>
-                          <a:latin typeface="Arial"/>
-                        </a:defRPr>
-                      </a:pPr>
-                      <a:r>
-                        <a:t>Revenue: US$3.2B, Healthcare growing 15%+ annually</a:t>
-                      </a:r>
-                    </a:p>
-                  </a:txBody>
-                  <a:tcPr>
-                    <a:solidFill>
-                      <a:srgbClr val="FFFFFF"/>
-                    </a:solidFill>
-                  </a:tcPr>
-                </a:tc>
-                <a:tc>
-                  <a:txBody>
-                    <a:bodyPr wrap="square"/>
-                    <a:lstStyle/>
-                    <a:p>
-                      <a:pPr algn="l">
-                        <a:defRPr sz="1100" b="0">
-                          <a:solidFill>
-                            <a:srgbClr val="404040"/>
-                          </a:solidFill>
-                          <a:latin typeface="Arial"/>
-                        </a:defRPr>
-                      </a:pPr>
-                      <a:r>
-                        <a:t>Managing Director - SEA Healthcare</a:t>
-                      </a:r>
-                    </a:p>
-                  </a:txBody>
-                  <a:tcPr>
-                    <a:solidFill>
-                      <a:srgbClr val="FFFFFF"/>
-                    </a:solidFill>
-                  </a:tcPr>
-                </a:tc>
-              </a:tr>
-              <a:tr h="1005840">
-                <a:tc>
-                  <a:txBody>
-                    <a:bodyPr wrap="square"/>
-                    <a:lstStyle/>
-                    <a:p>
-                      <a:pPr algn="l">
-                        <a:defRPr sz="1100" b="0">
-                          <a:solidFill>
-                            <a:srgbClr val="404040"/>
-                          </a:solidFill>
-                          <a:latin typeface="Arial"/>
-                        </a:defRPr>
-                      </a:pPr>
-                      <a:r>
-                        <a:t>CP Group (Charoen Pokphand)</a:t>
-                      </a:r>
-                    </a:p>
-                  </a:txBody>
-                  <a:tcPr>
-                    <a:solidFill>
-                      <a:srgbClr val="FFFFFF"/>
-                    </a:solidFill>
-                  </a:tcPr>
-                </a:tc>
-                <a:tc>
-                  <a:txBody>
-                    <a:bodyPr wrap="square"/>
-                    <a:lstStyle/>
-                    <a:p>
-                      <a:pPr algn="l">
-                        <a:defRPr sz="1100" b="0">
-                          <a:solidFill>
-                            <a:srgbClr val="404040"/>
-                          </a:solidFill>
-                          <a:latin typeface="Arial"/>
-                        </a:defRPr>
-                      </a:pPr>
-                      <a:r>
-                        <a:t>Thailand</a:t>
-                      </a:r>
-                    </a:p>
-                  </a:txBody>
-                  <a:tcPr>
-                    <a:solidFill>
-                      <a:srgbClr val="FFFFFF"/>
-                    </a:solidFill>
-                  </a:tcPr>
-                </a:tc>
-                <a:tc>
-                  <a:txBody>
-                    <a:bodyPr wrap="square"/>
-                    <a:lstStyle/>
-                    <a:p>
-                      <a:pPr algn="l">
-                        <a:defRPr sz="1100" b="0">
-                          <a:solidFill>
-                            <a:srgbClr val="404040"/>
-                          </a:solidFill>
-                          <a:latin typeface="Arial"/>
-                        </a:defRPr>
-                      </a:pPr>
-                      <a:r>
-                        <a:t>Massive diversified conglomerate with healthcare retail exposure through pharmacy chains</a:t>
-                      </a:r>
-                    </a:p>
-                  </a:txBody>
-                  <a:tcPr>
-                    <a:solidFill>
-                      <a:srgbClr val="FFFFFF"/>
-                    </a:solidFill>
-                  </a:tcPr>
-                </a:tc>
-                <a:tc>
-                  <a:txBody>
-                    <a:bodyPr wrap="square"/>
-                    <a:lstStyle/>
-                    <a:p>
-                      <a:pPr algn="l">
-                        <a:defRPr sz="1100" b="0">
-                          <a:solidFill>
-                            <a:srgbClr val="404040"/>
-                          </a:solidFill>
-                          <a:latin typeface="Arial"/>
-                        </a:defRPr>
-                      </a:pPr>
-                      <a:r>
-                        <a:t>Chearavanont family and holding companies</a:t>
-                      </a:r>
-                    </a:p>
-                  </a:txBody>
-                  <a:tcPr>
-                    <a:solidFill>
-                      <a:srgbClr val="FFFFFF"/>
-                    </a:solidFill>
-                  </a:tcPr>
-                </a:tc>
-                <a:tc>
-                  <a:txBody>
-                    <a:bodyPr wrap="square"/>
-                    <a:lstStyle/>
-                    <a:p>
-                      <a:pPr algn="l">
-                        <a:defRPr sz="1100" b="0">
-                          <a:solidFill>
-                            <a:srgbClr val="404040"/>
-                          </a:solidFill>
-                          <a:latin typeface="Arial"/>
-                        </a:defRPr>
-                      </a:pPr>
-                      <a:r>
-                        <a:t>Revenue: US$45B+, Healthcare investments &gt;US$500M</a:t>
-                      </a:r>
-                    </a:p>
-                  </a:txBody>
-                  <a:tcPr>
-                    <a:solidFill>
-                      <a:srgbClr val="FFFFFF"/>
-                    </a:solidFill>
-                  </a:tcPr>
-                </a:tc>
-                <a:tc>
-                  <a:txBody>
-                    <a:bodyPr wrap="square"/>
-                    <a:lstStyle/>
-                    <a:p>
-                      <a:pPr algn="l">
-                        <a:defRPr sz="1100" b="0">
-                          <a:solidFill>
-                            <a:srgbClr val="404040"/>
-                          </a:solidFill>
-                          <a:latin typeface="Arial"/>
-                        </a:defRPr>
-                      </a:pPr>
-                      <a:r>
-                        <a:t>Managing Director - Consumer Healthcare</a:t>
-                      </a:r>
-                    </a:p>
-                  </a:txBody>
-                  <a:tcPr>
-                    <a:solidFill>
-                      <a:srgbClr val="FFFFFF"/>
-                    </a:solidFill>
-                  </a:tcPr>
-                </a:tc>
-              </a:tr>
-              <a:tr h="1005840">
-                <a:tc>
-                  <a:txBody>
-                    <a:bodyPr wrap="square"/>
-                    <a:lstStyle/>
-                    <a:p>
-                      <a:pPr algn="l">
-                        <a:defRPr sz="1100" b="0">
-                          <a:solidFill>
-                            <a:srgbClr val="404040"/>
-                          </a:solidFill>
-                          <a:latin typeface="Arial"/>
-                        </a:defRPr>
-                      </a:pPr>
-                      <a:r>
-                        <a:t>Sinar Mas Group</a:t>
+                        <a:t>Salim Group</a:t>
                       </a:r>
                     </a:p>
                   </a:txBody>
@@ -10210,7 +9041,7 @@
                         </a:defRPr>
                       </a:pPr>
                       <a:r>
-                        <a:t>Indonesian conglomerate with diversified portfolio and growing healthcare technology investments</a:t>
+                        <a:t>Indonesia’s largest conglomerate with interests in food, retail, and agriculture.</a:t>
                       </a:r>
                     </a:p>
                   </a:txBody>
@@ -10234,7 +9065,7 @@
                         </a:defRPr>
                       </a:pPr>
                       <a:r>
-                        <a:t>Widjaja family and investment vehicles</a:t>
+                        <a:t>Lim family</a:t>
                       </a:r>
                     </a:p>
                   </a:txBody>
@@ -10258,7 +9089,7 @@
                         </a:defRPr>
                       </a:pPr>
                       <a:r>
-                        <a:t>Revenue: US$15B+, Active healthtech program</a:t>
+                        <a:t>Assets &gt; USD 30B, strong cash flows</a:t>
                       </a:r>
                     </a:p>
                   </a:txBody>
@@ -10282,7 +9113,7 @@
                         </a:defRPr>
                       </a:pPr>
                       <a:r>
-                        <a:t>Executive Director - Indonesia Coverage</a:t>
+                        <a:t>Moelis Jakarta – Arief Putra</a:t>
                       </a:r>
                     </a:p>
                   </a:txBody>
@@ -10308,7 +9139,7 @@
                         </a:defRPr>
                       </a:pPr>
                       <a:r>
-                        <a:t>Genting Group</a:t>
+                        <a:t>Jardine Matheson Holdings</a:t>
                       </a:r>
                     </a:p>
                   </a:txBody>
@@ -10332,7 +9163,7 @@
                         </a:defRPr>
                       </a:pPr>
                       <a:r>
-                        <a:t>Malaysia</a:t>
+                        <a:t>Singapore/Hong Kong</a:t>
                       </a:r>
                     </a:p>
                   </a:txBody>
@@ -10356,7 +9187,7 @@
                         </a:defRPr>
                       </a:pPr>
                       <a:r>
-                        <a:t>Diversified conglomerate with strategic healthcare investments through integrated resort wellness</a:t>
+                        <a:t>Diversified SEA conglomerate with retail and F&amp;B assets.</a:t>
                       </a:r>
                     </a:p>
                   </a:txBody>
@@ -10380,7 +9211,7 @@
                         </a:defRPr>
                       </a:pPr>
                       <a:r>
-                        <a:t>Lim Kok Thay family trust</a:t>
+                        <a:t>Keswick family</a:t>
                       </a:r>
                     </a:p>
                   </a:txBody>
@@ -10404,7 +9235,7 @@
                         </a:defRPr>
                       </a:pPr>
                       <a:r>
-                        <a:t>Revenue: US$2.8B, Healthcare target US$200M+</a:t>
+                        <a:t>Assets &gt; USD 50B, EBITDA margin &gt; 20%</a:t>
                       </a:r>
                     </a:p>
                   </a:txBody>
@@ -10428,7 +9259,7 @@
                         </a:defRPr>
                       </a:pPr>
                       <a:r>
-                        <a:t>Managing Director - Malaysia Coverage</a:t>
+                        <a:t>Moelis Singapore – Rachel Tan</a:t>
                       </a:r>
                     </a:p>
                   </a:txBody>
@@ -10523,7 +9354,7 @@
 </p:sld>
 </file>
 
-<file path=ppt/slides/slide15.xml><?xml version="1.0" encoding="utf-8"?>
+<file path=ppt/slides/slide18.xml><?xml version="1.0" encoding="utf-8"?>
 <p:sld xmlns:a="http://schemas.openxmlformats.org/drawingml/2006/main" xmlns:p="http://schemas.openxmlformats.org/presentationml/2006/main" xmlns:r="http://schemas.openxmlformats.org/officeDocument/2006/relationships">
   <p:cSld>
     <p:spTree>
@@ -10621,7 +9452,7 @@
         </p:nvGraphicFramePr>
         <p:xfrm>
           <a:off x="457200" y="1463040"/>
-          <a:ext cx="10515600" cy="2743200"/>
+          <a:ext cx="10515600" cy="2926080"/>
         </p:xfrm>
         <a:graphic>
           <a:graphicData uri="http://schemas.openxmlformats.org/drawingml/2006/table">
@@ -10636,7 +9467,7 @@
                 <a:gridCol w="2011680"/>
                 <a:gridCol w="1371600"/>
               </a:tblGrid>
-              <a:tr h="548640">
+              <a:tr h="731520">
                 <a:tc>
                   <a:txBody>
                     <a:bodyPr/>
@@ -10753,7 +9584,7 @@
                   </a:tcPr>
                 </a:tc>
               </a:tr>
-              <a:tr h="548640">
+              <a:tr h="731520">
                 <a:tc>
                   <a:txBody>
                     <a:bodyPr wrap="square"/>
@@ -10767,7 +9598,7 @@
                           </a:solidFill>
                           <a:latin typeface="Arial"/>
                         </a:rPr>
-                        <a:t>PT Nippon Indosari Corpindo Tbk</a:t>
+                        <a:t>PT Indofood Sukses Makmur Tbk</a:t>
                       </a:r>
                     </a:p>
                   </a:txBody>
@@ -10790,7 +9621,7 @@
                           </a:solidFill>
                           <a:latin typeface="Arial"/>
                         </a:rPr>
-                        <a:t>Strengthen mass-market share, expand into premium and B2C retail bakery formats.</a:t>
+                        <a:t>Expansion of bakery footprint and synergy with existing distribution network.</a:t>
                       </a:r>
                     </a:p>
                   </a:txBody>
@@ -10813,7 +9644,7 @@
                           </a:solidFill>
                           <a:latin typeface="Arial"/>
                         </a:rPr>
-                        <a:t>Supply chain scale, distribution, operational integration, outlet network</a:t>
+                        <a:t>Supply chain, retail network, distribution.</a:t>
                       </a:r>
                     </a:p>
                   </a:txBody>
@@ -10836,7 +9667,7 @@
                           </a:solidFill>
                           <a:latin typeface="Arial"/>
                         </a:rPr>
-                        <a:t>Integration risk, overlap in product positioning</a:t>
+                        <a:t>Integration risks, quality control, cultural fit.</a:t>
                       </a:r>
                     </a:p>
                   </a:txBody>
@@ -10870,7 +9701,7 @@
                   </a:tcPr>
                 </a:tc>
               </a:tr>
-              <a:tr h="548640">
+              <a:tr h="731520">
                 <a:tc>
                   <a:txBody>
                     <a:bodyPr wrap="square"/>
@@ -10884,7 +9715,7 @@
                           </a:solidFill>
                           <a:latin typeface="Arial"/>
                         </a:rPr>
-                        <a:t>BreadTalk Group</a:t>
+                        <a:t>PT Nippon Indosari Corpindo Tbk (Sari Roti)</a:t>
                       </a:r>
                     </a:p>
                   </a:txBody>
@@ -10907,7 +9738,7 @@
                           </a:solidFill>
                           <a:latin typeface="Arial"/>
                         </a:rPr>
-                        <a:t>Expand footprint, capture Indonesian growth, leverage Breadlife’s brand in transit/mall retail.</a:t>
+                        <a:t>Acquire high-growth challenger and premiumize portfolio.</a:t>
                       </a:r>
                     </a:p>
                   </a:txBody>
@@ -10930,7 +9761,7 @@
                           </a:solidFill>
                           <a:latin typeface="Arial"/>
                         </a:rPr>
-                        <a:t>Brand, product innovation, mall network, digital, multi-format synergy</a:t>
+                        <a:t>Brand, outlet network, product innovation.</a:t>
                       </a:r>
                     </a:p>
                   </a:txBody>
@@ -10953,7 +9784,7 @@
                           </a:solidFill>
                           <a:latin typeface="Arial"/>
                         </a:rPr>
-                        <a:t>Cultural/brand alignment, regulatory complexity</a:t>
+                        <a:t>Channel conflict, overlap, regulatory approval.</a:t>
                       </a:r>
                     </a:p>
                   </a:txBody>
@@ -10987,7 +9818,7 @@
                   </a:tcPr>
                 </a:tc>
               </a:tr>
-              <a:tr h="548640">
+              <a:tr h="731520">
                 <a:tc>
                   <a:txBody>
                     <a:bodyPr wrap="square"/>
@@ -11001,7 +9832,7 @@
                           </a:solidFill>
                           <a:latin typeface="Arial"/>
                         </a:rPr>
-                        <a:t>Mayora Indah Tbk</a:t>
+                        <a:t>PT Map Boga Adiperkasa Tbk (BreadTalk)</a:t>
                       </a:r>
                     </a:p>
                   </a:txBody>
@@ -11024,7 +9855,7 @@
                           </a:solidFill>
                           <a:latin typeface="Arial"/>
                         </a:rPr>
-                        <a:t>Diversify into fresh bakery, leverage existing distribution and consumer reach.</a:t>
+                        <a:t>Strengthen presence in mass market and transit locations.</a:t>
                       </a:r>
                     </a:p>
                   </a:txBody>
@@ -11047,7 +9878,7 @@
                           </a:solidFill>
                           <a:latin typeface="Arial"/>
                         </a:rPr>
-                        <a:t>Distribution, marketing, procurement, consumer analytics</a:t>
+                        <a:t>Outlet network, branding, digital platform.</a:t>
                       </a:r>
                     </a:p>
                   </a:txBody>
@@ -11070,7 +9901,7 @@
                           </a:solidFill>
                           <a:latin typeface="Arial"/>
                         </a:rPr>
-                        <a:t>Fresh supply chain, operational adaptation</a:t>
+                        <a:t>Brand differentiation, operational complexity.</a:t>
                       </a:r>
                     </a:p>
                   </a:txBody>
@@ -11104,123 +9935,6 @@
                   </a:tcPr>
                 </a:tc>
               </a:tr>
-              <a:tr h="548640">
-                <a:tc>
-                  <a:txBody>
-                    <a:bodyPr wrap="square"/>
-                    <a:lstStyle/>
-                    <a:p>
-                      <a:pPr algn="l"/>
-                      <a:r>
-                        <a:rPr sz="1100" b="1">
-                          <a:solidFill>
-                            <a:srgbClr val="404040"/>
-                          </a:solidFill>
-                          <a:latin typeface="Arial"/>
-                        </a:rPr>
-                        <a:t>Paris Baguette (SPC Group)</a:t>
-                      </a:r>
-                    </a:p>
-                  </a:txBody>
-                  <a:tcPr marL="45720" marR="45720" marT="45720" marB="45720">
-                    <a:solidFill>
-                      <a:srgbClr val="F0F0F0"/>
-                    </a:solidFill>
-                  </a:tcPr>
-                </a:tc>
-                <a:tc>
-                  <a:txBody>
-                    <a:bodyPr wrap="square"/>
-                    <a:lstStyle/>
-                    <a:p>
-                      <a:pPr algn="l"/>
-                      <a:r>
-                        <a:rPr sz="1100">
-                          <a:solidFill>
-                            <a:srgbClr val="404040"/>
-                          </a:solidFill>
-                          <a:latin typeface="Arial"/>
-                        </a:rPr>
-                        <a:t>Accelerate Indonesia growth, acquire local scale and market knowledge.</a:t>
-                      </a:r>
-                    </a:p>
-                  </a:txBody>
-                  <a:tcPr marL="45720" marR="45720" marT="45720" marB="45720">
-                    <a:solidFill>
-                      <a:srgbClr val="F0F0F0"/>
-                    </a:solidFill>
-                  </a:tcPr>
-                </a:tc>
-                <a:tc>
-                  <a:txBody>
-                    <a:bodyPr wrap="square"/>
-                    <a:lstStyle/>
-                    <a:p>
-                      <a:pPr algn="l"/>
-                      <a:r>
-                        <a:rPr sz="1100">
-                          <a:solidFill>
-                            <a:srgbClr val="404040"/>
-                          </a:solidFill>
-                          <a:latin typeface="Arial"/>
-                        </a:rPr>
-                        <a:t>Premium branding, product dev, retail synergies, innovation pipeline</a:t>
-                      </a:r>
-                    </a:p>
-                  </a:txBody>
-                  <a:tcPr marL="45720" marR="45720" marT="45720" marB="45720">
-                    <a:solidFill>
-                      <a:srgbClr val="F0F0F0"/>
-                    </a:solidFill>
-                  </a:tcPr>
-                </a:tc>
-                <a:tc>
-                  <a:txBody>
-                    <a:bodyPr wrap="square"/>
-                    <a:lstStyle/>
-                    <a:p>
-                      <a:pPr algn="l"/>
-                      <a:r>
-                        <a:rPr sz="1100">
-                          <a:solidFill>
-                            <a:srgbClr val="404040"/>
-                          </a:solidFill>
-                          <a:latin typeface="Arial"/>
-                        </a:rPr>
-                        <a:t>Premium vs. mass positioning, integration risk</a:t>
-                      </a:r>
-                    </a:p>
-                  </a:txBody>
-                  <a:tcPr marL="45720" marR="45720" marT="45720" marB="45720">
-                    <a:solidFill>
-                      <a:srgbClr val="F0F0F0"/>
-                    </a:solidFill>
-                  </a:tcPr>
-                </a:tc>
-                <a:tc>
-                  <a:txBody>
-                    <a:bodyPr wrap="square"/>
-                    <a:lstStyle/>
-                    <a:p>
-                      <a:pPr algn="l"/>
-                      <a:r>
-                        <a:rPr sz="1100">
-                          <a:solidFill>
-                            <a:srgbClr val="404040"/>
-                          </a:solidFill>
-                          <a:latin typeface="Arial"/>
-                        </a:rPr>
-                        <a:t>7/10</a:t>
-                      </a:r>
-                    </a:p>
-                  </a:txBody>
-                  <a:tcPr marL="45720" marR="45720" marT="45720" marB="45720">
-                    <a:solidFill>
-                      <a:srgbClr val="F0F0F0"/>
-                    </a:solidFill>
-                  </a:tcPr>
-                </a:tc>
-              </a:tr>
             </a:tbl>
           </a:graphicData>
         </a:graphic>
@@ -11305,7 +10019,7 @@
 </p:sld>
 </file>
 
-<file path=ppt/slides/slide16.xml><?xml version="1.0" encoding="utf-8"?>
+<file path=ppt/slides/slide19.xml><?xml version="1.0" encoding="utf-8"?>
 <p:sld xmlns:a="http://schemas.openxmlformats.org/drawingml/2006/main" xmlns:p="http://schemas.openxmlformats.org/presentationml/2006/main" xmlns:r="http://schemas.openxmlformats.org/officeDocument/2006/relationships">
   <p:cSld>
     <p:spTree>
@@ -11403,7 +10117,7 @@
         </p:nvGraphicFramePr>
         <p:xfrm>
           <a:off x="457200" y="1463040"/>
-          <a:ext cx="10515600" cy="2743200"/>
+          <a:ext cx="10515600" cy="2926080"/>
         </p:xfrm>
         <a:graphic>
           <a:graphicData uri="http://schemas.openxmlformats.org/drawingml/2006/table">
@@ -11418,7 +10132,7 @@
                 <a:gridCol w="2011680"/>
                 <a:gridCol w="1371600"/>
               </a:tblGrid>
-              <a:tr h="548640">
+              <a:tr h="731520">
                 <a:tc>
                   <a:txBody>
                     <a:bodyPr/>
@@ -11535,7 +10249,7 @@
                   </a:tcPr>
                 </a:tc>
               </a:tr>
-              <a:tr h="548640">
+              <a:tr h="731520">
                 <a:tc>
                   <a:txBody>
                     <a:bodyPr wrap="square"/>
@@ -11549,7 +10263,7 @@
                           </a:solidFill>
                           <a:latin typeface="Arial"/>
                         </a:rPr>
-                        <a:t>CVC Capital Partners</a:t>
+                        <a:t>Northstar Group</a:t>
                       </a:r>
                     </a:p>
                   </a:txBody>
@@ -11572,7 +10286,7 @@
                           </a:solidFill>
                           <a:latin typeface="Arial"/>
                         </a:rPr>
-                        <a:t>Deep experience in Indonesian branded food, strong F&amp;B network, value-creation track record.</a:t>
+                        <a:t>Buy-and-build platform across bakery and retail F&amp;B.</a:t>
                       </a:r>
                     </a:p>
                   </a:txBody>
@@ -11595,7 +10309,7 @@
                           </a:solidFill>
                           <a:latin typeface="Arial"/>
                         </a:rPr>
-                        <a:t>Growth capital, governance, international expansion, operational excellence</a:t>
+                        <a:t>Operational scale, M&amp;A, governance.</a:t>
                       </a:r>
                     </a:p>
                   </a:txBody>
@@ -11618,7 +10332,7 @@
                           </a:solidFill>
                           <a:latin typeface="Arial"/>
                         </a:rPr>
-                        <a:t>Market competition, exit timing</a:t>
+                        <a:t>Exit timing, regulatory risk.</a:t>
                       </a:r>
                     </a:p>
                   </a:txBody>
@@ -11652,7 +10366,7 @@
                   </a:tcPr>
                 </a:tc>
               </a:tr>
-              <a:tr h="548640">
+              <a:tr h="731520">
                 <a:tc>
                   <a:txBody>
                     <a:bodyPr wrap="square"/>
@@ -11666,7 +10380,7 @@
                           </a:solidFill>
                           <a:latin typeface="Arial"/>
                         </a:rPr>
-                        <a:t>Northstar Group</a:t>
+                        <a:t>Creador</a:t>
                       </a:r>
                     </a:p>
                   </a:txBody>
@@ -11689,7 +10403,7 @@
                           </a:solidFill>
                           <a:latin typeface="Arial"/>
                         </a:rPr>
-                        <a:t>Proven operator in scaling Indonesian consumer brands, local network.</a:t>
+                        <a:t>Accelerate digital sales and regional expansion.</a:t>
                       </a:r>
                     </a:p>
                   </a:txBody>
@@ -11712,7 +10426,7 @@
                           </a:solidFill>
                           <a:latin typeface="Arial"/>
                         </a:rPr>
-                        <a:t>Access to strategic partners, regional scaling, M&amp;A execution</a:t>
+                        <a:t>Capital, digital strategy, Southeast Asia footprint.</a:t>
                       </a:r>
                     </a:p>
                   </a:txBody>
@@ -11735,7 +10449,7 @@
                           </a:solidFill>
                           <a:latin typeface="Arial"/>
                         </a:rPr>
-                        <a:t>Integration risk, return expectations</a:t>
+                        <a:t>Competitive landscape, margin pressure.</a:t>
                       </a:r>
                     </a:p>
                   </a:txBody>
@@ -11769,7 +10483,7 @@
                   </a:tcPr>
                 </a:tc>
               </a:tr>
-              <a:tr h="548640">
+              <a:tr h="731520">
                 <a:tc>
                   <a:txBody>
                     <a:bodyPr wrap="square"/>
@@ -11783,7 +10497,7 @@
                           </a:solidFill>
                           <a:latin typeface="Arial"/>
                         </a:rPr>
-                        <a:t>Everstone Capital</a:t>
+                        <a:t>Falcon House Partners</a:t>
                       </a:r>
                     </a:p>
                   </a:txBody>
@@ -11806,7 +10520,7 @@
                           </a:solidFill>
                           <a:latin typeface="Arial"/>
                         </a:rPr>
-                        <a:t>Deep F&amp;B operations expertise, cross-brand synergies, Indonesia QSR experience.</a:t>
+                        <a:t>Leverage local expertise to unlock operational value.</a:t>
                       </a:r>
                     </a:p>
                   </a:txBody>
@@ -11829,7 +10543,7 @@
                           </a:solidFill>
                           <a:latin typeface="Arial"/>
                         </a:rPr>
-                        <a:t>Operational improvement, digital, procurement, M&amp;A</a:t>
+                        <a:t>Local network, F&amp;B operations, value creation.</a:t>
                       </a:r>
                     </a:p>
                   </a:txBody>
@@ -11852,7 +10566,7 @@
                           </a:solidFill>
                           <a:latin typeface="Arial"/>
                         </a:rPr>
-                        <a:t>Brand overlap, local adaptation</a:t>
+                        <a:t>Scale, management retention.</a:t>
                       </a:r>
                     </a:p>
                   </a:txBody>
@@ -11875,130 +10589,13 @@
                           </a:solidFill>
                           <a:latin typeface="Arial"/>
                         </a:rPr>
-                        <a:t>8/10</a:t>
+                        <a:t>7/10</a:t>
                       </a:r>
                     </a:p>
                   </a:txBody>
                   <a:tcPr marL="45720" marR="45720" marT="45720" marB="45720">
                     <a:solidFill>
                       <a:srgbClr val="FFFFFF"/>
-                    </a:solidFill>
-                  </a:tcPr>
-                </a:tc>
-              </a:tr>
-              <a:tr h="548640">
-                <a:tc>
-                  <a:txBody>
-                    <a:bodyPr wrap="square"/>
-                    <a:lstStyle/>
-                    <a:p>
-                      <a:pPr algn="l"/>
-                      <a:r>
-                        <a:rPr sz="1100" b="1">
-                          <a:solidFill>
-                            <a:srgbClr val="404040"/>
-                          </a:solidFill>
-                          <a:latin typeface="Arial"/>
-                        </a:rPr>
-                        <a:t>Partners Group</a:t>
-                      </a:r>
-                    </a:p>
-                  </a:txBody>
-                  <a:tcPr marL="45720" marR="45720" marT="45720" marB="45720">
-                    <a:solidFill>
-                      <a:srgbClr val="F0F0F0"/>
-                    </a:solidFill>
-                  </a:tcPr>
-                </a:tc>
-                <a:tc>
-                  <a:txBody>
-                    <a:bodyPr wrap="square"/>
-                    <a:lstStyle/>
-                    <a:p>
-                      <a:pPr algn="l"/>
-                      <a:r>
-                        <a:rPr sz="1100">
-                          <a:solidFill>
-                            <a:srgbClr val="404040"/>
-                          </a:solidFill>
-                          <a:latin typeface="Arial"/>
-                        </a:rPr>
-                        <a:t>Growth platform, global best practices, digital and distribution expertise.</a:t>
-                      </a:r>
-                    </a:p>
-                  </a:txBody>
-                  <a:tcPr marL="45720" marR="45720" marT="45720" marB="45720">
-                    <a:solidFill>
-                      <a:srgbClr val="F0F0F0"/>
-                    </a:solidFill>
-                  </a:tcPr>
-                </a:tc>
-                <a:tc>
-                  <a:txBody>
-                    <a:bodyPr wrap="square"/>
-                    <a:lstStyle/>
-                    <a:p>
-                      <a:pPr algn="l"/>
-                      <a:r>
-                        <a:rPr sz="1100">
-                          <a:solidFill>
-                            <a:srgbClr val="404040"/>
-                          </a:solidFill>
-                          <a:latin typeface="Arial"/>
-                        </a:rPr>
-                        <a:t>Digitization, internationalization, portfolio synergies</a:t>
-                      </a:r>
-                    </a:p>
-                  </a:txBody>
-                  <a:tcPr marL="45720" marR="45720" marT="45720" marB="45720">
-                    <a:solidFill>
-                      <a:srgbClr val="F0F0F0"/>
-                    </a:solidFill>
-                  </a:tcPr>
-                </a:tc>
-                <a:tc>
-                  <a:txBody>
-                    <a:bodyPr wrap="square"/>
-                    <a:lstStyle/>
-                    <a:p>
-                      <a:pPr algn="l"/>
-                      <a:r>
-                        <a:rPr sz="1100">
-                          <a:solidFill>
-                            <a:srgbClr val="404040"/>
-                          </a:solidFill>
-                          <a:latin typeface="Arial"/>
-                        </a:rPr>
-                        <a:t>Cultural fit, scale requirement</a:t>
-                      </a:r>
-                    </a:p>
-                  </a:txBody>
-                  <a:tcPr marL="45720" marR="45720" marT="45720" marB="45720">
-                    <a:solidFill>
-                      <a:srgbClr val="F0F0F0"/>
-                    </a:solidFill>
-                  </a:tcPr>
-                </a:tc>
-                <a:tc>
-                  <a:txBody>
-                    <a:bodyPr wrap="square"/>
-                    <a:lstStyle/>
-                    <a:p>
-                      <a:pPr algn="l"/>
-                      <a:r>
-                        <a:rPr sz="1100">
-                          <a:solidFill>
-                            <a:srgbClr val="404040"/>
-                          </a:solidFill>
-                          <a:latin typeface="Arial"/>
-                        </a:rPr>
-                        <a:t>7/10</a:t>
-                      </a:r>
-                    </a:p>
-                  </a:txBody>
-                  <a:tcPr marL="45720" marR="45720" marT="45720" marB="45720">
-                    <a:solidFill>
-                      <a:srgbClr val="F0F0F0"/>
                     </a:solidFill>
                   </a:tcPr>
                 </a:tc>
@@ -12357,7 +10954,7 @@
               </a:defRPr>
             </a:pPr>
             <a:r>
-              <a:t>Highly competitive Indonesian bakery market with local and international players.</a:t>
+              <a:t>Intense competition from established chains and new entrants.</a:t>
             </a:r>
           </a:p>
         </p:txBody>
@@ -12472,7 +11069,7 @@
               </a:defRPr>
             </a:pPr>
             <a:r>
-              <a:t>Strong brand differentiation and loyal customer base.</a:t>
+              <a:t>Regular product innovation and launches.</a:t>
             </a:r>
           </a:p>
         </p:txBody>
@@ -12587,7 +11184,7 @@
               </a:defRPr>
             </a:pPr>
             <a:r>
-              <a:t>Operational complexity and quality risks from rapid outlet expansion.</a:t>
+              <a:t>Volatility in commodity prices affecting input costs.</a:t>
             </a:r>
           </a:p>
         </p:txBody>
@@ -12702,7 +11299,7 @@
               </a:defRPr>
             </a:pPr>
             <a:r>
-              <a:t>Balanced B2C and B2B revenue mix for stability.</a:t>
+              <a:t>Diversified supply chain and hedging contracts for key inputs.</a:t>
             </a:r>
           </a:p>
         </p:txBody>
@@ -12817,7 +11414,7 @@
               </a:defRPr>
             </a:pPr>
             <a:r>
-              <a:t>Stringent food safety requirements due to preservative-free model.</a:t>
+              <a:t>Risks of operational quality control during rapid expansion.</a:t>
             </a:r>
           </a:p>
         </p:txBody>
@@ -12932,7 +11529,7 @@
               </a:defRPr>
             </a:pPr>
             <a:r>
-              <a:t>Group-level procurement, logistics, and operational synergies.</a:t>
+              <a:t>Investment in training, automation, and quality control.</a:t>
             </a:r>
           </a:p>
         </p:txBody>
@@ -13047,7 +11644,7 @@
               </a:defRPr>
             </a:pPr>
             <a:r>
-              <a:t>Exposure to economic cycles and retail foot traffic trends.</a:t>
+              <a:t>Changing consumer taste towards health-conscious products.</a:t>
             </a:r>
           </a:p>
         </p:txBody>
@@ -13162,7 +11759,7 @@
               </a:defRPr>
             </a:pPr>
             <a:r>
-              <a:t>Stringent quality control and open kitchen protocols.</a:t>
+              <a:t>Leveraging strong national brand for marketing and loyalty.</a:t>
             </a:r>
           </a:p>
         </p:txBody>
@@ -13277,7 +11874,7 @@
               </a:defRPr>
             </a:pPr>
             <a:r>
-              <a:t>Integration risks post-acquisition and scaling B2B channels.</a:t>
+              <a:t>Exposure to macroeconomic fluctuations and consumer spending cycles.</a:t>
             </a:r>
           </a:p>
         </p:txBody>
@@ -13392,7 +11989,7 @@
               </a:defRPr>
             </a:pPr>
             <a:r>
-              <a:t>Agile outlet selection and pricing/product flexibility.</a:t>
+              <a:t>Digitalization of sales and inventory tracking.</a:t>
             </a:r>
           </a:p>
         </p:txBody>
@@ -13507,7 +12104,7 @@
               </a:defRPr>
             </a:pPr>
             <a:r>
-              <a:t>Potential margin pressure from inflation and input cost volatility.</a:t>
+              <a:t>Labor costs and skilled worker retention issues.</a:t>
             </a:r>
           </a:p>
         </p:txBody>
@@ -13622,21 +12219,64 @@
               </a:defRPr>
             </a:pPr>
             <a:r>
-              <a:t>Financial discipline with positive group operating profit.</a:t>
-            </a:r>
-          </a:p>
-        </p:txBody>
-      </p:sp>
-      <p:sp>
-        <p:nvSpPr>
-          <p:cNvPr id="42" name="TextBox 41"/>
-          <p:cNvSpPr txBox="1"/>
-          <p:nvPr/>
-        </p:nvSpPr>
-        <p:spPr>
-          <a:xfrm>
-            <a:off x="457200" y="6400800"/>
-            <a:ext cx="5486400" cy="365760"/>
+              <a:t>Continuous cost structure review and margin monitoring.</a:t>
+            </a:r>
+          </a:p>
+        </p:txBody>
+      </p:sp>
+      <p:sp>
+        <p:nvSpPr>
+          <p:cNvPr id="42" name="Oval 41"/>
+          <p:cNvSpPr/>
+          <p:nvPr/>
+        </p:nvSpPr>
+        <p:spPr>
+          <a:xfrm>
+            <a:off x="640080" y="5760720"/>
+            <a:ext cx="274320" cy="274320"/>
+          </a:xfrm>
+          <a:prstGeom prst="ellipse">
+            <a:avLst/>
+          </a:prstGeom>
+          <a:solidFill>
+            <a:srgbClr val="183A58"/>
+          </a:solidFill>
+          <a:ln>
+            <a:noFill/>
+          </a:ln>
+        </p:spPr>
+        <p:style>
+          <a:lnRef idx="1">
+            <a:schemeClr val="accent1"/>
+          </a:lnRef>
+          <a:fillRef idx="3">
+            <a:schemeClr val="accent1"/>
+          </a:fillRef>
+          <a:effectRef idx="2">
+            <a:schemeClr val="accent1"/>
+          </a:effectRef>
+          <a:fontRef idx="minor">
+            <a:schemeClr val="lt1"/>
+          </a:fontRef>
+        </p:style>
+        <p:txBody>
+          <a:bodyPr rtlCol="0" anchor="ctr"/>
+          <a:lstStyle/>
+          <a:p>
+            <a:pPr algn="ctr"/>
+          </a:p>
+        </p:txBody>
+      </p:sp>
+      <p:sp>
+        <p:nvSpPr>
+          <p:cNvPr id="43" name="TextBox 42"/>
+          <p:cNvSpPr txBox="1"/>
+          <p:nvPr/>
+        </p:nvSpPr>
+        <p:spPr>
+          <a:xfrm>
+            <a:off x="640080" y="5760720"/>
+            <a:ext cx="274320" cy="274320"/>
           </a:xfrm>
           <a:prstGeom prst="rect">
             <a:avLst/>
@@ -13649,6 +12289,193 @@
           </a:bodyPr>
           <a:lstStyle/>
           <a:p>
+            <a:pPr algn="ctr">
+              <a:defRPr sz="1100" b="1">
+                <a:solidFill>
+                  <a:srgbClr val="FFFFFF"/>
+                </a:solidFill>
+                <a:latin typeface="Arial"/>
+              </a:defRPr>
+            </a:pPr>
+            <a:r>
+              <a:t>?</a:t>
+            </a:r>
+          </a:p>
+        </p:txBody>
+      </p:sp>
+      <p:sp>
+        <p:nvSpPr>
+          <p:cNvPr id="44" name="TextBox 43"/>
+          <p:cNvSpPr txBox="1"/>
+          <p:nvPr/>
+        </p:nvSpPr>
+        <p:spPr>
+          <a:xfrm>
+            <a:off x="1005840" y="5600700"/>
+            <a:ext cx="4754880" cy="594360"/>
+          </a:xfrm>
+          <a:prstGeom prst="rect">
+            <a:avLst/>
+          </a:prstGeom>
+          <a:noFill/>
+        </p:spPr>
+        <p:txBody>
+          <a:bodyPr wrap="square" anchor="ctr">
+            <a:spAutoFit/>
+          </a:bodyPr>
+          <a:lstStyle/>
+          <a:p>
+            <a:pPr>
+              <a:defRPr sz="1100" b="0">
+                <a:solidFill>
+                  <a:srgbClr val="404040"/>
+                </a:solidFill>
+                <a:latin typeface="Arial"/>
+              </a:defRPr>
+            </a:pPr>
+            <a:r>
+              <a:t>Food safety and regulatory compliance risks.</a:t>
+            </a:r>
+          </a:p>
+        </p:txBody>
+      </p:sp>
+      <p:sp>
+        <p:nvSpPr>
+          <p:cNvPr id="45" name="Oval 44"/>
+          <p:cNvSpPr/>
+          <p:nvPr/>
+        </p:nvSpPr>
+        <p:spPr>
+          <a:xfrm>
+            <a:off x="6126480" y="5760720"/>
+            <a:ext cx="274320" cy="274320"/>
+          </a:xfrm>
+          <a:prstGeom prst="ellipse">
+            <a:avLst/>
+          </a:prstGeom>
+          <a:solidFill>
+            <a:srgbClr val="B5975B"/>
+          </a:solidFill>
+          <a:ln>
+            <a:noFill/>
+          </a:ln>
+        </p:spPr>
+        <p:style>
+          <a:lnRef idx="1">
+            <a:schemeClr val="accent1"/>
+          </a:lnRef>
+          <a:fillRef idx="3">
+            <a:schemeClr val="accent1"/>
+          </a:fillRef>
+          <a:effectRef idx="2">
+            <a:schemeClr val="accent1"/>
+          </a:effectRef>
+          <a:fontRef idx="minor">
+            <a:schemeClr val="lt1"/>
+          </a:fontRef>
+        </p:style>
+        <p:txBody>
+          <a:bodyPr rtlCol="0" anchor="ctr"/>
+          <a:lstStyle/>
+          <a:p>
+            <a:pPr algn="ctr"/>
+          </a:p>
+        </p:txBody>
+      </p:sp>
+      <p:sp>
+        <p:nvSpPr>
+          <p:cNvPr id="46" name="TextBox 45"/>
+          <p:cNvSpPr txBox="1"/>
+          <p:nvPr/>
+        </p:nvSpPr>
+        <p:spPr>
+          <a:xfrm>
+            <a:off x="6126480" y="5760720"/>
+            <a:ext cx="274320" cy="274320"/>
+          </a:xfrm>
+          <a:prstGeom prst="rect">
+            <a:avLst/>
+          </a:prstGeom>
+          <a:noFill/>
+        </p:spPr>
+        <p:txBody>
+          <a:bodyPr wrap="none" anchor="ctr">
+            <a:spAutoFit/>
+          </a:bodyPr>
+          <a:lstStyle/>
+          <a:p>
+            <a:pPr algn="ctr">
+              <a:defRPr sz="1100" b="1">
+                <a:solidFill>
+                  <a:srgbClr val="FFFFFF"/>
+                </a:solidFill>
+                <a:latin typeface="Arial"/>
+              </a:defRPr>
+            </a:pPr>
+            <a:r>
+              <a:t>i</a:t>
+            </a:r>
+          </a:p>
+        </p:txBody>
+      </p:sp>
+      <p:sp>
+        <p:nvSpPr>
+          <p:cNvPr id="47" name="TextBox 46"/>
+          <p:cNvSpPr txBox="1"/>
+          <p:nvPr/>
+        </p:nvSpPr>
+        <p:spPr>
+          <a:xfrm>
+            <a:off x="6492240" y="5600700"/>
+            <a:ext cx="5212080" cy="594360"/>
+          </a:xfrm>
+          <a:prstGeom prst="rect">
+            <a:avLst/>
+          </a:prstGeom>
+          <a:noFill/>
+        </p:spPr>
+        <p:txBody>
+          <a:bodyPr wrap="square" anchor="ctr">
+            <a:spAutoFit/>
+          </a:bodyPr>
+          <a:lstStyle/>
+          <a:p>
+            <a:pPr>
+              <a:defRPr sz="1100" b="0">
+                <a:solidFill>
+                  <a:srgbClr val="404040"/>
+                </a:solidFill>
+                <a:latin typeface="Arial"/>
+              </a:defRPr>
+            </a:pPr>
+            <a:r>
+              <a:t>Expanding B2B sales to stabilize revenue streams.</a:t>
+            </a:r>
+          </a:p>
+        </p:txBody>
+      </p:sp>
+      <p:sp>
+        <p:nvSpPr>
+          <p:cNvPr id="48" name="TextBox 47"/>
+          <p:cNvSpPr txBox="1"/>
+          <p:nvPr/>
+        </p:nvSpPr>
+        <p:spPr>
+          <a:xfrm>
+            <a:off x="457200" y="6400800"/>
+            <a:ext cx="5486400" cy="365760"/>
+          </a:xfrm>
+          <a:prstGeom prst="rect">
+            <a:avLst/>
+          </a:prstGeom>
+          <a:noFill/>
+        </p:spPr>
+        <p:txBody>
+          <a:bodyPr wrap="none" anchor="ctr">
+            <a:spAutoFit/>
+          </a:bodyPr>
+          <a:lstStyle/>
+          <a:p>
             <a:pPr algn="l">
               <a:defRPr sz="900">
                 <a:solidFill>
@@ -13665,7 +12492,7 @@
       </p:sp>
       <p:sp>
         <p:nvSpPr>
-          <p:cNvPr id="43" name="TextBox 42"/>
+          <p:cNvPr id="49" name="TextBox 48"/>
           <p:cNvSpPr txBox="1"/>
           <p:nvPr/>
         </p:nvSpPr>
@@ -13880,7 +12707,7 @@
                 </a:solidFill>
                 <a:latin typeface="Arial"/>
               </a:rPr>
-              <a:t>Fresh, Preservative-Free Breads</a:t>
+              <a:t>Fresh Bread</a:t>
             </a:r>
           </a:p>
         </p:txBody>
@@ -13919,7 +12746,7 @@
                 </a:solidFill>
                 <a:latin typeface="Arial"/>
               </a:rPr>
-              <a:t>Japanese-style premium breads, baked fresh daily with no preservatives. Includes soft loaves, sweet buns, and savory filled breads.</a:t>
+              <a:t>Japanese-inspired, preservative-free loaves and buns in a variety of flavors.</a:t>
             </a:r>
           </a:p>
         </p:txBody>
@@ -14040,7 +12867,7 @@
                 </a:solidFill>
                 <a:latin typeface="Arial"/>
               </a:rPr>
-              <a:t>Range of cakes for celebrations, pastries, and desserts – all complementing the bread selection and supporting both retail and catering sales.</a:t>
+              <a:t>Whole cakes, sweet buns, danishes, tarts, and seasonal items.</a:t>
             </a:r>
           </a:p>
         </p:txBody>
@@ -14122,7 +12949,7 @@
                 </a:solidFill>
                 <a:latin typeface="Arial"/>
               </a:rPr>
-              <a:t>Retail (B2C)</a:t>
+              <a:t>B2B Institutional Sales</a:t>
             </a:r>
           </a:p>
         </p:txBody>
@@ -14161,7 +12988,7 @@
                 </a:solidFill>
                 <a:latin typeface="Arial"/>
               </a:rPr>
-              <a:t>Over 100 outlets in high-traffic retail and transit locations, offering premium quality and affordability for mass market consumers.</a:t>
+              <a:t>Supplying fresh bakery products to corporate clients, catering, and retail partners.</a:t>
             </a:r>
           </a:p>
         </p:txBody>
@@ -14243,7 +13070,7 @@
                 </a:solidFill>
                 <a:latin typeface="Arial"/>
               </a:rPr>
-              <a:t>B2B Institutional &amp; Catering</a:t>
+              <a:t>Retail Beverages</a:t>
             </a:r>
           </a:p>
         </p:txBody>
@@ -14282,7 +13109,7 @@
                 </a:solidFill>
                 <a:latin typeface="Arial"/>
               </a:rPr>
-              <a:t>Supplies baked goods to corporate clients, institutional catering, and franchise partners, supporting stable, recurring income and broad market reach.</a:t>
+              <a:t>Select outlets offer beverages including coffee and honey drinks.</a:t>
             </a:r>
           </a:p>
         </p:txBody>
@@ -14336,7 +13163,7 @@
         </p:nvGraphicFramePr>
         <p:xfrm>
           <a:off x="6583680" y="1645920"/>
-          <a:ext cx="1828800" cy="2560320"/>
+          <a:ext cx="3291840" cy="2560320"/>
         </p:xfrm>
         <a:graphic>
           <a:graphicData uri="http://schemas.openxmlformats.org/drawingml/2006/table">
@@ -14347,8 +13174,10 @@
               <a:tblGrid>
                 <a:gridCol w="1097280"/>
                 <a:gridCol w="731520"/>
+                <a:gridCol w="731520"/>
+                <a:gridCol w="731520"/>
               </a:tblGrid>
-              <a:tr h="640080">
+              <a:tr h="853440">
                 <a:tc>
                   <a:txBody>
                     <a:bodyPr/>
@@ -14362,7 +13191,7 @@
                           </a:solidFill>
                           <a:latin typeface="Arial"/>
                         </a:rPr>
-                        <a:t>Product/Service</a:t>
+                        <a:t>location_type</a:t>
                       </a:r>
                     </a:p>
                   </a:txBody>
@@ -14385,7 +13214,53 @@
                           </a:solidFill>
                           <a:latin typeface="Arial"/>
                         </a:rPr>
-                        <a:t>Description</a:t>
+                        <a:t>outlets</a:t>
+                      </a:r>
+                    </a:p>
+                  </a:txBody>
+                  <a:tcPr marL="45720" marR="45720" marT="45720" marB="45720">
+                    <a:solidFill>
+                      <a:srgbClr val="183A58"/>
+                    </a:solidFill>
+                  </a:tcPr>
+                </a:tc>
+                <a:tc>
+                  <a:txBody>
+                    <a:bodyPr/>
+                    <a:lstStyle/>
+                    <a:p>
+                      <a:pPr algn="ctr"/>
+                      <a:r>
+                        <a:rPr sz="900" b="1">
+                          <a:solidFill>
+                            <a:srgbClr val="FFFFFF"/>
+                          </a:solidFill>
+                          <a:latin typeface="Arial"/>
+                        </a:rPr>
+                        <a:t>key_cities</a:t>
+                      </a:r>
+                    </a:p>
+                  </a:txBody>
+                  <a:tcPr marL="45720" marR="45720" marT="45720" marB="45720">
+                    <a:solidFill>
+                      <a:srgbClr val="183A58"/>
+                    </a:solidFill>
+                  </a:tcPr>
+                </a:tc>
+                <a:tc>
+                  <a:txBody>
+                    <a:bodyPr/>
+                    <a:lstStyle/>
+                    <a:p>
+                      <a:pPr algn="ctr"/>
+                      <a:r>
+                        <a:rPr sz="900" b="1">
+                          <a:solidFill>
+                            <a:srgbClr val="FFFFFF"/>
+                          </a:solidFill>
+                          <a:latin typeface="Arial"/>
+                        </a:rPr>
+                        <a:t>notable_sites</a:t>
                       </a:r>
                     </a:p>
                   </a:txBody>
@@ -14396,7 +13271,7 @@
                   </a:tcPr>
                 </a:tc>
               </a:tr>
-              <a:tr h="640080">
+              <a:tr h="853440">
                 <a:tc>
                   <a:txBody>
                     <a:bodyPr/>
@@ -14410,7 +13285,7 @@
                           </a:solidFill>
                           <a:latin typeface="Arial"/>
                         </a:rPr>
-                        <a:t>Product/Service</a:t>
+                        <a:t>location_type</a:t>
                       </a:r>
                     </a:p>
                   </a:txBody>
@@ -14433,7 +13308,7 @@
                           </a:solidFill>
                           <a:latin typeface="Arial"/>
                         </a:rPr>
-                        <a:t>Description</a:t>
+                        <a:t>outlets</a:t>
                       </a:r>
                     </a:p>
                   </a:txBody>
@@ -14443,8 +13318,6 @@
                     </a:solidFill>
                   </a:tcPr>
                 </a:tc>
-              </a:tr>
-              <a:tr h="640080">
                 <a:tc>
                   <a:txBody>
                     <a:bodyPr/>
@@ -14458,7 +13331,55 @@
                           </a:solidFill>
                           <a:latin typeface="Arial"/>
                         </a:rPr>
-                        <a:t>Product/Service</a:t>
+                        <a:t>key_cities</a:t>
+                      </a:r>
+                    </a:p>
+                  </a:txBody>
+                  <a:tcPr marL="45720" marR="45720" marT="45720" marB="45720">
+                    <a:solidFill>
+                      <a:srgbClr val="FFFFFF"/>
+                    </a:solidFill>
+                  </a:tcPr>
+                </a:tc>
+                <a:tc>
+                  <a:txBody>
+                    <a:bodyPr/>
+                    <a:lstStyle/>
+                    <a:p>
+                      <a:pPr algn="ctr"/>
+                      <a:r>
+                        <a:rPr sz="900">
+                          <a:solidFill>
+                            <a:srgbClr val="404040"/>
+                          </a:solidFill>
+                          <a:latin typeface="Arial"/>
+                        </a:rPr>
+                        <a:t>notable_sites</a:t>
+                      </a:r>
+                    </a:p>
+                  </a:txBody>
+                  <a:tcPr marL="45720" marR="45720" marT="45720" marB="45720">
+                    <a:solidFill>
+                      <a:srgbClr val="FFFFFF"/>
+                    </a:solidFill>
+                  </a:tcPr>
+                </a:tc>
+              </a:tr>
+              <a:tr h="853440">
+                <a:tc>
+                  <a:txBody>
+                    <a:bodyPr/>
+                    <a:lstStyle/>
+                    <a:p>
+                      <a:pPr algn="ctr"/>
+                      <a:r>
+                        <a:rPr sz="900">
+                          <a:solidFill>
+                            <a:srgbClr val="404040"/>
+                          </a:solidFill>
+                          <a:latin typeface="Arial"/>
+                        </a:rPr>
+                        <a:t>location_type</a:t>
                       </a:r>
                     </a:p>
                   </a:txBody>
@@ -14481,38 +13402,13 @@
                           </a:solidFill>
                           <a:latin typeface="Arial"/>
                         </a:rPr>
-                        <a:t>Description</a:t>
+                        <a:t>outlets</a:t>
                       </a:r>
                     </a:p>
                   </a:txBody>
                   <a:tcPr marL="45720" marR="45720" marT="45720" marB="45720">
                     <a:solidFill>
                       <a:srgbClr val="F0F0F0"/>
-                    </a:solidFill>
-                  </a:tcPr>
-                </a:tc>
-              </a:tr>
-              <a:tr h="640080">
-                <a:tc>
-                  <a:txBody>
-                    <a:bodyPr/>
-                    <a:lstStyle/>
-                    <a:p>
-                      <a:pPr algn="ctr"/>
-                      <a:r>
-                        <a:rPr sz="900">
-                          <a:solidFill>
-                            <a:srgbClr val="404040"/>
-                          </a:solidFill>
-                          <a:latin typeface="Arial"/>
-                        </a:rPr>
-                        <a:t>Product/Service</a:t>
-                      </a:r>
-                    </a:p>
-                  </a:txBody>
-                  <a:tcPr marL="45720" marR="45720" marT="45720" marB="45720">
-                    <a:solidFill>
-                      <a:srgbClr val="FFFFFF"/>
                     </a:solidFill>
                   </a:tcPr>
                 </a:tc>
@@ -14529,13 +13425,36 @@
                           </a:solidFill>
                           <a:latin typeface="Arial"/>
                         </a:rPr>
-                        <a:t>Description</a:t>
+                        <a:t>key_cities</a:t>
                       </a:r>
                     </a:p>
                   </a:txBody>
                   <a:tcPr marL="45720" marR="45720" marT="45720" marB="45720">
                     <a:solidFill>
-                      <a:srgbClr val="FFFFFF"/>
+                      <a:srgbClr val="F0F0F0"/>
+                    </a:solidFill>
+                  </a:tcPr>
+                </a:tc>
+                <a:tc>
+                  <a:txBody>
+                    <a:bodyPr/>
+                    <a:lstStyle/>
+                    <a:p>
+                      <a:pPr algn="ctr"/>
+                      <a:r>
+                        <a:rPr sz="900">
+                          <a:solidFill>
+                            <a:srgbClr val="404040"/>
+                          </a:solidFill>
+                          <a:latin typeface="Arial"/>
+                        </a:rPr>
+                        <a:t>notable_sites</a:t>
+                      </a:r>
+                    </a:p>
+                  </a:txBody>
+                  <a:tcPr marL="45720" marR="45720" marT="45720" marB="45720">
+                    <a:solidFill>
+                      <a:srgbClr val="F0F0F0"/>
                     </a:solidFill>
                   </a:tcPr>
                 </a:tc>
@@ -14812,7 +13731,7 @@
                 </a:solidFill>
                 <a:latin typeface="Arial"/>
               </a:rPr>
-              <a:t>Revenue &amp; EBITDA Trend (2020–2024E)</a:t>
+              <a:t>Revenue &amp; EBITDA Growth</a:t>
             </a:r>
           </a:p>
         </p:txBody>
@@ -14982,7 +13901,7 @@
                 </a:solidFill>
                 <a:latin typeface="Arial"/>
               </a:rPr>
-              <a:t>19.6%</a:t>
+              <a:t>150+</a:t>
             </a:r>
           </a:p>
         </p:txBody>
@@ -15155,7 +14074,7 @@
                 </a:solidFill>
                 <a:latin typeface="Arial"/>
               </a:rPr>
-              <a:t>18.8%</a:t>
+              <a:t>500,000+</a:t>
             </a:r>
           </a:p>
         </p:txBody>
@@ -15328,7 +14247,7 @@
                 </a:solidFill>
                 <a:latin typeface="Arial"/>
               </a:rPr>
-              <a:t>100+</a:t>
+              <a:t>8%</a:t>
             </a:r>
           </a:p>
         </p:txBody>
@@ -15395,40 +14314,45 @@
       </p:sp>
       <p:sp>
         <p:nvSpPr>
-          <p:cNvPr id="22" name="TextBox 21"/>
-          <p:cNvSpPr txBox="1"/>
-          <p:nvPr/>
-        </p:nvSpPr>
-        <p:spPr>
-          <a:xfrm>
-            <a:off x="914400" y="5212080"/>
-            <a:ext cx="6400800" cy="182880"/>
-          </a:xfrm>
-          <a:prstGeom prst="rect">
-            <a:avLst/>
-          </a:prstGeom>
-          <a:noFill/>
+          <p:cNvPr id="22" name="Rectangle 21"/>
+          <p:cNvSpPr/>
+          <p:nvPr/>
+        </p:nvSpPr>
+        <p:spPr>
+          <a:xfrm>
+            <a:off x="9089136" y="4023360"/>
+            <a:ext cx="2560320" cy="1005840"/>
+          </a:xfrm>
+          <a:prstGeom prst="rect">
+            <a:avLst/>
+          </a:prstGeom>
+          <a:solidFill>
+            <a:srgbClr val="F0F0F0"/>
+          </a:solidFill>
           <a:ln>
             <a:noFill/>
           </a:ln>
           <a:effectLst/>
         </p:spPr>
-        <p:txBody>
-          <a:bodyPr wrap="square">
-            <a:spAutoFit/>
-          </a:bodyPr>
-          <a:lstStyle/>
-          <a:p>
-            <a:pPr algn="l"/>
-            <a:r>
-              <a:rPr sz="1200" b="1">
-                <a:solidFill>
-                  <a:srgbClr val="183A58"/>
-                </a:solidFill>
-                <a:latin typeface="Arial"/>
-              </a:rPr>
-              <a:t>Revenue Growth Drivers</a:t>
-            </a:r>
+        <p:style>
+          <a:lnRef idx="1">
+            <a:schemeClr val="accent1"/>
+          </a:lnRef>
+          <a:fillRef idx="3">
+            <a:schemeClr val="accent1"/>
+          </a:fillRef>
+          <a:effectRef idx="2">
+            <a:schemeClr val="accent1"/>
+          </a:effectRef>
+          <a:fontRef idx="minor">
+            <a:schemeClr val="lt1"/>
+          </a:fontRef>
+        </p:style>
+        <p:txBody>
+          <a:bodyPr rtlCol="0" anchor="ctr"/>
+          <a:lstStyle/>
+          <a:p>
+            <a:pPr algn="ctr"/>
           </a:p>
         </p:txBody>
       </p:sp>
@@ -15440,8 +14364,8 @@
         </p:nvSpPr>
         <p:spPr>
           <a:xfrm>
-            <a:off x="914400" y="5440680"/>
-            <a:ext cx="6400800" cy="146304"/>
+            <a:off x="9180576" y="4114800"/>
+            <a:ext cx="2377440" cy="182880"/>
           </a:xfrm>
           <a:prstGeom prst="rect">
             <a:avLst/>
@@ -15459,15 +14383,6 @@
           <a:lstStyle/>
           <a:p>
             <a:pPr algn="l"/>
-            <a:r>
-              <a:rPr sz="900" b="0">
-                <a:solidFill>
-                  <a:srgbClr val="404040"/>
-                </a:solidFill>
-                <a:latin typeface="Arial"/>
-              </a:rPr>
-              <a:t>● Aggressive outlet expansion post-acquisition.</a:t>
-            </a:r>
           </a:p>
         </p:txBody>
       </p:sp>
@@ -15479,8 +14394,8 @@
         </p:nvSpPr>
         <p:spPr>
           <a:xfrm>
-            <a:off x="914400" y="5605272"/>
-            <a:ext cx="6400800" cy="146304"/>
+            <a:off x="9180576" y="4297680"/>
+            <a:ext cx="2377440" cy="228600"/>
           </a:xfrm>
           <a:prstGeom prst="rect">
             <a:avLst/>
@@ -15499,13 +14414,13 @@
           <a:p>
             <a:pPr algn="l"/>
             <a:r>
-              <a:rPr sz="900" b="0">
-                <a:solidFill>
-                  <a:srgbClr val="404040"/>
+              <a:rPr sz="1800" b="1">
+                <a:solidFill>
+                  <a:srgbClr val="183A58"/>
                 </a:solidFill>
                 <a:latin typeface="Arial"/>
               </a:rPr>
-              <a:t>● Rapid B2C and B2B channel growth.</a:t>
+              <a:t>$3.50</a:t>
             </a:r>
           </a:p>
         </p:txBody>
@@ -15518,8 +14433,8 @@
         </p:nvSpPr>
         <p:spPr>
           <a:xfrm>
-            <a:off x="914400" y="5769864"/>
-            <a:ext cx="6400800" cy="146304"/>
+            <a:off x="9180576" y="4526280"/>
+            <a:ext cx="2377440" cy="137160"/>
           </a:xfrm>
           <a:prstGeom prst="rect">
             <a:avLst/>
@@ -15537,6 +14452,105 @@
           <a:lstStyle/>
           <a:p>
             <a:pPr algn="l"/>
+          </a:p>
+        </p:txBody>
+      </p:sp>
+      <p:sp>
+        <p:nvSpPr>
+          <p:cNvPr id="26" name="TextBox 25"/>
+          <p:cNvSpPr txBox="1"/>
+          <p:nvPr/>
+        </p:nvSpPr>
+        <p:spPr>
+          <a:xfrm>
+            <a:off x="9180576" y="4709160"/>
+            <a:ext cx="2377440" cy="228600"/>
+          </a:xfrm>
+          <a:prstGeom prst="rect">
+            <a:avLst/>
+          </a:prstGeom>
+          <a:noFill/>
+          <a:ln>
+            <a:noFill/>
+          </a:ln>
+          <a:effectLst/>
+        </p:spPr>
+        <p:txBody>
+          <a:bodyPr wrap="square">
+            <a:spAutoFit/>
+          </a:bodyPr>
+          <a:lstStyle/>
+          <a:p>
+            <a:pPr algn="l"/>
+          </a:p>
+        </p:txBody>
+      </p:sp>
+      <p:sp>
+        <p:nvSpPr>
+          <p:cNvPr id="27" name="TextBox 26"/>
+          <p:cNvSpPr txBox="1"/>
+          <p:nvPr/>
+        </p:nvSpPr>
+        <p:spPr>
+          <a:xfrm>
+            <a:off x="914400" y="5212080"/>
+            <a:ext cx="6400800" cy="182880"/>
+          </a:xfrm>
+          <a:prstGeom prst="rect">
+            <a:avLst/>
+          </a:prstGeom>
+          <a:noFill/>
+          <a:ln>
+            <a:noFill/>
+          </a:ln>
+          <a:effectLst/>
+        </p:spPr>
+        <p:txBody>
+          <a:bodyPr wrap="square">
+            <a:spAutoFit/>
+          </a:bodyPr>
+          <a:lstStyle/>
+          <a:p>
+            <a:pPr algn="l"/>
+            <a:r>
+              <a:rPr sz="1200" b="1">
+                <a:solidFill>
+                  <a:srgbClr val="183A58"/>
+                </a:solidFill>
+                <a:latin typeface="Arial"/>
+              </a:rPr>
+              <a:t>Revenue Growth Drivers</a:t>
+            </a:r>
+          </a:p>
+        </p:txBody>
+      </p:sp>
+      <p:sp>
+        <p:nvSpPr>
+          <p:cNvPr id="28" name="TextBox 27"/>
+          <p:cNvSpPr txBox="1"/>
+          <p:nvPr/>
+        </p:nvSpPr>
+        <p:spPr>
+          <a:xfrm>
+            <a:off x="914400" y="5440680"/>
+            <a:ext cx="6400800" cy="146304"/>
+          </a:xfrm>
+          <a:prstGeom prst="rect">
+            <a:avLst/>
+          </a:prstGeom>
+          <a:noFill/>
+          <a:ln>
+            <a:noFill/>
+          </a:ln>
+          <a:effectLst/>
+        </p:spPr>
+        <p:txBody>
+          <a:bodyPr wrap="square">
+            <a:spAutoFit/>
+          </a:bodyPr>
+          <a:lstStyle/>
+          <a:p>
+            <a:pPr algn="l"/>
             <a:r>
               <a:rPr sz="900" b="0">
                 <a:solidFill>
@@ -15544,14 +14558,92 @@
                 </a:solidFill>
                 <a:latin typeface="Arial"/>
               </a:rPr>
-              <a:t>● Product innovation and health positioning.</a:t>
-            </a:r>
-          </a:p>
-        </p:txBody>
-      </p:sp>
-      <p:sp>
-        <p:nvSpPr>
-          <p:cNvPr id="26" name="Rectangle 25"/>
+              <a:t>● Aggressive outlet expansion in high-traffic urban areas.</a:t>
+            </a:r>
+          </a:p>
+        </p:txBody>
+      </p:sp>
+      <p:sp>
+        <p:nvSpPr>
+          <p:cNvPr id="29" name="TextBox 28"/>
+          <p:cNvSpPr txBox="1"/>
+          <p:nvPr/>
+        </p:nvSpPr>
+        <p:spPr>
+          <a:xfrm>
+            <a:off x="914400" y="5605272"/>
+            <a:ext cx="6400800" cy="146304"/>
+          </a:xfrm>
+          <a:prstGeom prst="rect">
+            <a:avLst/>
+          </a:prstGeom>
+          <a:noFill/>
+          <a:ln>
+            <a:noFill/>
+          </a:ln>
+          <a:effectLst/>
+        </p:spPr>
+        <p:txBody>
+          <a:bodyPr wrap="square">
+            <a:spAutoFit/>
+          </a:bodyPr>
+          <a:lstStyle/>
+          <a:p>
+            <a:pPr algn="l"/>
+            <a:r>
+              <a:rPr sz="900" b="0">
+                <a:solidFill>
+                  <a:srgbClr val="404040"/>
+                </a:solidFill>
+                <a:latin typeface="Arial"/>
+              </a:rPr>
+              <a:t>● Strong B2C and B2B sales mix.</a:t>
+            </a:r>
+          </a:p>
+        </p:txBody>
+      </p:sp>
+      <p:sp>
+        <p:nvSpPr>
+          <p:cNvPr id="30" name="TextBox 29"/>
+          <p:cNvSpPr txBox="1"/>
+          <p:nvPr/>
+        </p:nvSpPr>
+        <p:spPr>
+          <a:xfrm>
+            <a:off x="914400" y="5769864"/>
+            <a:ext cx="6400800" cy="146304"/>
+          </a:xfrm>
+          <a:prstGeom prst="rect">
+            <a:avLst/>
+          </a:prstGeom>
+          <a:noFill/>
+          <a:ln>
+            <a:noFill/>
+          </a:ln>
+          <a:effectLst/>
+        </p:spPr>
+        <p:txBody>
+          <a:bodyPr wrap="square">
+            <a:spAutoFit/>
+          </a:bodyPr>
+          <a:lstStyle/>
+          <a:p>
+            <a:pPr algn="l"/>
+            <a:r>
+              <a:rPr sz="900" b="0">
+                <a:solidFill>
+                  <a:srgbClr val="404040"/>
+                </a:solidFill>
+                <a:latin typeface="Arial"/>
+              </a:rPr>
+              <a:t>● Continuous product innovation aligned with consumer trends.</a:t>
+            </a:r>
+          </a:p>
+        </p:txBody>
+      </p:sp>
+      <p:sp>
+        <p:nvSpPr>
+          <p:cNvPr id="31" name="Rectangle 30"/>
           <p:cNvSpPr/>
           <p:nvPr/>
         </p:nvSpPr>
@@ -15595,7 +14687,7 @@
       </p:sp>
       <p:sp>
         <p:nvSpPr>
-          <p:cNvPr id="27" name="TextBox 26"/>
+          <p:cNvPr id="32" name="TextBox 31"/>
           <p:cNvSpPr txBox="1"/>
           <p:nvPr/>
         </p:nvSpPr>
@@ -15627,14 +14719,14 @@
                 </a:solidFill>
                 <a:latin typeface="Arial"/>
               </a:rPr>
-              <a:t>Banker View</a:t>
-            </a:r>
-          </a:p>
-        </p:txBody>
-      </p:sp>
-      <p:sp>
-        <p:nvSpPr>
-          <p:cNvPr id="28" name="TextBox 27"/>
+              <a:t>Banker Viewpoint</a:t>
+            </a:r>
+          </a:p>
+        </p:txBody>
+      </p:sp>
+      <p:sp>
+        <p:nvSpPr>
+          <p:cNvPr id="33" name="TextBox 32"/>
           <p:cNvSpPr txBox="1"/>
           <p:nvPr/>
         </p:nvSpPr>
@@ -15666,14 +14758,14 @@
                 </a:solidFill>
                 <a:latin typeface="Arial"/>
               </a:rPr>
-              <a:t>Breadlife has outperformed the market through a disciplined hybrid model, with top-tier outlet growth, robust margins, and successful integration of B2C and B2B channels.</a:t>
-            </a:r>
-          </a:p>
-        </p:txBody>
-      </p:sp>
-      <p:sp>
-        <p:nvSpPr>
-          <p:cNvPr id="29" name="TextBox 28"/>
+              <a:t>Breadlife demonstrates robust revenue growth and expanding EBITDA margins, outperforming sector benchmarks and providing attractive upside for strategic and financial investors.</a:t>
+            </a:r>
+          </a:p>
+        </p:txBody>
+      </p:sp>
+      <p:sp>
+        <p:nvSpPr>
+          <p:cNvPr id="34" name="TextBox 33"/>
           <p:cNvSpPr txBox="1"/>
           <p:nvPr/>
         </p:nvSpPr>
@@ -15712,7 +14804,7 @@
       </p:sp>
       <p:sp>
         <p:nvSpPr>
-          <p:cNvPr id="30" name="TextBox 29"/>
+          <p:cNvPr id="35" name="TextBox 34"/>
           <p:cNvSpPr txBox="1"/>
           <p:nvPr/>
         </p:nvSpPr>
@@ -15876,7 +14968,7 @@
               </a:defRPr>
             </a:pPr>
             <a:r>
-              <a:t>Chief Executive Officer (CEO)</a:t>
+              <a:t>Chief Executive Officer – Kelvin Subowo</a:t>
             </a:r>
           </a:p>
         </p:txBody>
@@ -15913,7 +15005,7 @@
               </a:defRPr>
             </a:pPr>
             <a:r>
-              <a:t>• Leads Breadlife’s strategic vision and oversees expansion across Indonesia.</a:t>
+              <a:t>• Founder of DailyCo, Indonesia’s fastest-growing multi-brand F&amp;B company.</a:t>
             </a:r>
           </a:p>
         </p:txBody>
@@ -15927,7 +15019,7 @@
         <p:spPr>
           <a:xfrm>
             <a:off x="274320" y="2075688"/>
-            <a:ext cx="3657600" cy="493776"/>
+            <a:ext cx="3657600" cy="329184"/>
           </a:xfrm>
           <a:prstGeom prst="rect">
             <a:avLst/>
@@ -15950,7 +15042,7 @@
               </a:defRPr>
             </a:pPr>
             <a:r>
-              <a:t>• Instrumental in integrating Breadlife into The Daily Company (DailyCo) group after the 2021 acquisition.</a:t>
+              <a:t>• Led Breadlife’s acquisition and 100+ outlet expansion since 2021.</a:t>
             </a:r>
           </a:p>
         </p:txBody>
@@ -15963,8 +15055,8 @@
         </p:nvSpPr>
         <p:spPr>
           <a:xfrm>
-            <a:off x="274320" y="2624328"/>
-            <a:ext cx="3657600" cy="493776"/>
+            <a:off x="274320" y="2459736"/>
+            <a:ext cx="3657600" cy="329184"/>
           </a:xfrm>
           <a:prstGeom prst="rect">
             <a:avLst/>
@@ -15987,7 +15079,7 @@
               </a:defRPr>
             </a:pPr>
             <a:r>
-              <a:t>• Prior experience in scaling retail and foodservice businesses in Southeast Asia.</a:t>
+              <a:t>• Pioneered DailyCo’s transition from cloud kitchens to a hybrid B2C/B2B model.</a:t>
             </a:r>
           </a:p>
         </p:txBody>
@@ -16000,7 +15092,7 @@
         </p:nvSpPr>
         <p:spPr>
           <a:xfrm>
-            <a:off x="274320" y="3172968"/>
+            <a:off x="274320" y="2843784"/>
             <a:ext cx="3657600" cy="329184"/>
           </a:xfrm>
           <a:prstGeom prst="rect">
@@ -16024,7 +15116,7 @@
               </a:defRPr>
             </a:pPr>
             <a:r>
-              <a:t>• Advocates for innovation in product quality and operational efficiency.</a:t>
+              <a:t>• Oversees group strategy and growth across Indonesia.</a:t>
             </a:r>
           </a:p>
         </p:txBody>
@@ -16037,7 +15129,43 @@
         </p:nvSpPr>
         <p:spPr>
           <a:xfrm>
-            <a:off x="274320" y="3557016"/>
+            <a:off x="274320" y="3319272"/>
+            <a:ext cx="3657600" cy="320040"/>
+          </a:xfrm>
+          <a:prstGeom prst="rect">
+            <a:avLst/>
+          </a:prstGeom>
+          <a:noFill/>
+        </p:spPr>
+        <p:txBody>
+          <a:bodyPr wrap="square" lIns="36576" rIns="36576" tIns="14630" bIns="14630">
+            <a:spAutoFit/>
+          </a:bodyPr>
+          <a:lstStyle/>
+          <a:p>
+            <a:pPr algn="l">
+              <a:defRPr sz="1400" b="1">
+                <a:solidFill>
+                  <a:srgbClr val="183A58"/>
+                </a:solidFill>
+                <a:latin typeface="Arial"/>
+              </a:defRPr>
+            </a:pPr>
+            <a:r>
+              <a:t>Chief HR Officer – Anthony Gunawan</a:t>
+            </a:r>
+          </a:p>
+        </p:txBody>
+      </p:sp>
+      <p:sp>
+        <p:nvSpPr>
+          <p:cNvPr id="10" name="TextBox 9"/>
+          <p:cNvSpPr txBox="1"/>
+          <p:nvPr/>
+        </p:nvSpPr>
+        <p:spPr>
+          <a:xfrm>
+            <a:off x="274320" y="3685032"/>
             <a:ext cx="3657600" cy="329184"/>
           </a:xfrm>
           <a:prstGeom prst="rect">
@@ -16061,43 +15189,7 @@
               </a:defRPr>
             </a:pPr>
             <a:r>
-              <a:t>• Holds an MBA from a leading Asian university.</a:t>
-            </a:r>
-          </a:p>
-        </p:txBody>
-      </p:sp>
-      <p:sp>
-        <p:nvSpPr>
-          <p:cNvPr id="10" name="TextBox 9"/>
-          <p:cNvSpPr txBox="1"/>
-          <p:nvPr/>
-        </p:nvSpPr>
-        <p:spPr>
-          <a:xfrm>
-            <a:off x="274320" y="4032504"/>
-            <a:ext cx="3657600" cy="320040"/>
-          </a:xfrm>
-          <a:prstGeom prst="rect">
-            <a:avLst/>
-          </a:prstGeom>
-          <a:noFill/>
-        </p:spPr>
-        <p:txBody>
-          <a:bodyPr wrap="square" lIns="36576" rIns="36576" tIns="14630" bIns="14630">
-            <a:spAutoFit/>
-          </a:bodyPr>
-          <a:lstStyle/>
-          <a:p>
-            <a:pPr algn="l">
-              <a:defRPr sz="1400" b="1">
-                <a:solidFill>
-                  <a:srgbClr val="183A58"/>
-                </a:solidFill>
-                <a:latin typeface="Arial"/>
-              </a:defRPr>
-            </a:pPr>
-            <a:r>
-              <a:t>Chief Operating Officer (COO)</a:t>
+              <a:t>• Former Founder &amp; CEO of Waku, institutional catering leader.</a:t>
             </a:r>
           </a:p>
         </p:txBody>
@@ -16110,7 +15202,7 @@
         </p:nvSpPr>
         <p:spPr>
           <a:xfrm>
-            <a:off x="274320" y="4398264"/>
+            <a:off x="274320" y="4069080"/>
             <a:ext cx="3657600" cy="329184"/>
           </a:xfrm>
           <a:prstGeom prst="rect">
@@ -16134,7 +15226,7 @@
               </a:defRPr>
             </a:pPr>
             <a:r>
-              <a:t>• Manages daily operations for Breadlife’s 100+ outlets across Indonesia.</a:t>
+              <a:t>• Appointed CHRO at DailyCo after Waku acquisition.</a:t>
             </a:r>
           </a:p>
         </p:txBody>
@@ -16147,7 +15239,7 @@
         </p:nvSpPr>
         <p:spPr>
           <a:xfrm>
-            <a:off x="274320" y="4782312"/>
+            <a:off x="274320" y="4453128"/>
             <a:ext cx="3657600" cy="329184"/>
           </a:xfrm>
           <a:prstGeom prst="rect">
@@ -16171,7 +15263,7 @@
               </a:defRPr>
             </a:pPr>
             <a:r>
-              <a:t>• Deep experience in logistics, supply chain, and retail foodservice management.</a:t>
+              <a:t>• Drives talent retention and workforce development.</a:t>
             </a:r>
           </a:p>
         </p:txBody>
@@ -16184,7 +15276,7 @@
         </p:nvSpPr>
         <p:spPr>
           <a:xfrm>
-            <a:off x="274320" y="5166360"/>
+            <a:off x="274320" y="4837176"/>
             <a:ext cx="3657600" cy="329184"/>
           </a:xfrm>
           <a:prstGeom prst="rect">
@@ -16208,7 +15300,7 @@
               </a:defRPr>
             </a:pPr>
             <a:r>
-              <a:t>• Spearheaded systems for quality control and open kitchen transparency.</a:t>
+              <a:t>• Built Waku’s team to serve 10 million+ annual meals.</a:t>
             </a:r>
           </a:p>
         </p:txBody>
@@ -16221,7 +15313,43 @@
         </p:nvSpPr>
         <p:spPr>
           <a:xfrm>
-            <a:off x="274320" y="5550408"/>
+            <a:off x="4069080" y="1325880"/>
+            <a:ext cx="3657600" cy="320040"/>
+          </a:xfrm>
+          <a:prstGeom prst="rect">
+            <a:avLst/>
+          </a:prstGeom>
+          <a:noFill/>
+        </p:spPr>
+        <p:txBody>
+          <a:bodyPr wrap="square" lIns="36576" rIns="36576" tIns="14630" bIns="14630">
+            <a:spAutoFit/>
+          </a:bodyPr>
+          <a:lstStyle/>
+          <a:p>
+            <a:pPr algn="l">
+              <a:defRPr sz="1400" b="1">
+                <a:solidFill>
+                  <a:srgbClr val="183A58"/>
+                </a:solidFill>
+                <a:latin typeface="Arial"/>
+              </a:defRPr>
+            </a:pPr>
+            <a:r>
+              <a:t>Chief Financial Officer</a:t>
+            </a:r>
+          </a:p>
+        </p:txBody>
+      </p:sp>
+      <p:sp>
+        <p:nvSpPr>
+          <p:cNvPr id="15" name="TextBox 14"/>
+          <p:cNvSpPr txBox="1"/>
+          <p:nvPr/>
+        </p:nvSpPr>
+        <p:spPr>
+          <a:xfrm>
+            <a:off x="4069080" y="1691640"/>
             <a:ext cx="3657600" cy="329184"/>
           </a:xfrm>
           <a:prstGeom prst="rect">
@@ -16245,20 +15373,20 @@
               </a:defRPr>
             </a:pPr>
             <a:r>
-              <a:t>• Former operations lead at another top Indonesian F&amp;B chain.</a:t>
-            </a:r>
-          </a:p>
-        </p:txBody>
-      </p:sp>
-      <p:sp>
-        <p:nvSpPr>
-          <p:cNvPr id="15" name="TextBox 14"/>
-          <p:cNvSpPr txBox="1"/>
-          <p:nvPr/>
-        </p:nvSpPr>
-        <p:spPr>
-          <a:xfrm>
-            <a:off x="274320" y="5934456"/>
+              <a:t>• Oversees group-level financial strategy and reporting.</a:t>
+            </a:r>
+          </a:p>
+        </p:txBody>
+      </p:sp>
+      <p:sp>
+        <p:nvSpPr>
+          <p:cNvPr id="16" name="TextBox 15"/>
+          <p:cNvSpPr txBox="1"/>
+          <p:nvPr/>
+        </p:nvSpPr>
+        <p:spPr>
+          <a:xfrm>
+            <a:off x="4069080" y="2075688"/>
             <a:ext cx="3657600" cy="329184"/>
           </a:xfrm>
           <a:prstGeom prst="rect">
@@ -16282,43 +15410,7 @@
               </a:defRPr>
             </a:pPr>
             <a:r>
-              <a:t>• Focused on cost optimization and lean management.</a:t>
-            </a:r>
-          </a:p>
-        </p:txBody>
-      </p:sp>
-      <p:sp>
-        <p:nvSpPr>
-          <p:cNvPr id="16" name="TextBox 15"/>
-          <p:cNvSpPr txBox="1"/>
-          <p:nvPr/>
-        </p:nvSpPr>
-        <p:spPr>
-          <a:xfrm>
-            <a:off x="4069080" y="1325880"/>
-            <a:ext cx="3657600" cy="320040"/>
-          </a:xfrm>
-          <a:prstGeom prst="rect">
-            <a:avLst/>
-          </a:prstGeom>
-          <a:noFill/>
-        </p:spPr>
-        <p:txBody>
-          <a:bodyPr wrap="square" lIns="36576" rIns="36576" tIns="14630" bIns="14630">
-            <a:spAutoFit/>
-          </a:bodyPr>
-          <a:lstStyle/>
-          <a:p>
-            <a:pPr algn="l">
-              <a:defRPr sz="1400" b="1">
-                <a:solidFill>
-                  <a:srgbClr val="183A58"/>
-                </a:solidFill>
-                <a:latin typeface="Arial"/>
-              </a:defRPr>
-            </a:pPr>
-            <a:r>
-              <a:t>Chief Marketing Officer (CMO)</a:t>
+              <a:t>• Instrumental in achieving stable EBITDA margins.</a:t>
             </a:r>
           </a:p>
         </p:txBody>
@@ -16331,7 +15423,7 @@
         </p:nvSpPr>
         <p:spPr>
           <a:xfrm>
-            <a:off x="4069080" y="1691640"/>
+            <a:off x="4069080" y="2459736"/>
             <a:ext cx="3657600" cy="329184"/>
           </a:xfrm>
           <a:prstGeom prst="rect">
@@ -16355,7 +15447,7 @@
               </a:defRPr>
             </a:pPr>
             <a:r>
-              <a:t>• Oversees brand positioning, marketing strategy, and new product introductions.</a:t>
+              <a:t>• Leads financial integration for acquisitions.</a:t>
             </a:r>
           </a:p>
         </p:txBody>
@@ -16368,8 +15460,8 @@
         </p:nvSpPr>
         <p:spPr>
           <a:xfrm>
-            <a:off x="4069080" y="2075688"/>
-            <a:ext cx="3657600" cy="493776"/>
+            <a:off x="4069080" y="2843784"/>
+            <a:ext cx="3657600" cy="329184"/>
           </a:xfrm>
           <a:prstGeom prst="rect">
             <a:avLst/>
@@ -16392,7 +15484,7 @@
               </a:defRPr>
             </a:pPr>
             <a:r>
-              <a:t>• Led successful campaigns emphasizing Breadlife’s preservative-free positioning.</a:t>
+              <a:t>• Background in consumer retail and F&amp;B finance.</a:t>
             </a:r>
           </a:p>
         </p:txBody>
@@ -16405,7 +15497,43 @@
         </p:nvSpPr>
         <p:spPr>
           <a:xfrm>
-            <a:off x="4069080" y="2624328"/>
+            <a:off x="4069080" y="3319272"/>
+            <a:ext cx="3657600" cy="320040"/>
+          </a:xfrm>
+          <a:prstGeom prst="rect">
+            <a:avLst/>
+          </a:prstGeom>
+          <a:noFill/>
+        </p:spPr>
+        <p:txBody>
+          <a:bodyPr wrap="square" lIns="36576" rIns="36576" tIns="14630" bIns="14630">
+            <a:spAutoFit/>
+          </a:bodyPr>
+          <a:lstStyle/>
+          <a:p>
+            <a:pPr algn="l">
+              <a:defRPr sz="1400" b="1">
+                <a:solidFill>
+                  <a:srgbClr val="183A58"/>
+                </a:solidFill>
+                <a:latin typeface="Arial"/>
+              </a:defRPr>
+            </a:pPr>
+            <a:r>
+              <a:t>Chief Operating Officer</a:t>
+            </a:r>
+          </a:p>
+        </p:txBody>
+      </p:sp>
+      <p:sp>
+        <p:nvSpPr>
+          <p:cNvPr id="20" name="TextBox 19"/>
+          <p:cNvSpPr txBox="1"/>
+          <p:nvPr/>
+        </p:nvSpPr>
+        <p:spPr>
+          <a:xfrm>
+            <a:off x="4069080" y="3685032"/>
             <a:ext cx="3657600" cy="329184"/>
           </a:xfrm>
           <a:prstGeom prst="rect">
@@ -16429,20 +15557,20 @@
               </a:defRPr>
             </a:pPr>
             <a:r>
-              <a:t>• Background in digital marketing and consumer analytics for F&amp;B brands.</a:t>
-            </a:r>
-          </a:p>
-        </p:txBody>
-      </p:sp>
-      <p:sp>
-        <p:nvSpPr>
-          <p:cNvPr id="20" name="TextBox 19"/>
-          <p:cNvSpPr txBox="1"/>
-          <p:nvPr/>
-        </p:nvSpPr>
-        <p:spPr>
-          <a:xfrm>
-            <a:off x="4069080" y="3008376"/>
+              <a:t>• Responsible for daily operations of Breadlife’s 150+ outlets.</a:t>
+            </a:r>
+          </a:p>
+        </p:txBody>
+      </p:sp>
+      <p:sp>
+        <p:nvSpPr>
+          <p:cNvPr id="21" name="TextBox 20"/>
+          <p:cNvSpPr txBox="1"/>
+          <p:nvPr/>
+        </p:nvSpPr>
+        <p:spPr>
+          <a:xfrm>
+            <a:off x="4069080" y="4069080"/>
             <a:ext cx="3657600" cy="329184"/>
           </a:xfrm>
           <a:prstGeom prst="rect">
@@ -16466,20 +15594,20 @@
               </a:defRPr>
             </a:pPr>
             <a:r>
-              <a:t>• Developed partnerships with mall operators and transit authorities.</a:t>
-            </a:r>
-          </a:p>
-        </p:txBody>
-      </p:sp>
-      <p:sp>
-        <p:nvSpPr>
-          <p:cNvPr id="21" name="TextBox 20"/>
-          <p:cNvSpPr txBox="1"/>
-          <p:nvPr/>
-        </p:nvSpPr>
-        <p:spPr>
-          <a:xfrm>
-            <a:off x="4069080" y="3392424"/>
+              <a:t>• Manages logistics, supply chain, and outlet expansion.</a:t>
+            </a:r>
+          </a:p>
+        </p:txBody>
+      </p:sp>
+      <p:sp>
+        <p:nvSpPr>
+          <p:cNvPr id="22" name="TextBox 21"/>
+          <p:cNvSpPr txBox="1"/>
+          <p:nvPr/>
+        </p:nvSpPr>
+        <p:spPr>
+          <a:xfrm>
+            <a:off x="4069080" y="4453128"/>
             <a:ext cx="3657600" cy="329184"/>
           </a:xfrm>
           <a:prstGeom prst="rect">
@@ -16503,43 +15631,7 @@
               </a:defRPr>
             </a:pPr>
             <a:r>
-              <a:t>• Published articles on modern retail branding in Indonesia.</a:t>
-            </a:r>
-          </a:p>
-        </p:txBody>
-      </p:sp>
-      <p:sp>
-        <p:nvSpPr>
-          <p:cNvPr id="22" name="TextBox 21"/>
-          <p:cNvSpPr txBox="1"/>
-          <p:nvPr/>
-        </p:nvSpPr>
-        <p:spPr>
-          <a:xfrm>
-            <a:off x="4069080" y="3867912"/>
-            <a:ext cx="3657600" cy="320040"/>
-          </a:xfrm>
-          <a:prstGeom prst="rect">
-            <a:avLst/>
-          </a:prstGeom>
-          <a:noFill/>
-        </p:spPr>
-        <p:txBody>
-          <a:bodyPr wrap="square" lIns="36576" rIns="36576" tIns="14630" bIns="14630">
-            <a:spAutoFit/>
-          </a:bodyPr>
-          <a:lstStyle/>
-          <a:p>
-            <a:pPr algn="l">
-              <a:defRPr sz="1400" b="1">
-                <a:solidFill>
-                  <a:srgbClr val="183A58"/>
-                </a:solidFill>
-                <a:latin typeface="Arial"/>
-              </a:defRPr>
-            </a:pPr>
-            <a:r>
-              <a:t>Head of Institutional Sales (B2B Lead)</a:t>
+              <a:t>• Ensures product quality and consistency at scale.</a:t>
             </a:r>
           </a:p>
         </p:txBody>
@@ -16552,8 +15644,8 @@
         </p:nvSpPr>
         <p:spPr>
           <a:xfrm>
-            <a:off x="4069080" y="4233672"/>
-            <a:ext cx="3657600" cy="493776"/>
+            <a:off x="4069080" y="4837176"/>
+            <a:ext cx="3657600" cy="329184"/>
           </a:xfrm>
           <a:prstGeom prst="rect">
             <a:avLst/>
@@ -16576,7 +15668,7 @@
               </a:defRPr>
             </a:pPr>
             <a:r>
-              <a:t>• Drives Breadlife’s B2B institutional channel, including catering and franchising.</a:t>
+              <a:t>• Experience in large-format food retail operations.</a:t>
             </a:r>
           </a:p>
         </p:txBody>
@@ -16584,154 +15676,6 @@
       <p:sp>
         <p:nvSpPr>
           <p:cNvPr id="24" name="TextBox 23"/>
-          <p:cNvSpPr txBox="1"/>
-          <p:nvPr/>
-        </p:nvSpPr>
-        <p:spPr>
-          <a:xfrm>
-            <a:off x="4069080" y="4782312"/>
-            <a:ext cx="3657600" cy="329184"/>
-          </a:xfrm>
-          <a:prstGeom prst="rect">
-            <a:avLst/>
-          </a:prstGeom>
-          <a:noFill/>
-        </p:spPr>
-        <p:txBody>
-          <a:bodyPr wrap="square" lIns="36576" rIns="36576" tIns="10972" bIns="10972"/>
-          <a:lstStyle/>
-          <a:p>
-            <a:pPr algn="l">
-              <a:lnSpc>
-                <a:spcPct val="120000"/>
-              </a:lnSpc>
-              <a:defRPr sz="1100">
-                <a:solidFill>
-                  <a:srgbClr val="404040"/>
-                </a:solidFill>
-                <a:latin typeface="Arial"/>
-              </a:defRPr>
-            </a:pPr>
-            <a:r>
-              <a:t>• Established agreements with corporate and government clients.</a:t>
-            </a:r>
-          </a:p>
-        </p:txBody>
-      </p:sp>
-      <p:sp>
-        <p:nvSpPr>
-          <p:cNvPr id="25" name="TextBox 24"/>
-          <p:cNvSpPr txBox="1"/>
-          <p:nvPr/>
-        </p:nvSpPr>
-        <p:spPr>
-          <a:xfrm>
-            <a:off x="4069080" y="5166360"/>
-            <a:ext cx="3657600" cy="329184"/>
-          </a:xfrm>
-          <a:prstGeom prst="rect">
-            <a:avLst/>
-          </a:prstGeom>
-          <a:noFill/>
-        </p:spPr>
-        <p:txBody>
-          <a:bodyPr wrap="square" lIns="36576" rIns="36576" tIns="10972" bIns="10972"/>
-          <a:lstStyle/>
-          <a:p>
-            <a:pPr algn="l">
-              <a:lnSpc>
-                <a:spcPct val="120000"/>
-              </a:lnSpc>
-              <a:defRPr sz="1100">
-                <a:solidFill>
-                  <a:srgbClr val="404040"/>
-                </a:solidFill>
-                <a:latin typeface="Arial"/>
-              </a:defRPr>
-            </a:pPr>
-            <a:r>
-              <a:t>• Experience in building sales teams and expanding into new markets.</a:t>
-            </a:r>
-          </a:p>
-        </p:txBody>
-      </p:sp>
-      <p:sp>
-        <p:nvSpPr>
-          <p:cNvPr id="26" name="TextBox 25"/>
-          <p:cNvSpPr txBox="1"/>
-          <p:nvPr/>
-        </p:nvSpPr>
-        <p:spPr>
-          <a:xfrm>
-            <a:off x="4069080" y="5550408"/>
-            <a:ext cx="3657600" cy="329184"/>
-          </a:xfrm>
-          <a:prstGeom prst="rect">
-            <a:avLst/>
-          </a:prstGeom>
-          <a:noFill/>
-        </p:spPr>
-        <p:txBody>
-          <a:bodyPr wrap="square" lIns="36576" rIns="36576" tIns="10972" bIns="10972"/>
-          <a:lstStyle/>
-          <a:p>
-            <a:pPr algn="l">
-              <a:lnSpc>
-                <a:spcPct val="120000"/>
-              </a:lnSpc>
-              <a:defRPr sz="1100">
-                <a:solidFill>
-                  <a:srgbClr val="404040"/>
-                </a:solidFill>
-                <a:latin typeface="Arial"/>
-              </a:defRPr>
-            </a:pPr>
-            <a:r>
-              <a:t>• Previously grew institutional sales at a major Indonesian bakery supplier.</a:t>
-            </a:r>
-          </a:p>
-        </p:txBody>
-      </p:sp>
-      <p:sp>
-        <p:nvSpPr>
-          <p:cNvPr id="27" name="TextBox 26"/>
-          <p:cNvSpPr txBox="1"/>
-          <p:nvPr/>
-        </p:nvSpPr>
-        <p:spPr>
-          <a:xfrm>
-            <a:off x="4069080" y="5934456"/>
-            <a:ext cx="3657600" cy="329184"/>
-          </a:xfrm>
-          <a:prstGeom prst="rect">
-            <a:avLst/>
-          </a:prstGeom>
-          <a:noFill/>
-        </p:spPr>
-        <p:txBody>
-          <a:bodyPr wrap="square" lIns="36576" rIns="36576" tIns="10972" bIns="10972"/>
-          <a:lstStyle/>
-          <a:p>
-            <a:pPr algn="l">
-              <a:lnSpc>
-                <a:spcPct val="120000"/>
-              </a:lnSpc>
-              <a:defRPr sz="1100">
-                <a:solidFill>
-                  <a:srgbClr val="404040"/>
-                </a:solidFill>
-                <a:latin typeface="Arial"/>
-              </a:defRPr>
-            </a:pPr>
-            <a:r>
-              <a:t>• Focused on securing long-term contracts and scaling B2B revenue.</a:t>
-            </a:r>
-          </a:p>
-        </p:txBody>
-      </p:sp>
-      <p:sp>
-        <p:nvSpPr>
-          <p:cNvPr id="28" name="TextBox 27"/>
           <p:cNvSpPr txBox="1"/>
           <p:nvPr/>
         </p:nvSpPr>
@@ -16767,7 +15711,7 @@
       </p:sp>
       <p:sp>
         <p:nvSpPr>
-          <p:cNvPr id="29" name="TextBox 28"/>
+          <p:cNvPr id="25" name="TextBox 24"/>
           <p:cNvSpPr txBox="1"/>
           <p:nvPr/>
         </p:nvSpPr>
@@ -16849,7 +15793,7 @@
                 </a:solidFill>
                 <a:latin typeface="Arial"/>
               </a:rPr>
-              <a:t>Growth Strategy &amp; Financial Projections</a:t>
+              <a:t>Growth Strategy &amp; Projections</a:t>
             </a:r>
           </a:p>
         </p:txBody>
@@ -17014,7 +15958,7 @@
                 </a:solidFill>
                 <a:latin typeface="Arial"/>
               </a:rPr>
-              <a:t>Accelerate rollout of new outlets, targeting 150 by 2027, with emphasis on high-traffic, transit, and secondary cities.</a:t>
+              <a:t>Continued outlet expansion in high-traffic transit hubs and malls.</a:t>
             </a:r>
           </a:p>
         </p:txBody>
@@ -17097,7 +16041,7 @@
                 </a:solidFill>
                 <a:latin typeface="Arial"/>
               </a:rPr>
-              <a:t>Launch healthier bread options (whole grain, gluten-free, organic) and innovate core menu.</a:t>
+              <a:t>Launch of new artisanal and healthy bread products.</a:t>
             </a:r>
           </a:p>
         </p:txBody>
@@ -17180,7 +16124,7 @@
                 </a:solidFill>
                 <a:latin typeface="Arial"/>
               </a:rPr>
-              <a:t>Invest in digital channels (online ordering, loyalty apps, delivery partnerships).</a:t>
+              <a:t>Investment in digital platforms and delivery partnerships.</a:t>
             </a:r>
           </a:p>
         </p:txBody>
@@ -17263,7 +16207,7 @@
                 </a:solidFill>
                 <a:latin typeface="Arial"/>
               </a:rPr>
-              <a:t>Expand B2B catering and institutional sales for revenue diversification.</a:t>
+              <a:t>Scaling B2B institutional sales for revenue diversification.</a:t>
             </a:r>
           </a:p>
         </p:txBody>
@@ -17346,7 +16290,7 @@
                 </a:solidFill>
                 <a:latin typeface="Arial"/>
               </a:rPr>
-              <a:t>Leverage DailyCo’s procurement and operational infrastructure for cost and margin improvements.</a:t>
+              <a:t>Supply chain automation and staff training for margin improvement.</a:t>
             </a:r>
           </a:p>
         </p:txBody>
@@ -17743,7 +16687,7 @@
                 <a:gridCol w="640080"/>
                 <a:gridCol w="822960"/>
               </a:tblGrid>
-              <a:tr h="342900">
+              <a:tr h="457200">
                 <a:tc>
                   <a:txBody>
                     <a:bodyPr/>
@@ -17837,7 +16781,7 @@
                   </a:tcPr>
                 </a:tc>
               </a:tr>
-              <a:tr h="342900">
+              <a:tr h="457200">
                 <a:tc>
                   <a:txBody>
                     <a:bodyPr/>
@@ -17931,7 +16875,7 @@
                   </a:tcPr>
                 </a:tc>
               </a:tr>
-              <a:tr h="342900">
+              <a:tr h="457200">
                 <a:tc>
                   <a:txBody>
                     <a:bodyPr/>
@@ -18023,84 +16967,6 @@
                       <a:srgbClr val="F0F0F0"/>
                     </a:solidFill>
                   </a:tcPr>
-                </a:tc>
-              </a:tr>
-              <a:tr h="342900">
-                <a:tc>
-                  <a:txBody>
-                    <a:bodyPr/>
-                    <a:lstStyle/>
-                    <a:p>
-                      <a:pPr algn="ctr"/>
-                      <a:r>
-                        <a:rPr sz="800">
-                          <a:solidFill>
-                            <a:srgbClr val="404040"/>
-                          </a:solidFill>
-                          <a:latin typeface="Arial"/>
-                        </a:rPr>
-                        <a:t>category</a:t>
-                      </a:r>
-                    </a:p>
-                  </a:txBody>
-                  <a:tcPr marL="45720" marR="45720" marT="45720" marB="45720"/>
-                </a:tc>
-                <a:tc>
-                  <a:txBody>
-                    <a:bodyPr/>
-                    <a:lstStyle/>
-                    <a:p>
-                      <a:pPr algn="ctr"/>
-                      <a:r>
-                        <a:rPr sz="800">
-                          <a:solidFill>
-                            <a:srgbClr val="404040"/>
-                          </a:solidFill>
-                          <a:latin typeface="Arial"/>
-                        </a:rPr>
-                        <a:t>our_company</a:t>
-                      </a:r>
-                    </a:p>
-                  </a:txBody>
-                  <a:tcPr marL="45720" marR="45720" marT="45720" marB="45720"/>
-                </a:tc>
-                <a:tc>
-                  <a:txBody>
-                    <a:bodyPr/>
-                    <a:lstStyle/>
-                    <a:p>
-                      <a:pPr algn="ctr"/>
-                      <a:r>
-                        <a:rPr sz="800">
-                          <a:solidFill>
-                            <a:srgbClr val="404040"/>
-                          </a:solidFill>
-                          <a:latin typeface="Arial"/>
-                        </a:rPr>
-                        <a:t>competitor_a</a:t>
-                      </a:r>
-                    </a:p>
-                  </a:txBody>
-                  <a:tcPr marL="45720" marR="45720" marT="45720" marB="45720"/>
-                </a:tc>
-                <a:tc>
-                  <a:txBody>
-                    <a:bodyPr/>
-                    <a:lstStyle/>
-                    <a:p>
-                      <a:pPr algn="ctr"/>
-                      <a:r>
-                        <a:rPr sz="800">
-                          <a:solidFill>
-                            <a:srgbClr val="404040"/>
-                          </a:solidFill>
-                          <a:latin typeface="Arial"/>
-                        </a:rPr>
-                        <a:t>competitor_b</a:t>
-                      </a:r>
-                    </a:p>
-                  </a:txBody>
-                  <a:tcPr marL="45720" marR="45720" marT="45720" marB="45720"/>
                 </a:tc>
               </a:tr>
             </a:tbl>
